--- a/onboarding/ONB02_Como_vamos_a_trabajar_juntas.pptx
+++ b/onboarding/ONB02_Como_vamos_a_trabajar_juntas.pptx
@@ -511,7 +511,7 @@
             <a:r>
               <a:rPr lang="en-US" dirty="0"/>
               <a:t>Antes de empezar, quiero contarte cómo vamos a trabajar juntas durante estos cinco meses para que puedas aprovechar al máximo todo el acompañamiento que vas a tener dentro de AT WORK.
-Quiero que desde el principio sepas qué espacios tenés disponibles, cómo podés pedirme ayuda, cómo funcionan nuestras sesiones y dónde vamos a ir trabajando cada cosa.
+Quiero que desde el principio sepas qué espacios tienes disponibles, cómo puedes pedirme ayuda, cómo funcionan nuestras sesiones y dónde vamos a ir trabajando cada cosa.
 La idea es que te sientas acompañada, contenida y con claridad sobre qué hacer en cada momento, para que puedas enfocarte en tu proceso y en avanzar con tu inglés.</a:t>
             </a:r>
             <a:endParaRPr lang="en-US" dirty="0"/>
@@ -602,7 +602,7 @@
               <a:rPr lang="en-US" dirty="0"/>
               <a:t>Dentro de esta clase vas a encontrar también tu Acuerdo de Trabajo.
 Es un documento simple donde están por escrito algunos aspectos prácticos del programa para que las dos tengamos toda la información clara desde el comienzo.
-Si todavía no lo firmaste, descargalo, completalo y subilo a tu carpeta personal de AT WORK, dentro de 01 · MI CONTEXTO PROFESIONAL. Así queda guardado junto con toda la información de inicio de tu proceso.</a:t>
+Si todavía no lo firmaste, descárgalo, complétalo y súbelo a tu carpeta personal de AT WORK, dentro de 01 · MI CONTEXTO PROFESIONAL. Así queda guardado junto con toda la información de inicio de tu proceso.</a:t>
             </a:r>
             <a:endParaRPr lang="en-US" dirty="0"/>
           </a:p>
@@ -691,9 +691,9 @@
             <a:r>
               <a:rPr lang="en-US" dirty="0"/>
               <a:t>Nuestras sesiones 1:1 son el espacio donde vamos a poder trabajar con más profundidad sobre lo que esté pasando en tu inglés y en tu trabajo real.
-Cada horario queda reservado especialmente para vos. Si en algún momento necesitás cambiar una sesión, podés hacerlo avisándome con al menos 24 horas de anticipación para que podamos reorganizarnos.
-Si el cambio se pide con menos de 24 horas, esa sesión se considera utilizada, simplemente porque ese espacio ya quedó reservado para vos y generalmente no puedo reasignarlo con tan poco tiempo.
-Y si un día llegás un poquito más tarde, no pasa nada: trabajamos con el tiempo que nos quede dentro del horario reservado.
+Cada horario queda reservado especialmente para ti. Si en algún momento necesitas cambiar una sesión, puedes hacerlo avisándome con al menos 24 horas de anticipación para que podamos reorganizarnos.
+Si el cambio se pide con menos de 24 horas, esa sesión se considera utilizada, simplemente porque ese espacio ya quedó reservado para ti y generalmente no puedo reasignarlo con tan poco tiempo.
+Y si un día llegas un poquito más tarde, no pasa nada: trabajamos con el tiempo que nos quede dentro del horario reservado.
 Obviamente, si soy yo quien necesita mover una sesión, la reprogramamos sin problema.</a:t>
             </a:r>
             <a:endParaRPr lang="en-US" dirty="0"/>
@@ -783,9 +783,9 @@
             <a:r>
               <a:rPr lang="en-US" dirty="0"/>
               <a:t>También quiero que sepas que durante AT WORK no estás sola entre una sesión y la siguiente.
-Si te surge una duda, querés compartir algo, necesitás feedback o simplemente querés contarme una situación que pasó en tu trabajo, podés hacerlo dentro de la comunidad de WhatsApp.
-La comunidad va a ser nuestro espacio principal de comunicación durante el programa. Ahí podés compartir prácticas, hacer preguntas, pedirme feedback, contar un avance o algo que aprendiste durante la semana.
-Si se trata de un tema administrativo o de algo que preferís mantener en privado, ahí sí podés escribirme directamente.
+Si te surge una duda, quieres compartir algo, necesitas feedback o simplemente quieres contarme una situación que pasó en tu trabajo, puedes hacerlo dentro de la comunidad de WhatsApp.
+La comunidad va a ser nuestro espacio principal de comunicación durante el programa. Ahí puedes compartir prácticas, hacer preguntas, pedirme feedback, contar un avance o algo que aprendiste durante la semana.
+Si se trata de un tema administrativo o de algo que prefieres mantener en privado, ahí sí puedes escribirme directamente.
 Y cuando una situación necesita más contexto, análisis o trabajo en profundidad, la llevamos a nuestra sesión 1:1 para poder trabajarla bien.
 La idea es que tengas claro dónde llevar cada cosa para que el acompañamiento sea simple, cercano y ordenado durante todo el proceso.</a:t>
             </a:r>
@@ -875,9 +875,9 @@
           <a:p>
             <a:r>
               <a:rPr lang="en-US" dirty="0"/>
-              <a:t>Durante la semana, podés dejarme tus dudas, prácticas o situaciones en la comunidad siempre que lo necesites.
+              <a:t>Durante la semana, puedes dejarme tus dudas, prácticas o situaciones en la comunidad siempre que lo necesites.
 Yo voy revisando y respondiendo estos mensajes de lunes a viernes, entre las 9 y las 18, horario de Buenos Aires.
-Y si algo te surge fuera de ese horario o durante el fin de semana, podés escribirlo igual con total tranquilidad. El mensaje queda ahí y yo lo retomo cuando vuelva a estar disponible.
+Y si algo te surge fuera de ese horario o durante el fin de semana, puedes escribirlo igual con total tranquilidad. El mensaje queda ahí y yo lo retomo cuando vuelva a estar disponible.
 La idea es que no tengas que guardarte una duda hasta nuestra próxima sesión ni depender de acordarte después, y que al mismo tiempo podamos sostener un acompañamiento cercano, claro y ordenado durante todo el proceso.</a:t>
             </a:r>
             <a:endParaRPr lang="en-US" dirty="0"/>
@@ -1059,7 +1059,7 @@
               <a:rPr lang="en-US" dirty="0"/>
               <a:t>Una de las cosas más importantes de AT WORK es que no vamos a trabajar con un inglés desconectado de tu vida profesional.
 Quiero que puedas traer situaciones y materiales reales de tu trabajo: presentaciones, emails, transcripciones, capturas, documentos, reuniones o conversaciones que necesites resolver mejor.
-Obviamente, si trabajás con información confidencial o sensible, podés anonimizar nombres, cifras o cualquier dato interno antes de compartirlo.
+Obviamente, si trabajas con información confidencial o sensible, puedes anonimizar nombres, cifras o cualquier dato interno antes de compartirlo.
 No necesito conocer información privada de tu empresa. Lo que necesito es entender la situación comunicativa para poder ayudarte a entrenarla.</a:t>
             </a:r>
             <a:endParaRPr lang="en-US" dirty="0"/>
@@ -1148,11 +1148,11 @@
           <a:p>
             <a:r>
               <a:rPr lang="en-US" dirty="0"/>
-              <a:t>Y por último, quiero que tengas algo muy claro: no necesitás llegar sabiendo exactamente qué practicar ni diagnosticar sola qué te está pasando.
+              <a:t>Y por último, quiero que tengas algo muy claro: no necesitas llegar sabiendo exactamente qué practicar ni diagnosticar sola qué te está pasando.
 Para eso estoy yo.
-Vos vas a traer tu realidad: las reuniones que tenés, las situaciones que te cuestan, lo que salió bien, lo que no salió como querías y las dudas que vayan apareciendo.
+Tú vas a traer tu realidad: las reuniones que tienes, las situaciones que te cuestan, lo que salió bien, lo que no salió como querías y las dudas que vayan apareciendo.
 Y mi trabajo es ayudarte a entender qué está interfiriendo, elegir qué necesitamos entrenar y darte dirección, herramientas y feedback para que puedas seguir avanzando.
-No espero semanas perfectas ni que hagas todo impecablemente. Quiero que podamos sostener un proceso real, constante y conectado con lo que necesitás en tu trabajo.</a:t>
+No espero semanas perfectas ni que hagas todo impecablemente. Quiero que podamos sostener un proceso real, constante y conectado con lo que necesitas en tu trabajo.</a:t>
             </a:r>
             <a:endParaRPr lang="en-US" dirty="0"/>
           </a:p>
@@ -1240,9 +1240,9 @@
           <a:p>
             <a:r>
               <a:rPr lang="en-US" dirty="0"/>
-              <a:t>Con esto ya sabés cómo vamos a acompañarnos durante estos cinco meses y qué espacios tenés disponibles dentro de AT WORK.
-Ahora descargá el Acuerdo de Trabajo que está adjunto a esta clase, completalo, firmalo y subilo a tu carpeta personal de AT WORK, dentro de 01 · MI CONTEXTO PROFESIONAL.
-Y después seguí con la próxima clase, donde te voy a mostrar cómo se organiza todo el ecosistema AT WORK para que sepas exactamente dónde encontrar cada cosa.</a:t>
+              <a:t>Con esto ya sabes cómo vamos a acompañarnos durante estos cinco meses y qué espacios tienes disponibles dentro de AT WORK.
+Ahora descarga el Acuerdo de Trabajo que está adjunto a esta clase, complétalo, fírmalo y súbelo a tu carpeta personal de AT WORK, dentro de 01 · MI CONTEXTO PROFESIONAL.
+Y después sigue con la próxima clase, donde te voy a mostrar cómo se organiza todo el ecosistema AT WORK para que sepas exactamente dónde encontrar cada cosa.</a:t>
             </a:r>
             <a:endParaRPr lang="en-US" dirty="0"/>
           </a:p>
@@ -1623,47 +1623,18 @@
         </p:nvSpPr>
         <p:spPr>
           <a:xfrm>
-            <a:off x="7223760" y="548640"/>
-            <a:ext cx="6583680" cy="6583680"/>
-          </a:xfrm>
-          <a:prstGeom prst="ellipse">
-            <a:avLst/>
-          </a:prstGeom>
-          <a:solidFill>
-            <a:srgbClr val="81552E">
-              <a:alpha val="55000"/>
-            </a:srgbClr>
+            <a:off x="640080" y="685800"/>
+            <a:ext cx="1874520" cy="384048"/>
+          </a:xfrm>
+          <a:prstGeom prst="roundRect">
+            <a:avLst>
+              <a:gd name="adj" fmla="val 50000"/>
+            </a:avLst>
+          </a:prstGeom>
+          <a:solidFill>
+            <a:srgbClr val="C68C6C"/>
           </a:solidFill>
           <a:ln w="12700">
-            <a:solidFill>
-              <a:srgbClr val="81552E">
-                <a:alpha val="55000"/>
-              </a:srgbClr>
-            </a:solidFill>
-            <a:prstDash val="solid"/>
-          </a:ln>
-        </p:spPr>
-      </p:sp>
-      <p:sp>
-        <p:nvSpPr>
-          <p:cNvPr id="4" name="Shape 1"/>
-          <p:cNvSpPr/>
-          <p:nvPr/>
-        </p:nvSpPr>
-        <p:spPr>
-          <a:xfrm>
-            <a:off x="7772400" y="1097280"/>
-            <a:ext cx="5486400" cy="5486400"/>
-          </a:xfrm>
-          <a:prstGeom prst="ellipse">
-            <a:avLst/>
-          </a:prstGeom>
-          <a:solidFill>
-            <a:srgbClr val="3F1E0D">
-              <a:alpha val="0"/>
-            </a:srgbClr>
-          </a:solidFill>
-          <a:ln w="15875">
             <a:solidFill>
               <a:srgbClr val="C68C6C"/>
             </a:solidFill>
@@ -1671,9 +1642,129 @@
           </a:ln>
         </p:spPr>
       </p:sp>
+      <p:sp>
+        <p:nvSpPr>
+          <p:cNvPr id="4" name="Text 1"/>
+          <p:cNvSpPr txBox="1"/>
+          <p:nvPr/>
+        </p:nvSpPr>
+        <p:spPr>
+          <a:xfrm>
+            <a:off x="640080" y="685800"/>
+            <a:ext cx="1874520" cy="384048"/>
+          </a:xfrm>
+          <a:prstGeom prst="rect">
+            <a:avLst/>
+          </a:prstGeom>
+          <a:noFill/>
+          <a:ln/>
+        </p:spPr>
+        <p:txBody>
+          <a:bodyPr wrap="square" lIns="0" tIns="0" rIns="0" bIns="0" rtlCol="0" anchor="ctr"/>
+          <a:lstStyle/>
+          <a:p>
+            <a:pPr algn="ctr" indent="0" marL="0">
+              <a:buNone/>
+            </a:pPr>
+            <a:r>
+              <a:rPr lang="en-US" sz="1100" b="1" spc="200" kern="0" dirty="0">
+                <a:solidFill>
+                  <a:srgbClr val="3F1E0D"/>
+                </a:solidFill>
+                <a:latin typeface="Open Sans" pitchFamily="34" charset="0"/>
+                <a:ea typeface="Open Sans" pitchFamily="34" charset="-122"/>
+                <a:cs typeface="Open Sans" pitchFamily="34" charset="-120"/>
+              </a:rPr>
+              <a:t>ONBOARDING · 02</a:t>
+            </a:r>
+            <a:endParaRPr lang="en-US" sz="1100" dirty="0"/>
+          </a:p>
+        </p:txBody>
+      </p:sp>
+      <p:sp>
+        <p:nvSpPr>
+          <p:cNvPr id="5" name="Text 2"/>
+          <p:cNvSpPr txBox="1"/>
+          <p:nvPr/>
+        </p:nvSpPr>
+        <p:spPr>
+          <a:xfrm>
+            <a:off x="640080" y="1325880"/>
+            <a:ext cx="5760720" cy="1783080"/>
+          </a:xfrm>
+          <a:prstGeom prst="rect">
+            <a:avLst/>
+          </a:prstGeom>
+          <a:noFill/>
+          <a:ln/>
+        </p:spPr>
+        <p:txBody>
+          <a:bodyPr wrap="square" lIns="0" tIns="0" rIns="0" bIns="0" rtlCol="0" anchor="t"/>
+          <a:lstStyle/>
+          <a:p>
+            <a:pPr indent="0" marL="0">
+              <a:lnSpc>
+                <a:spcPct val="90000"/>
+              </a:lnSpc>
+              <a:buNone/>
+            </a:pPr>
+            <a:r>
+              <a:rPr lang="en-US" sz="5000" b="1" dirty="0">
+                <a:solidFill>
+                  <a:srgbClr val="F8F5EE"/>
+                </a:solidFill>
+                <a:latin typeface="Source Serif Pro" pitchFamily="34" charset="0"/>
+                <a:ea typeface="Source Serif Pro" pitchFamily="34" charset="-122"/>
+                <a:cs typeface="Source Serif Pro" pitchFamily="34" charset="-120"/>
+              </a:rPr>
+              <a:t>Cómo vamos a trabajar juntas</a:t>
+            </a:r>
+            <a:endParaRPr lang="en-US" sz="5000" dirty="0"/>
+          </a:p>
+        </p:txBody>
+      </p:sp>
+      <p:sp>
+        <p:nvSpPr>
+          <p:cNvPr id="6" name="Text 3"/>
+          <p:cNvSpPr txBox="1"/>
+          <p:nvPr/>
+        </p:nvSpPr>
+        <p:spPr>
+          <a:xfrm>
+            <a:off x="640080" y="3063240"/>
+            <a:ext cx="5486400" cy="731520"/>
+          </a:xfrm>
+          <a:prstGeom prst="rect">
+            <a:avLst/>
+          </a:prstGeom>
+          <a:noFill/>
+          <a:ln/>
+        </p:spPr>
+        <p:txBody>
+          <a:bodyPr wrap="square" lIns="0" tIns="0" rIns="0" bIns="0" rtlCol="0" anchor="t"/>
+          <a:lstStyle/>
+          <a:p>
+            <a:pPr indent="0" marL="0">
+              <a:buNone/>
+            </a:pPr>
+            <a:r>
+              <a:rPr lang="en-US" sz="1700" i="1" dirty="0">
+                <a:solidFill>
+                  <a:srgbClr val="EDE5CC"/>
+                </a:solidFill>
+                <a:latin typeface="Source Serif Pro" pitchFamily="34" charset="0"/>
+                <a:ea typeface="Source Serif Pro" pitchFamily="34" charset="-122"/>
+                <a:cs typeface="Source Serif Pro" pitchFamily="34" charset="-120"/>
+              </a:rPr>
+              <a:t>Para que puedas aprovechar al máximo todo el acompañamiento que vas a tener dentro de AT WORK</a:t>
+            </a:r>
+            <a:endParaRPr lang="en-US" sz="1700" dirty="0"/>
+          </a:p>
+        </p:txBody>
+      </p:sp>
       <p:pic>
         <p:nvPicPr>
-          <p:cNvPr id="5" name="Image 0" descr="preencoded.png">    </p:cNvPr>
+          <p:cNvPr id="7" name="Image 0" descr="preencoded.png">    </p:cNvPr>
           <p:cNvPicPr>
             <a:picLocks noChangeAspect="1"/>
           </p:cNvPicPr>
@@ -1687,8 +1778,8 @@
         </p:blipFill>
         <p:spPr>
           <a:xfrm>
-            <a:off x="8001000" y="2514600"/>
-            <a:ext cx="3566160" cy="1627607"/>
+            <a:off x="8732520" y="502920"/>
+            <a:ext cx="2743200" cy="1252005"/>
           </a:xfrm>
           <a:prstGeom prst="rect">
             <a:avLst/>
@@ -1697,19 +1788,87 @@
       </p:pic>
       <p:sp>
         <p:nvSpPr>
-          <p:cNvPr id="6" name="Shape 2"/>
+          <p:cNvPr id="8" name="Text 4"/>
+          <p:cNvSpPr txBox="1"/>
+          <p:nvPr/>
+        </p:nvSpPr>
+        <p:spPr>
+          <a:xfrm>
+            <a:off x="7086600" y="2103120"/>
+            <a:ext cx="4462272" cy="320040"/>
+          </a:xfrm>
+          <a:prstGeom prst="rect">
+            <a:avLst/>
+          </a:prstGeom>
+          <a:noFill/>
+          <a:ln/>
+        </p:spPr>
+        <p:txBody>
+          <a:bodyPr wrap="square" lIns="0" tIns="0" rIns="0" bIns="0" rtlCol="0" anchor="ctr"/>
+          <a:lstStyle/>
+          <a:p>
+            <a:pPr indent="0" marL="0">
+              <a:buNone/>
+            </a:pPr>
+            <a:r>
+              <a:rPr lang="en-US" sz="1100" b="1" spc="300" kern="0" dirty="0">
+                <a:solidFill>
+                  <a:srgbClr val="C68C6C"/>
+                </a:solidFill>
+                <a:latin typeface="Open Sans" pitchFamily="34" charset="0"/>
+                <a:ea typeface="Open Sans" pitchFamily="34" charset="-122"/>
+                <a:cs typeface="Open Sans" pitchFamily="34" charset="-120"/>
+              </a:rPr>
+              <a:t>EN ESTA CLASE VAS A SABER</a:t>
+            </a:r>
+            <a:endParaRPr lang="en-US" sz="1100" dirty="0"/>
+          </a:p>
+        </p:txBody>
+      </p:sp>
+      <p:sp>
+        <p:nvSpPr>
+          <p:cNvPr id="9" name="Shape 5"/>
           <p:cNvSpPr/>
           <p:nvPr/>
         </p:nvSpPr>
         <p:spPr>
           <a:xfrm>
-            <a:off x="640080" y="685800"/>
-            <a:ext cx="1874520" cy="384048"/>
+            <a:off x="7086600" y="2560320"/>
+            <a:ext cx="4462272" cy="749808"/>
           </a:xfrm>
           <a:prstGeom prst="roundRect">
             <a:avLst>
-              <a:gd name="adj" fmla="val 50000"/>
+              <a:gd name="adj" fmla="val 17073"/>
             </a:avLst>
+          </a:prstGeom>
+          <a:solidFill>
+            <a:srgbClr val="81552E">
+              <a:alpha val="60000"/>
+            </a:srgbClr>
+          </a:solidFill>
+          <a:ln w="12700">
+            <a:solidFill>
+              <a:srgbClr val="81552E">
+                <a:alpha val="60000"/>
+              </a:srgbClr>
+            </a:solidFill>
+            <a:prstDash val="solid"/>
+          </a:ln>
+        </p:spPr>
+      </p:sp>
+      <p:sp>
+        <p:nvSpPr>
+          <p:cNvPr id="10" name="Shape 6"/>
+          <p:cNvSpPr/>
+          <p:nvPr/>
+        </p:nvSpPr>
+        <p:spPr>
+          <a:xfrm>
+            <a:off x="7251192" y="2688336"/>
+            <a:ext cx="493776" cy="493776"/>
+          </a:xfrm>
+          <a:prstGeom prst="ellipse">
+            <a:avLst/>
           </a:prstGeom>
           <a:solidFill>
             <a:srgbClr val="C68C6C"/>
@@ -1722,16 +1881,40 @@
           </a:ln>
         </p:spPr>
       </p:sp>
-      <p:sp>
-        <p:nvSpPr>
-          <p:cNvPr id="7" name="Text 3"/>
+      <p:pic>
+        <p:nvPicPr>
+          <p:cNvPr id="11" name="Image 1" descr="preencoded.png">    </p:cNvPr>
+          <p:cNvPicPr>
+            <a:picLocks noChangeAspect="1"/>
+          </p:cNvPicPr>
+          <p:nvPr/>
+        </p:nvPicPr>
+        <p:blipFill>
+          <a:blip r:embed="rId2"/>
+          <a:stretch>
+            <a:fillRect/>
+          </a:stretch>
+        </p:blipFill>
+        <p:spPr>
+          <a:xfrm>
+            <a:off x="7384512" y="2821656"/>
+            <a:ext cx="227137" cy="227137"/>
+          </a:xfrm>
+          <a:prstGeom prst="rect">
+            <a:avLst/>
+          </a:prstGeom>
+        </p:spPr>
+      </p:pic>
+      <p:sp>
+        <p:nvSpPr>
+          <p:cNvPr id="12" name="Text 7"/>
           <p:cNvSpPr txBox="1"/>
           <p:nvPr/>
         </p:nvSpPr>
         <p:spPr>
           <a:xfrm>
-            <a:off x="640080" y="685800"/>
-            <a:ext cx="1874520" cy="384048"/>
+            <a:off x="7909560" y="2560320"/>
+            <a:ext cx="3547872" cy="749808"/>
           </a:xfrm>
           <a:prstGeom prst="rect">
             <a:avLst/>
@@ -1743,34 +1926,114 @@
           <a:bodyPr wrap="square" lIns="0" tIns="0" rIns="0" bIns="0" rtlCol="0" anchor="ctr"/>
           <a:lstStyle/>
           <a:p>
-            <a:pPr algn="ctr" indent="0" marL="0">
-              <a:buNone/>
-            </a:pPr>
-            <a:r>
-              <a:rPr lang="en-US" sz="1100" b="1" spc="200" kern="0" dirty="0">
-                <a:solidFill>
-                  <a:srgbClr val="3F1E0D"/>
+            <a:pPr indent="0" marL="0">
+              <a:buNone/>
+            </a:pPr>
+            <a:r>
+              <a:rPr lang="en-US" sz="1550" dirty="0">
+                <a:solidFill>
+                  <a:srgbClr val="F8F5EE"/>
                 </a:solidFill>
                 <a:latin typeface="Open Sans" pitchFamily="34" charset="0"/>
                 <a:ea typeface="Open Sans" pitchFamily="34" charset="-122"/>
                 <a:cs typeface="Open Sans" pitchFamily="34" charset="-120"/>
               </a:rPr>
-              <a:t>ONBOARDING · 02</a:t>
-            </a:r>
-            <a:endParaRPr lang="en-US" sz="1100" dirty="0"/>
-          </a:p>
-        </p:txBody>
-      </p:sp>
-      <p:sp>
-        <p:nvSpPr>
-          <p:cNvPr id="8" name="Text 4"/>
+              <a:t>Qué espacios tienes disponibles</a:t>
+            </a:r>
+            <a:endParaRPr lang="en-US" sz="1550" dirty="0"/>
+          </a:p>
+        </p:txBody>
+      </p:sp>
+      <p:sp>
+        <p:nvSpPr>
+          <p:cNvPr id="13" name="Shape 8"/>
+          <p:cNvSpPr/>
+          <p:nvPr/>
+        </p:nvSpPr>
+        <p:spPr>
+          <a:xfrm>
+            <a:off x="7086600" y="3474720"/>
+            <a:ext cx="4462272" cy="749808"/>
+          </a:xfrm>
+          <a:prstGeom prst="roundRect">
+            <a:avLst>
+              <a:gd name="adj" fmla="val 17073"/>
+            </a:avLst>
+          </a:prstGeom>
+          <a:solidFill>
+            <a:srgbClr val="81552E">
+              <a:alpha val="60000"/>
+            </a:srgbClr>
+          </a:solidFill>
+          <a:ln w="12700">
+            <a:solidFill>
+              <a:srgbClr val="81552E">
+                <a:alpha val="60000"/>
+              </a:srgbClr>
+            </a:solidFill>
+            <a:prstDash val="solid"/>
+          </a:ln>
+        </p:spPr>
+      </p:sp>
+      <p:sp>
+        <p:nvSpPr>
+          <p:cNvPr id="14" name="Shape 9"/>
+          <p:cNvSpPr/>
+          <p:nvPr/>
+        </p:nvSpPr>
+        <p:spPr>
+          <a:xfrm>
+            <a:off x="7251192" y="3602736"/>
+            <a:ext cx="493776" cy="493776"/>
+          </a:xfrm>
+          <a:prstGeom prst="ellipse">
+            <a:avLst/>
+          </a:prstGeom>
+          <a:solidFill>
+            <a:srgbClr val="C68C6C"/>
+          </a:solidFill>
+          <a:ln w="12700">
+            <a:solidFill>
+              <a:srgbClr val="C68C6C"/>
+            </a:solidFill>
+            <a:prstDash val="solid"/>
+          </a:ln>
+        </p:spPr>
+      </p:sp>
+      <p:pic>
+        <p:nvPicPr>
+          <p:cNvPr id="15" name="Image 2" descr="preencoded.png">    </p:cNvPr>
+          <p:cNvPicPr>
+            <a:picLocks noChangeAspect="1"/>
+          </p:cNvPicPr>
+          <p:nvPr/>
+        </p:nvPicPr>
+        <p:blipFill>
+          <a:blip r:embed="rId3"/>
+          <a:stretch>
+            <a:fillRect/>
+          </a:stretch>
+        </p:blipFill>
+        <p:spPr>
+          <a:xfrm>
+            <a:off x="7384512" y="3736056"/>
+            <a:ext cx="227137" cy="227137"/>
+          </a:xfrm>
+          <a:prstGeom prst="rect">
+            <a:avLst/>
+          </a:prstGeom>
+        </p:spPr>
+      </p:pic>
+      <p:sp>
+        <p:nvSpPr>
+          <p:cNvPr id="16" name="Text 10"/>
           <p:cNvSpPr txBox="1"/>
           <p:nvPr/>
         </p:nvSpPr>
         <p:spPr>
           <a:xfrm>
-            <a:off x="640080" y="1325880"/>
-            <a:ext cx="6309360" cy="1783080"/>
+            <a:off x="7909560" y="3474720"/>
+            <a:ext cx="3547872" cy="749808"/>
           </a:xfrm>
           <a:prstGeom prst="rect">
             <a:avLst/>
@@ -1779,40 +2042,117 @@
           <a:ln/>
         </p:spPr>
         <p:txBody>
-          <a:bodyPr wrap="square" lIns="0" tIns="0" rIns="0" bIns="0" rtlCol="0" anchor="t"/>
+          <a:bodyPr wrap="square" lIns="0" tIns="0" rIns="0" bIns="0" rtlCol="0" anchor="ctr"/>
           <a:lstStyle/>
           <a:p>
             <a:pPr indent="0" marL="0">
-              <a:lnSpc>
-                <a:spcPct val="90000"/>
-              </a:lnSpc>
-              <a:buNone/>
-            </a:pPr>
-            <a:r>
-              <a:rPr lang="en-US" sz="5200" b="1" dirty="0">
+              <a:buNone/>
+            </a:pPr>
+            <a:r>
+              <a:rPr lang="en-US" sz="1550" dirty="0">
                 <a:solidFill>
                   <a:srgbClr val="F8F5EE"/>
                 </a:solidFill>
-                <a:latin typeface="Source Serif Pro" pitchFamily="34" charset="0"/>
-                <a:ea typeface="Source Serif Pro" pitchFamily="34" charset="-122"/>
-                <a:cs typeface="Source Serif Pro" pitchFamily="34" charset="-120"/>
-              </a:rPr>
-              <a:t>Cómo vamos a trabajar juntas</a:t>
-            </a:r>
-            <a:endParaRPr lang="en-US" sz="5200" dirty="0"/>
-          </a:p>
-        </p:txBody>
-      </p:sp>
-      <p:sp>
-        <p:nvSpPr>
-          <p:cNvPr id="9" name="Text 5"/>
+                <a:latin typeface="Open Sans" pitchFamily="34" charset="0"/>
+                <a:ea typeface="Open Sans" pitchFamily="34" charset="-122"/>
+                <a:cs typeface="Open Sans" pitchFamily="34" charset="-120"/>
+              </a:rPr>
+              <a:t>Cómo puedes pedirme ayuda</a:t>
+            </a:r>
+            <a:endParaRPr lang="en-US" sz="1550" dirty="0"/>
+          </a:p>
+        </p:txBody>
+      </p:sp>
+      <p:sp>
+        <p:nvSpPr>
+          <p:cNvPr id="17" name="Shape 11"/>
+          <p:cNvSpPr/>
+          <p:nvPr/>
+        </p:nvSpPr>
+        <p:spPr>
+          <a:xfrm>
+            <a:off x="7086600" y="4389120"/>
+            <a:ext cx="4462272" cy="749808"/>
+          </a:xfrm>
+          <a:prstGeom prst="roundRect">
+            <a:avLst>
+              <a:gd name="adj" fmla="val 17073"/>
+            </a:avLst>
+          </a:prstGeom>
+          <a:solidFill>
+            <a:srgbClr val="81552E">
+              <a:alpha val="60000"/>
+            </a:srgbClr>
+          </a:solidFill>
+          <a:ln w="12700">
+            <a:solidFill>
+              <a:srgbClr val="81552E">
+                <a:alpha val="60000"/>
+              </a:srgbClr>
+            </a:solidFill>
+            <a:prstDash val="solid"/>
+          </a:ln>
+        </p:spPr>
+      </p:sp>
+      <p:sp>
+        <p:nvSpPr>
+          <p:cNvPr id="18" name="Shape 12"/>
+          <p:cNvSpPr/>
+          <p:nvPr/>
+        </p:nvSpPr>
+        <p:spPr>
+          <a:xfrm>
+            <a:off x="7251192" y="4517136"/>
+            <a:ext cx="493776" cy="493776"/>
+          </a:xfrm>
+          <a:prstGeom prst="ellipse">
+            <a:avLst/>
+          </a:prstGeom>
+          <a:solidFill>
+            <a:srgbClr val="C68C6C"/>
+          </a:solidFill>
+          <a:ln w="12700">
+            <a:solidFill>
+              <a:srgbClr val="C68C6C"/>
+            </a:solidFill>
+            <a:prstDash val="solid"/>
+          </a:ln>
+        </p:spPr>
+      </p:sp>
+      <p:pic>
+        <p:nvPicPr>
+          <p:cNvPr id="19" name="Image 3" descr="preencoded.png">    </p:cNvPr>
+          <p:cNvPicPr>
+            <a:picLocks noChangeAspect="1"/>
+          </p:cNvPicPr>
+          <p:nvPr/>
+        </p:nvPicPr>
+        <p:blipFill>
+          <a:blip r:embed="rId4"/>
+          <a:stretch>
+            <a:fillRect/>
+          </a:stretch>
+        </p:blipFill>
+        <p:spPr>
+          <a:xfrm>
+            <a:off x="7384512" y="4650456"/>
+            <a:ext cx="227137" cy="227137"/>
+          </a:xfrm>
+          <a:prstGeom prst="rect">
+            <a:avLst/>
+          </a:prstGeom>
+        </p:spPr>
+      </p:pic>
+      <p:sp>
+        <p:nvSpPr>
+          <p:cNvPr id="20" name="Text 13"/>
           <p:cNvSpPr txBox="1"/>
           <p:nvPr/>
         </p:nvSpPr>
         <p:spPr>
           <a:xfrm>
-            <a:off x="640080" y="3154680"/>
-            <a:ext cx="5852160" cy="658368"/>
+            <a:off x="7909560" y="4389120"/>
+            <a:ext cx="3547872" cy="749808"/>
           </a:xfrm>
           <a:prstGeom prst="rect">
             <a:avLst/>
@@ -1821,24 +2161,143 @@
           <a:ln/>
         </p:spPr>
         <p:txBody>
-          <a:bodyPr wrap="square" lIns="0" tIns="0" rIns="0" bIns="0" rtlCol="0" anchor="t"/>
+          <a:bodyPr wrap="square" lIns="0" tIns="0" rIns="0" bIns="0" rtlCol="0" anchor="ctr"/>
           <a:lstStyle/>
           <a:p>
             <a:pPr indent="0" marL="0">
               <a:buNone/>
             </a:pPr>
             <a:r>
-              <a:rPr lang="en-US" sz="1800" i="1" dirty="0">
-                <a:solidFill>
-                  <a:srgbClr val="EDE5CC"/>
-                </a:solidFill>
-                <a:latin typeface="Source Serif Pro" pitchFamily="34" charset="0"/>
-                <a:ea typeface="Source Serif Pro" pitchFamily="34" charset="-122"/>
-                <a:cs typeface="Source Serif Pro" pitchFamily="34" charset="-120"/>
-              </a:rPr>
-              <a:t>Para que puedas aprovechar al máximo todo el acompañamiento de AT WORK</a:t>
-            </a:r>
-            <a:endParaRPr lang="en-US" sz="1800" dirty="0"/>
+              <a:rPr lang="en-US" sz="1550" dirty="0">
+                <a:solidFill>
+                  <a:srgbClr val="F8F5EE"/>
+                </a:solidFill>
+                <a:latin typeface="Open Sans" pitchFamily="34" charset="0"/>
+                <a:ea typeface="Open Sans" pitchFamily="34" charset="-122"/>
+                <a:cs typeface="Open Sans" pitchFamily="34" charset="-120"/>
+              </a:rPr>
+              <a:t>Cómo funcionan nuestras sesiones</a:t>
+            </a:r>
+            <a:endParaRPr lang="en-US" sz="1550" dirty="0"/>
+          </a:p>
+        </p:txBody>
+      </p:sp>
+      <p:sp>
+        <p:nvSpPr>
+          <p:cNvPr id="21" name="Shape 14"/>
+          <p:cNvSpPr/>
+          <p:nvPr/>
+        </p:nvSpPr>
+        <p:spPr>
+          <a:xfrm>
+            <a:off x="7086600" y="5303520"/>
+            <a:ext cx="4462272" cy="749808"/>
+          </a:xfrm>
+          <a:prstGeom prst="roundRect">
+            <a:avLst>
+              <a:gd name="adj" fmla="val 17073"/>
+            </a:avLst>
+          </a:prstGeom>
+          <a:solidFill>
+            <a:srgbClr val="81552E">
+              <a:alpha val="60000"/>
+            </a:srgbClr>
+          </a:solidFill>
+          <a:ln w="12700">
+            <a:solidFill>
+              <a:srgbClr val="81552E">
+                <a:alpha val="60000"/>
+              </a:srgbClr>
+            </a:solidFill>
+            <a:prstDash val="solid"/>
+          </a:ln>
+        </p:spPr>
+      </p:sp>
+      <p:sp>
+        <p:nvSpPr>
+          <p:cNvPr id="22" name="Shape 15"/>
+          <p:cNvSpPr/>
+          <p:nvPr/>
+        </p:nvSpPr>
+        <p:spPr>
+          <a:xfrm>
+            <a:off x="7251192" y="5431536"/>
+            <a:ext cx="493776" cy="493776"/>
+          </a:xfrm>
+          <a:prstGeom prst="ellipse">
+            <a:avLst/>
+          </a:prstGeom>
+          <a:solidFill>
+            <a:srgbClr val="C68C6C"/>
+          </a:solidFill>
+          <a:ln w="12700">
+            <a:solidFill>
+              <a:srgbClr val="C68C6C"/>
+            </a:solidFill>
+            <a:prstDash val="solid"/>
+          </a:ln>
+        </p:spPr>
+      </p:sp>
+      <p:pic>
+        <p:nvPicPr>
+          <p:cNvPr id="23" name="Image 4" descr="preencoded.png">    </p:cNvPr>
+          <p:cNvPicPr>
+            <a:picLocks noChangeAspect="1"/>
+          </p:cNvPicPr>
+          <p:nvPr/>
+        </p:nvPicPr>
+        <p:blipFill>
+          <a:blip r:embed="rId5"/>
+          <a:stretch>
+            <a:fillRect/>
+          </a:stretch>
+        </p:blipFill>
+        <p:spPr>
+          <a:xfrm>
+            <a:off x="7384512" y="5564856"/>
+            <a:ext cx="227137" cy="227137"/>
+          </a:xfrm>
+          <a:prstGeom prst="rect">
+            <a:avLst/>
+          </a:prstGeom>
+        </p:spPr>
+      </p:pic>
+      <p:sp>
+        <p:nvSpPr>
+          <p:cNvPr id="24" name="Text 16"/>
+          <p:cNvSpPr txBox="1"/>
+          <p:nvPr/>
+        </p:nvSpPr>
+        <p:spPr>
+          <a:xfrm>
+            <a:off x="7909560" y="5303520"/>
+            <a:ext cx="3547872" cy="749808"/>
+          </a:xfrm>
+          <a:prstGeom prst="rect">
+            <a:avLst/>
+          </a:prstGeom>
+          <a:noFill/>
+          <a:ln/>
+        </p:spPr>
+        <p:txBody>
+          <a:bodyPr wrap="square" lIns="0" tIns="0" rIns="0" bIns="0" rtlCol="0" anchor="ctr"/>
+          <a:lstStyle/>
+          <a:p>
+            <a:pPr indent="0" marL="0">
+              <a:buNone/>
+            </a:pPr>
+            <a:r>
+              <a:rPr lang="en-US" sz="1550" dirty="0">
+                <a:solidFill>
+                  <a:srgbClr val="F8F5EE"/>
+                </a:solidFill>
+                <a:latin typeface="Open Sans" pitchFamily="34" charset="0"/>
+                <a:ea typeface="Open Sans" pitchFamily="34" charset="-122"/>
+                <a:cs typeface="Open Sans" pitchFamily="34" charset="-120"/>
+              </a:rPr>
+              <a:t>Dónde vamos a trabajar cada cosa</a:t>
+            </a:r>
+            <a:endParaRPr lang="en-US" sz="1550" dirty="0"/>
           </a:p>
         </p:txBody>
       </p:sp>
@@ -2041,7 +2500,7 @@
                 <a:ea typeface="Source Serif Pro" pitchFamily="34" charset="-122"/>
                 <a:cs typeface="Source Serif Pro" pitchFamily="34" charset="-120"/>
               </a:rPr>
-              <a:t>Todo lo práctico, claro y por escrito desde el comienzo</a:t>
+              <a:t>Un documento simple para que las dos tengamos toda la información clara desde el comienzo</a:t>
             </a:r>
             <a:endParaRPr lang="en-US" sz="1600" dirty="0"/>
           </a:p>
@@ -2056,11 +2515,11 @@
         <p:spPr>
           <a:xfrm>
             <a:off x="4389120" y="1143000"/>
-            <a:ext cx="7159752" cy="1097280"/>
+            <a:ext cx="7159752" cy="1051560"/>
           </a:xfrm>
           <a:prstGeom prst="roundRect">
             <a:avLst>
-              <a:gd name="adj" fmla="val 13333"/>
+              <a:gd name="adj" fmla="val 13913"/>
             </a:avLst>
           </a:prstGeom>
           <a:solidFill>
@@ -2089,8 +2548,8 @@
         </p:nvSpPr>
         <p:spPr>
           <a:xfrm>
-            <a:off x="4663440" y="1399032"/>
-            <a:ext cx="585216" cy="585216"/>
+            <a:off x="4663440" y="1394460"/>
+            <a:ext cx="548640" cy="548640"/>
           </a:xfrm>
           <a:prstGeom prst="ellipse">
             <a:avLst/>
@@ -2114,8 +2573,8 @@
         </p:nvSpPr>
         <p:spPr>
           <a:xfrm>
-            <a:off x="4663440" y="1399032"/>
-            <a:ext cx="585216" cy="585216"/>
+            <a:off x="4663440" y="1394460"/>
+            <a:ext cx="548640" cy="548640"/>
           </a:xfrm>
           <a:prstGeom prst="rect">
             <a:avLst/>
@@ -2131,7 +2590,7 @@
               <a:buNone/>
             </a:pPr>
             <a:r>
-              <a:rPr lang="en-US" sz="2000" b="1" dirty="0">
+              <a:rPr lang="en-US" sz="1800" b="1" dirty="0">
                 <a:solidFill>
                   <a:srgbClr val="FFFDF9"/>
                 </a:solidFill>
@@ -2141,7 +2600,7 @@
               </a:rPr>
               <a:t>1</a:t>
             </a:r>
-            <a:endParaRPr lang="en-US" sz="2000" dirty="0"/>
+            <a:endParaRPr lang="en-US" sz="1800" dirty="0"/>
           </a:p>
         </p:txBody>
       </p:sp>
@@ -2153,8 +2612,8 @@
         </p:nvSpPr>
         <p:spPr>
           <a:xfrm>
-            <a:off x="5486400" y="1143000"/>
-            <a:ext cx="5148072" cy="1097280"/>
+            <a:off x="5440680" y="1143000"/>
+            <a:ext cx="5239512" cy="1051560"/>
           </a:xfrm>
           <a:prstGeom prst="rect">
             <a:avLst/>
@@ -2170,7 +2629,7 @@
               <a:buNone/>
             </a:pPr>
             <a:r>
-              <a:rPr lang="en-US" sz="1900" dirty="0">
+              <a:rPr lang="en-US" sz="1800" dirty="0">
                 <a:solidFill>
                   <a:srgbClr val="3F1E0D"/>
                 </a:solidFill>
@@ -2178,9 +2637,23 @@
                 <a:ea typeface="Open Sans" pitchFamily="34" charset="-122"/>
                 <a:cs typeface="Open Sans" pitchFamily="34" charset="-120"/>
               </a:rPr>
-              <a:t>Descargalo desde esta clase</a:t>
-            </a:r>
-            <a:endParaRPr lang="en-US" sz="1900" dirty="0"/>
+              <a:t>Descárgalo</a:t>
+            </a:r>
+            <a:pPr indent="0" marL="0">
+              <a:buNone/>
+            </a:pPr>
+            <a:r>
+              <a:rPr lang="en-US" sz="1500" dirty="0">
+                <a:solidFill>
+                  <a:srgbClr val="8A6A55"/>
+                </a:solidFill>
+                <a:latin typeface="Open Sans" pitchFamily="34" charset="0"/>
+                <a:ea typeface="Open Sans" pitchFamily="34" charset="-122"/>
+                <a:cs typeface="Open Sans" pitchFamily="34" charset="-120"/>
+              </a:rPr>
+              <a:t>  ·  está dentro de esta clase</a:t>
+            </a:r>
+            <a:endParaRPr lang="en-US" sz="1800" dirty="0"/>
           </a:p>
         </p:txBody>
       </p:sp>
@@ -2200,8 +2673,8 @@
         </p:blipFill>
         <p:spPr>
           <a:xfrm>
-            <a:off x="10771632" y="1472184"/>
-            <a:ext cx="438912" cy="438912"/>
+            <a:off x="10817352" y="1463040"/>
+            <a:ext cx="411480" cy="411480"/>
           </a:xfrm>
           <a:prstGeom prst="rect">
             <a:avLst/>
@@ -2216,12 +2689,12 @@
         </p:nvSpPr>
         <p:spPr>
           <a:xfrm>
-            <a:off x="4389120" y="2423160"/>
-            <a:ext cx="7159752" cy="1097280"/>
+            <a:off x="4389120" y="2395728"/>
+            <a:ext cx="7159752" cy="1051560"/>
           </a:xfrm>
           <a:prstGeom prst="roundRect">
             <a:avLst>
-              <a:gd name="adj" fmla="val 13333"/>
+              <a:gd name="adj" fmla="val 13913"/>
             </a:avLst>
           </a:prstGeom>
           <a:solidFill>
@@ -2250,8 +2723,8 @@
         </p:nvSpPr>
         <p:spPr>
           <a:xfrm>
-            <a:off x="4663440" y="2679192"/>
-            <a:ext cx="585216" cy="585216"/>
+            <a:off x="4663440" y="2647188"/>
+            <a:ext cx="548640" cy="548640"/>
           </a:xfrm>
           <a:prstGeom prst="ellipse">
             <a:avLst/>
@@ -2275,8 +2748,8 @@
         </p:nvSpPr>
         <p:spPr>
           <a:xfrm>
-            <a:off x="4663440" y="2679192"/>
-            <a:ext cx="585216" cy="585216"/>
+            <a:off x="4663440" y="2647188"/>
+            <a:ext cx="548640" cy="548640"/>
           </a:xfrm>
           <a:prstGeom prst="rect">
             <a:avLst/>
@@ -2292,7 +2765,7 @@
               <a:buNone/>
             </a:pPr>
             <a:r>
-              <a:rPr lang="en-US" sz="2000" b="1" dirty="0">
+              <a:rPr lang="en-US" sz="1800" b="1" dirty="0">
                 <a:solidFill>
                   <a:srgbClr val="FFFDF9"/>
                 </a:solidFill>
@@ -2302,7 +2775,7 @@
               </a:rPr>
               <a:t>2</a:t>
             </a:r>
-            <a:endParaRPr lang="en-US" sz="2000" dirty="0"/>
+            <a:endParaRPr lang="en-US" sz="1800" dirty="0"/>
           </a:p>
         </p:txBody>
       </p:sp>
@@ -2314,8 +2787,8 @@
         </p:nvSpPr>
         <p:spPr>
           <a:xfrm>
-            <a:off x="5486400" y="2423160"/>
-            <a:ext cx="5148072" cy="1097280"/>
+            <a:off x="5440680" y="2395728"/>
+            <a:ext cx="5239512" cy="1051560"/>
           </a:xfrm>
           <a:prstGeom prst="rect">
             <a:avLst/>
@@ -2331,7 +2804,7 @@
               <a:buNone/>
             </a:pPr>
             <a:r>
-              <a:rPr lang="en-US" sz="1900" dirty="0">
+              <a:rPr lang="en-US" sz="1800" dirty="0">
                 <a:solidFill>
                   <a:srgbClr val="3F1E0D"/>
                 </a:solidFill>
@@ -2339,9 +2812,9 @@
                 <a:ea typeface="Open Sans" pitchFamily="34" charset="-122"/>
                 <a:cs typeface="Open Sans" pitchFamily="34" charset="-120"/>
               </a:rPr>
-              <a:t>Completalo y firmalo</a:t>
-            </a:r>
-            <a:endParaRPr lang="en-US" sz="1900" dirty="0"/>
+              <a:t>Complétalo y fírmalo</a:t>
+            </a:r>
+            <a:endParaRPr lang="en-US" sz="1800" dirty="0"/>
           </a:p>
         </p:txBody>
       </p:sp>
@@ -2361,8 +2834,8 @@
         </p:blipFill>
         <p:spPr>
           <a:xfrm>
-            <a:off x="10771632" y="2752344"/>
-            <a:ext cx="438912" cy="438912"/>
+            <a:off x="10817352" y="2715768"/>
+            <a:ext cx="411480" cy="411480"/>
           </a:xfrm>
           <a:prstGeom prst="rect">
             <a:avLst/>
@@ -2377,12 +2850,12 @@
         </p:nvSpPr>
         <p:spPr>
           <a:xfrm>
-            <a:off x="4389120" y="3703320"/>
-            <a:ext cx="7159752" cy="1097280"/>
+            <a:off x="4389120" y="3648456"/>
+            <a:ext cx="7159752" cy="1051560"/>
           </a:xfrm>
           <a:prstGeom prst="roundRect">
             <a:avLst>
-              <a:gd name="adj" fmla="val 13333"/>
+              <a:gd name="adj" fmla="val 13913"/>
             </a:avLst>
           </a:prstGeom>
           <a:solidFill>
@@ -2411,8 +2884,8 @@
         </p:nvSpPr>
         <p:spPr>
           <a:xfrm>
-            <a:off x="4663440" y="3959352"/>
-            <a:ext cx="585216" cy="585216"/>
+            <a:off x="4663440" y="3899916"/>
+            <a:ext cx="548640" cy="548640"/>
           </a:xfrm>
           <a:prstGeom prst="ellipse">
             <a:avLst/>
@@ -2436,8 +2909,8 @@
         </p:nvSpPr>
         <p:spPr>
           <a:xfrm>
-            <a:off x="4663440" y="3959352"/>
-            <a:ext cx="585216" cy="585216"/>
+            <a:off x="4663440" y="3899916"/>
+            <a:ext cx="548640" cy="548640"/>
           </a:xfrm>
           <a:prstGeom prst="rect">
             <a:avLst/>
@@ -2453,7 +2926,7 @@
               <a:buNone/>
             </a:pPr>
             <a:r>
-              <a:rPr lang="en-US" sz="2000" b="1" dirty="0">
+              <a:rPr lang="en-US" sz="1800" b="1" dirty="0">
                 <a:solidFill>
                   <a:srgbClr val="FFFDF9"/>
                 </a:solidFill>
@@ -2463,7 +2936,7 @@
               </a:rPr>
               <a:t>3</a:t>
             </a:r>
-            <a:endParaRPr lang="en-US" sz="2000" dirty="0"/>
+            <a:endParaRPr lang="en-US" sz="1800" dirty="0"/>
           </a:p>
         </p:txBody>
       </p:sp>
@@ -2475,8 +2948,8 @@
         </p:nvSpPr>
         <p:spPr>
           <a:xfrm>
-            <a:off x="5486400" y="3703320"/>
-            <a:ext cx="5148072" cy="1097280"/>
+            <a:off x="5440680" y="3648456"/>
+            <a:ext cx="5239512" cy="1051560"/>
           </a:xfrm>
           <a:prstGeom prst="rect">
             <a:avLst/>
@@ -2492,7 +2965,7 @@
               <a:buNone/>
             </a:pPr>
             <a:r>
-              <a:rPr lang="en-US" sz="1900" dirty="0">
+              <a:rPr lang="en-US" sz="1800" dirty="0">
                 <a:solidFill>
                   <a:srgbClr val="3F1E0D"/>
                 </a:solidFill>
@@ -2500,9 +2973,23 @@
                 <a:ea typeface="Open Sans" pitchFamily="34" charset="-122"/>
                 <a:cs typeface="Open Sans" pitchFamily="34" charset="-120"/>
               </a:rPr>
-              <a:t>Subilo a tu carpeta personal de AT WORK</a:t>
-            </a:r>
-            <a:endParaRPr lang="en-US" sz="1900" dirty="0"/>
+              <a:t>Súbelo a tu carpeta personal de AT WORK, dentro de </a:t>
+            </a:r>
+            <a:pPr indent="0" marL="0">
+              <a:buNone/>
+            </a:pPr>
+            <a:r>
+              <a:rPr lang="en-US" sz="1800" b="1" dirty="0">
+                <a:solidFill>
+                  <a:srgbClr val="81552E"/>
+                </a:solidFill>
+                <a:latin typeface="Open Sans" pitchFamily="34" charset="0"/>
+                <a:ea typeface="Open Sans" pitchFamily="34" charset="-122"/>
+                <a:cs typeface="Open Sans" pitchFamily="34" charset="-120"/>
+              </a:rPr>
+              <a:t>01 · MI CONTEXTO PROFESIONAL</a:t>
+            </a:r>
+            <a:endParaRPr lang="en-US" sz="1800" dirty="0"/>
           </a:p>
         </p:txBody>
       </p:sp>
@@ -2522,8 +3009,8 @@
         </p:blipFill>
         <p:spPr>
           <a:xfrm>
-            <a:off x="10771632" y="4032504"/>
-            <a:ext cx="438912" cy="438912"/>
+            <a:off x="10817352" y="3968496"/>
+            <a:ext cx="411480" cy="411480"/>
           </a:xfrm>
           <a:prstGeom prst="rect">
             <a:avLst/>
@@ -2538,7 +3025,7 @@
         </p:nvSpPr>
         <p:spPr>
           <a:xfrm>
-            <a:off x="4389120" y="4983480"/>
+            <a:off x="4389120" y="4992624"/>
             <a:ext cx="7159752" cy="1097280"/>
           </a:xfrm>
           <a:prstGeom prst="roundRect">
@@ -2547,11 +3034,11 @@
             </a:avLst>
           </a:prstGeom>
           <a:solidFill>
-            <a:srgbClr val="FFFDF9"/>
+            <a:srgbClr val="FBF2D0"/>
           </a:solidFill>
           <a:ln w="12700">
             <a:solidFill>
-              <a:srgbClr val="FFFDF9"/>
+              <a:srgbClr val="FBF2D0"/>
             </a:solidFill>
             <a:prstDash val="solid"/>
           </a:ln>
@@ -2572,8 +3059,8 @@
         </p:nvSpPr>
         <p:spPr>
           <a:xfrm>
-            <a:off x="4663440" y="5239512"/>
-            <a:ext cx="585216" cy="585216"/>
+            <a:off x="4754880" y="5152644"/>
+            <a:ext cx="777240" cy="777240"/>
           </a:xfrm>
           <a:prstGeom prst="ellipse">
             <a:avLst/>
@@ -2589,101 +3076,9 @@
           </a:ln>
         </p:spPr>
       </p:sp>
-      <p:sp>
-        <p:nvSpPr>
-          <p:cNvPr id="24" name="Text 18"/>
-          <p:cNvSpPr txBox="1"/>
-          <p:nvPr/>
-        </p:nvSpPr>
-        <p:spPr>
-          <a:xfrm>
-            <a:off x="4663440" y="5239512"/>
-            <a:ext cx="585216" cy="585216"/>
-          </a:xfrm>
-          <a:prstGeom prst="rect">
-            <a:avLst/>
-          </a:prstGeom>
-          <a:noFill/>
-          <a:ln/>
-        </p:spPr>
-        <p:txBody>
-          <a:bodyPr wrap="square" lIns="0" tIns="0" rIns="0" bIns="0" rtlCol="0" anchor="ctr"/>
-          <a:lstStyle/>
-          <a:p>
-            <a:pPr algn="ctr" indent="0" marL="0">
-              <a:buNone/>
-            </a:pPr>
-            <a:r>
-              <a:rPr lang="en-US" sz="2000" b="1" dirty="0">
-                <a:solidFill>
-                  <a:srgbClr val="FFFDF9"/>
-                </a:solidFill>
-                <a:latin typeface="Source Serif Pro" pitchFamily="34" charset="0"/>
-                <a:ea typeface="Source Serif Pro" pitchFamily="34" charset="-122"/>
-                <a:cs typeface="Source Serif Pro" pitchFamily="34" charset="-120"/>
-              </a:rPr>
-              <a:t>4</a:t>
-            </a:r>
-            <a:endParaRPr lang="en-US" sz="2000" dirty="0"/>
-          </a:p>
-        </p:txBody>
-      </p:sp>
-      <p:sp>
-        <p:nvSpPr>
-          <p:cNvPr id="25" name="Text 19"/>
-          <p:cNvSpPr txBox="1"/>
-          <p:nvPr/>
-        </p:nvSpPr>
-        <p:spPr>
-          <a:xfrm>
-            <a:off x="5486400" y="4983480"/>
-            <a:ext cx="5148072" cy="1097280"/>
-          </a:xfrm>
-          <a:prstGeom prst="rect">
-            <a:avLst/>
-          </a:prstGeom>
-          <a:noFill/>
-          <a:ln/>
-        </p:spPr>
-        <p:txBody>
-          <a:bodyPr wrap="square" lIns="0" tIns="0" rIns="0" bIns="0" rtlCol="0" anchor="ctr"/>
-          <a:lstStyle/>
-          <a:p>
-            <a:pPr indent="0" marL="0">
-              <a:buNone/>
-            </a:pPr>
-            <a:r>
-              <a:rPr lang="en-US" sz="1900" dirty="0">
-                <a:solidFill>
-                  <a:srgbClr val="3F1E0D"/>
-                </a:solidFill>
-                <a:latin typeface="Open Sans" pitchFamily="34" charset="0"/>
-                <a:ea typeface="Open Sans" pitchFamily="34" charset="-122"/>
-                <a:cs typeface="Open Sans" pitchFamily="34" charset="-120"/>
-              </a:rPr>
-              <a:t>Dentro de </a:t>
-            </a:r>
-            <a:pPr indent="0" marL="0">
-              <a:buNone/>
-            </a:pPr>
-            <a:r>
-              <a:rPr lang="en-US" sz="1900" b="1" dirty="0">
-                <a:solidFill>
-                  <a:srgbClr val="81552E"/>
-                </a:solidFill>
-                <a:latin typeface="Open Sans" pitchFamily="34" charset="0"/>
-                <a:ea typeface="Open Sans" pitchFamily="34" charset="-122"/>
-                <a:cs typeface="Open Sans" pitchFamily="34" charset="-120"/>
-              </a:rPr>
-              <a:t>01 · MI CONTEXTO PROFESIONAL</a:t>
-            </a:r>
-            <a:endParaRPr lang="en-US" sz="1900" dirty="0"/>
-          </a:p>
-        </p:txBody>
-      </p:sp>
       <p:pic>
         <p:nvPicPr>
-          <p:cNvPr id="26" name="Image 3" descr="preencoded.png">    </p:cNvPr>
+          <p:cNvPr id="24" name="Image 3" descr="preencoded.png">    </p:cNvPr>
           <p:cNvPicPr>
             <a:picLocks noChangeAspect="1"/>
           </p:cNvPicPr>
@@ -2697,14 +3092,56 @@
         </p:blipFill>
         <p:spPr>
           <a:xfrm>
-            <a:off x="10771632" y="5312664"/>
-            <a:ext cx="438912" cy="438912"/>
+            <a:off x="4964735" y="5362499"/>
+            <a:ext cx="357530" cy="357530"/>
           </a:xfrm>
           <a:prstGeom prst="rect">
             <a:avLst/>
           </a:prstGeom>
         </p:spPr>
       </p:pic>
+      <p:sp>
+        <p:nvSpPr>
+          <p:cNvPr id="25" name="Text 18"/>
+          <p:cNvSpPr txBox="1"/>
+          <p:nvPr/>
+        </p:nvSpPr>
+        <p:spPr>
+          <a:xfrm>
+            <a:off x="5806440" y="4992624"/>
+            <a:ext cx="5422392" cy="1097280"/>
+          </a:xfrm>
+          <a:prstGeom prst="rect">
+            <a:avLst/>
+          </a:prstGeom>
+          <a:noFill/>
+          <a:ln/>
+        </p:spPr>
+        <p:txBody>
+          <a:bodyPr wrap="square" lIns="0" tIns="0" rIns="0" bIns="0" rtlCol="0" anchor="ctr"/>
+          <a:lstStyle/>
+          <a:p>
+            <a:pPr indent="0" marL="0">
+              <a:spcAft>
+                <a:spcPts val="500"/>
+              </a:spcAft>
+              <a:buNone/>
+            </a:pPr>
+            <a:r>
+              <a:rPr lang="en-US" sz="1500" dirty="0">
+                <a:solidFill>
+                  <a:srgbClr val="81552E"/>
+                </a:solidFill>
+                <a:latin typeface="Open Sans" pitchFamily="34" charset="0"/>
+                <a:ea typeface="Open Sans" pitchFamily="34" charset="-122"/>
+                <a:cs typeface="Open Sans" pitchFamily="34" charset="-120"/>
+              </a:rPr>
+              <a:t>Así queda guardado junto con toda la información de inicio de tu proceso.</a:t>
+            </a:r>
+            <a:endParaRPr lang="en-US" sz="1500" dirty="0"/>
+          </a:p>
+        </p:txBody>
+      </p:sp>
     </p:spTree>
   </p:cSld>
   <p:clrMapOvr>
@@ -2865,7 +3302,7 @@
                 <a:ea typeface="Source Serif Pro" pitchFamily="34" charset="-122"/>
                 <a:cs typeface="Source Serif Pro" pitchFamily="34" charset="-120"/>
               </a:rPr>
-              <a:t>Tus sesiones 1:1</a:t>
+              <a:t>Nuestras sesiones 1:1</a:t>
             </a:r>
             <a:endParaRPr lang="en-US" sz="3400" dirty="0"/>
           </a:p>
@@ -2879,7 +3316,7 @@
         </p:nvSpPr>
         <p:spPr>
           <a:xfrm>
-            <a:off x="640080" y="1892808"/>
+            <a:off x="640080" y="2414016"/>
             <a:ext cx="3291840" cy="731520"/>
           </a:xfrm>
           <a:prstGeom prst="rect">
@@ -2904,7 +3341,7 @@
                 <a:ea typeface="Source Serif Pro" pitchFamily="34" charset="-122"/>
                 <a:cs typeface="Source Serif Pro" pitchFamily="34" charset="-120"/>
               </a:rPr>
-              <a:t>Cada horario queda reservado especialmente para vos</a:t>
+              <a:t>El espacio para trabajar con más profundidad sobre tu inglés y tu trabajo real</a:t>
             </a:r>
             <a:endParaRPr lang="en-US" sz="1600" dirty="0"/>
           </a:p>
@@ -2919,11 +3356,11 @@
         <p:spPr>
           <a:xfrm>
             <a:off x="4389120" y="1143000"/>
-            <a:ext cx="3442716" cy="2286000"/>
+            <a:ext cx="3442716" cy="2331720"/>
           </a:xfrm>
           <a:prstGeom prst="roundRect">
             <a:avLst>
-              <a:gd name="adj" fmla="val 6400"/>
+              <a:gd name="adj" fmla="val 6275"/>
             </a:avLst>
           </a:prstGeom>
           <a:solidFill>
@@ -2952,8 +3389,8 @@
         </p:nvSpPr>
         <p:spPr>
           <a:xfrm>
-            <a:off x="4709160" y="1463040"/>
-            <a:ext cx="685800" cy="685800"/>
+            <a:off x="4709160" y="1435608"/>
+            <a:ext cx="640080" cy="640080"/>
           </a:xfrm>
           <a:prstGeom prst="ellipse">
             <a:avLst/>
@@ -2985,8 +3422,8 @@
         </p:blipFill>
         <p:spPr>
           <a:xfrm>
-            <a:off x="4894326" y="1648206"/>
-            <a:ext cx="315468" cy="315468"/>
+            <a:off x="4881982" y="1608430"/>
+            <a:ext cx="294437" cy="294437"/>
           </a:xfrm>
           <a:prstGeom prst="rect">
             <a:avLst/>
@@ -3001,8 +3438,8 @@
         </p:nvSpPr>
         <p:spPr>
           <a:xfrm>
-            <a:off x="4709160" y="2240280"/>
-            <a:ext cx="2802636" cy="548640"/>
+            <a:off x="4709160" y="2148840"/>
+            <a:ext cx="2894076" cy="502920"/>
           </a:xfrm>
           <a:prstGeom prst="rect">
             <a:avLst/>
@@ -3018,7 +3455,7 @@
               <a:buNone/>
             </a:pPr>
             <a:r>
-              <a:rPr lang="en-US" sz="3400" b="1" dirty="0">
+              <a:rPr lang="en-US" sz="3200" b="1" dirty="0">
                 <a:solidFill>
                   <a:srgbClr val="F8F5EE"/>
                 </a:solidFill>
@@ -3028,7 +3465,7 @@
               </a:rPr>
               <a:t>24 h</a:t>
             </a:r>
-            <a:endParaRPr lang="en-US" sz="3400" dirty="0"/>
+            <a:endParaRPr lang="en-US" sz="3200" dirty="0"/>
           </a:p>
         </p:txBody>
       </p:sp>
@@ -3040,8 +3477,8 @@
         </p:nvSpPr>
         <p:spPr>
           <a:xfrm>
-            <a:off x="4709160" y="2788920"/>
-            <a:ext cx="2802636" cy="457200"/>
+            <a:off x="4709160" y="2697480"/>
+            <a:ext cx="2894076" cy="640080"/>
           </a:xfrm>
           <a:prstGeom prst="rect">
             <a:avLst/>
@@ -3057,7 +3494,7 @@
               <a:buNone/>
             </a:pPr>
             <a:r>
-              <a:rPr lang="en-US" sz="1550" dirty="0">
+              <a:rPr lang="en-US" sz="1350" dirty="0">
                 <a:solidFill>
                   <a:srgbClr val="EDE5CC"/>
                 </a:solidFill>
@@ -3065,9 +3502,9 @@
                 <a:ea typeface="Open Sans" pitchFamily="34" charset="-122"/>
                 <a:cs typeface="Open Sans" pitchFamily="34" charset="-120"/>
               </a:rPr>
-              <a:t>de anticipación para reprogramar una sesión</a:t>
-            </a:r>
-            <a:endParaRPr lang="en-US" sz="1550" dirty="0"/>
+              <a:t>Avísame con al menos 24 horas de anticipación si necesitas cambiar una sesión</a:t>
+            </a:r>
+            <a:endParaRPr lang="en-US" sz="1350" dirty="0"/>
           </a:p>
         </p:txBody>
       </p:sp>
@@ -3080,11 +3517,11 @@
         <p:spPr>
           <a:xfrm>
             <a:off x="8106156" y="1143000"/>
-            <a:ext cx="3442716" cy="2286000"/>
+            <a:ext cx="3442716" cy="2331720"/>
           </a:xfrm>
           <a:prstGeom prst="roundRect">
             <a:avLst>
-              <a:gd name="adj" fmla="val 6400"/>
+              <a:gd name="adj" fmla="val 6275"/>
             </a:avLst>
           </a:prstGeom>
           <a:solidFill>
@@ -3113,8 +3550,8 @@
         </p:nvSpPr>
         <p:spPr>
           <a:xfrm>
-            <a:off x="8426196" y="1463040"/>
-            <a:ext cx="685800" cy="685800"/>
+            <a:off x="8426196" y="1435608"/>
+            <a:ext cx="640080" cy="640080"/>
           </a:xfrm>
           <a:prstGeom prst="ellipse">
             <a:avLst/>
@@ -3146,8 +3583,8 @@
         </p:blipFill>
         <p:spPr>
           <a:xfrm>
-            <a:off x="8611362" y="1648206"/>
-            <a:ext cx="315468" cy="315468"/>
+            <a:off x="8599018" y="1608430"/>
+            <a:ext cx="294437" cy="294437"/>
           </a:xfrm>
           <a:prstGeom prst="rect">
             <a:avLst/>
@@ -3162,8 +3599,8 @@
         </p:nvSpPr>
         <p:spPr>
           <a:xfrm>
-            <a:off x="8426196" y="2240280"/>
-            <a:ext cx="2802636" cy="548640"/>
+            <a:off x="8426196" y="2148840"/>
+            <a:ext cx="2894076" cy="502920"/>
           </a:xfrm>
           <a:prstGeom prst="rect">
             <a:avLst/>
@@ -3179,7 +3616,7 @@
               <a:buNone/>
             </a:pPr>
             <a:r>
-              <a:rPr lang="en-US" sz="2300" b="1" dirty="0">
+              <a:rPr lang="en-US" sz="2100" b="1" dirty="0">
                 <a:solidFill>
                   <a:srgbClr val="81552E"/>
                 </a:solidFill>
@@ -3189,7 +3626,7 @@
               </a:rPr>
               <a:t>Menos de 24 h</a:t>
             </a:r>
-            <a:endParaRPr lang="en-US" sz="2300" dirty="0"/>
+            <a:endParaRPr lang="en-US" sz="2100" dirty="0"/>
           </a:p>
         </p:txBody>
       </p:sp>
@@ -3201,8 +3638,8 @@
         </p:nvSpPr>
         <p:spPr>
           <a:xfrm>
-            <a:off x="8426196" y="2788920"/>
-            <a:ext cx="2802636" cy="457200"/>
+            <a:off x="8426196" y="2697480"/>
+            <a:ext cx="2894076" cy="640080"/>
           </a:xfrm>
           <a:prstGeom prst="rect">
             <a:avLst/>
@@ -3218,7 +3655,7 @@
               <a:buNone/>
             </a:pPr>
             <a:r>
-              <a:rPr lang="en-US" sz="1550" dirty="0">
+              <a:rPr lang="en-US" sz="1350" dirty="0">
                 <a:solidFill>
                   <a:srgbClr val="3F1E0D"/>
                 </a:solidFill>
@@ -3226,9 +3663,9 @@
                 <a:ea typeface="Open Sans" pitchFamily="34" charset="-122"/>
                 <a:cs typeface="Open Sans" pitchFamily="34" charset="-120"/>
               </a:rPr>
-              <a:t>la sesión se considera utilizada</a:t>
-            </a:r>
-            <a:endParaRPr lang="en-US" sz="1550" dirty="0"/>
+              <a:t>La sesión se considera utilizada: ese espacio ya quedó reservado para ti</a:t>
+            </a:r>
+            <a:endParaRPr lang="en-US" sz="1350" dirty="0"/>
           </a:p>
         </p:txBody>
       </p:sp>
@@ -3240,12 +3677,12 @@
         </p:nvSpPr>
         <p:spPr>
           <a:xfrm>
-            <a:off x="4389120" y="3703320"/>
-            <a:ext cx="3442716" cy="2286000"/>
+            <a:off x="4389120" y="3749040"/>
+            <a:ext cx="3442716" cy="2331720"/>
           </a:xfrm>
           <a:prstGeom prst="roundRect">
             <a:avLst>
-              <a:gd name="adj" fmla="val 6400"/>
+              <a:gd name="adj" fmla="val 6275"/>
             </a:avLst>
           </a:prstGeom>
           <a:solidFill>
@@ -3274,8 +3711,8 @@
         </p:nvSpPr>
         <p:spPr>
           <a:xfrm>
-            <a:off x="4709160" y="4023360"/>
-            <a:ext cx="685800" cy="685800"/>
+            <a:off x="4709160" y="4041648"/>
+            <a:ext cx="640080" cy="640080"/>
           </a:xfrm>
           <a:prstGeom prst="ellipse">
             <a:avLst/>
@@ -3307,8 +3744,8 @@
         </p:blipFill>
         <p:spPr>
           <a:xfrm>
-            <a:off x="4894326" y="4208526"/>
-            <a:ext cx="315468" cy="315468"/>
+            <a:off x="4881982" y="4214470"/>
+            <a:ext cx="294437" cy="294437"/>
           </a:xfrm>
           <a:prstGeom prst="rect">
             <a:avLst/>
@@ -3323,8 +3760,8 @@
         </p:nvSpPr>
         <p:spPr>
           <a:xfrm>
-            <a:off x="4709160" y="4800600"/>
-            <a:ext cx="2802636" cy="548640"/>
+            <a:off x="4709160" y="4754880"/>
+            <a:ext cx="2894076" cy="502920"/>
           </a:xfrm>
           <a:prstGeom prst="rect">
             <a:avLst/>
@@ -3340,7 +3777,7 @@
               <a:buNone/>
             </a:pPr>
             <a:r>
-              <a:rPr lang="en-US" sz="2300" b="1" dirty="0">
+              <a:rPr lang="en-US" sz="2100" b="1" dirty="0">
                 <a:solidFill>
                   <a:srgbClr val="81552E"/>
                 </a:solidFill>
@@ -3348,9 +3785,9 @@
                 <a:ea typeface="Source Serif Pro" pitchFamily="34" charset="-122"/>
                 <a:cs typeface="Source Serif Pro" pitchFamily="34" charset="-120"/>
               </a:rPr>
-              <a:t>Si llegás tarde</a:t>
-            </a:r>
-            <a:endParaRPr lang="en-US" sz="2300" dirty="0"/>
+              <a:t>Si llegas más tarde</a:t>
+            </a:r>
+            <a:endParaRPr lang="en-US" sz="2100" dirty="0"/>
           </a:p>
         </p:txBody>
       </p:sp>
@@ -3362,8 +3799,8 @@
         </p:nvSpPr>
         <p:spPr>
           <a:xfrm>
-            <a:off x="4709160" y="5349240"/>
-            <a:ext cx="2802636" cy="457200"/>
+            <a:off x="4709160" y="5303520"/>
+            <a:ext cx="2894076" cy="640080"/>
           </a:xfrm>
           <a:prstGeom prst="rect">
             <a:avLst/>
@@ -3379,7 +3816,7 @@
               <a:buNone/>
             </a:pPr>
             <a:r>
-              <a:rPr lang="en-US" sz="1550" dirty="0">
+              <a:rPr lang="en-US" sz="1350" dirty="0">
                 <a:solidFill>
                   <a:srgbClr val="3F1E0D"/>
                 </a:solidFill>
@@ -3387,9 +3824,9 @@
                 <a:ea typeface="Open Sans" pitchFamily="34" charset="-122"/>
                 <a:cs typeface="Open Sans" pitchFamily="34" charset="-120"/>
               </a:rPr>
-              <a:t>trabajamos con el tiempo que quede</a:t>
-            </a:r>
-            <a:endParaRPr lang="en-US" sz="1550" dirty="0"/>
+              <a:t>No pasa nada: trabajamos con el tiempo que nos quede</a:t>
+            </a:r>
+            <a:endParaRPr lang="en-US" sz="1350" dirty="0"/>
           </a:p>
         </p:txBody>
       </p:sp>
@@ -3401,12 +3838,12 @@
         </p:nvSpPr>
         <p:spPr>
           <a:xfrm>
-            <a:off x="8106156" y="3703320"/>
-            <a:ext cx="3442716" cy="2286000"/>
+            <a:off x="8106156" y="3749040"/>
+            <a:ext cx="3442716" cy="2331720"/>
           </a:xfrm>
           <a:prstGeom prst="roundRect">
             <a:avLst>
-              <a:gd name="adj" fmla="val 6400"/>
+              <a:gd name="adj" fmla="val 6275"/>
             </a:avLst>
           </a:prstGeom>
           <a:solidFill>
@@ -3435,8 +3872,8 @@
         </p:nvSpPr>
         <p:spPr>
           <a:xfrm>
-            <a:off x="8426196" y="4023360"/>
-            <a:ext cx="685800" cy="685800"/>
+            <a:off x="8426196" y="4041648"/>
+            <a:ext cx="640080" cy="640080"/>
           </a:xfrm>
           <a:prstGeom prst="ellipse">
             <a:avLst/>
@@ -3468,8 +3905,8 @@
         </p:blipFill>
         <p:spPr>
           <a:xfrm>
-            <a:off x="8611362" y="4208526"/>
-            <a:ext cx="315468" cy="315468"/>
+            <a:off x="8599018" y="4214470"/>
+            <a:ext cx="294437" cy="294437"/>
           </a:xfrm>
           <a:prstGeom prst="rect">
             <a:avLst/>
@@ -3484,8 +3921,8 @@
         </p:nvSpPr>
         <p:spPr>
           <a:xfrm>
-            <a:off x="8426196" y="4800600"/>
-            <a:ext cx="2802636" cy="548640"/>
+            <a:off x="8426196" y="4754880"/>
+            <a:ext cx="2894076" cy="502920"/>
           </a:xfrm>
           <a:prstGeom prst="rect">
             <a:avLst/>
@@ -3501,7 +3938,7 @@
               <a:buNone/>
             </a:pPr>
             <a:r>
-              <a:rPr lang="en-US" sz="2300" b="1" dirty="0">
+              <a:rPr lang="en-US" sz="2100" b="1" dirty="0">
                 <a:solidFill>
                   <a:srgbClr val="81552E"/>
                 </a:solidFill>
@@ -3509,9 +3946,9 @@
                 <a:ea typeface="Source Serif Pro" pitchFamily="34" charset="-122"/>
                 <a:cs typeface="Source Serif Pro" pitchFamily="34" charset="-120"/>
               </a:rPr>
-              <a:t>Si yo la muevo</a:t>
-            </a:r>
-            <a:endParaRPr lang="en-US" sz="2300" dirty="0"/>
+              <a:t>Si la muevo yo</a:t>
+            </a:r>
+            <a:endParaRPr lang="en-US" sz="2100" dirty="0"/>
           </a:p>
         </p:txBody>
       </p:sp>
@@ -3523,8 +3960,8 @@
         </p:nvSpPr>
         <p:spPr>
           <a:xfrm>
-            <a:off x="8426196" y="5349240"/>
-            <a:ext cx="2802636" cy="457200"/>
+            <a:off x="8426196" y="5303520"/>
+            <a:ext cx="2894076" cy="640080"/>
           </a:xfrm>
           <a:prstGeom prst="rect">
             <a:avLst/>
@@ -3540,7 +3977,7 @@
               <a:buNone/>
             </a:pPr>
             <a:r>
-              <a:rPr lang="en-US" sz="1550" dirty="0">
+              <a:rPr lang="en-US" sz="1350" dirty="0">
                 <a:solidFill>
                   <a:srgbClr val="3F1E0D"/>
                 </a:solidFill>
@@ -3548,9 +3985,9 @@
                 <a:ea typeface="Open Sans" pitchFamily="34" charset="-122"/>
                 <a:cs typeface="Open Sans" pitchFamily="34" charset="-120"/>
               </a:rPr>
-              <a:t>la reprogramamos sin problema</a:t>
-            </a:r>
-            <a:endParaRPr lang="en-US" sz="1550" dirty="0"/>
+              <a:t>La reprogramamos sin problema</a:t>
+            </a:r>
+            <a:endParaRPr lang="en-US" sz="1350" dirty="0"/>
           </a:p>
         </p:txBody>
       </p:sp>
@@ -3714,7 +4151,7 @@
                 <a:ea typeface="Source Serif Pro" pitchFamily="34" charset="-122"/>
                 <a:cs typeface="Source Serif Pro" pitchFamily="34" charset="-120"/>
               </a:rPr>
-              <a:t>Cómo nos comunicamos</a:t>
+              <a:t>No estás sola entre sesiones</a:t>
             </a:r>
             <a:endParaRPr lang="en-US" sz="3400" dirty="0"/>
           </a:p>
@@ -3753,7 +4190,7 @@
                 <a:ea typeface="Source Serif Pro" pitchFamily="34" charset="-122"/>
                 <a:cs typeface="Source Serif Pro" pitchFamily="34" charset="-120"/>
               </a:rPr>
-              <a:t>No estás sola entre una sesión y la siguiente</a:t>
+              <a:t>Dónde llevar cada cosa, para que todo sea simple, cercano y ordenado</a:t>
             </a:r>
             <a:endParaRPr lang="en-US" sz="1600" dirty="0"/>
           </a:p>
@@ -3768,7 +4205,7 @@
         <p:spPr>
           <a:xfrm>
             <a:off x="4389120" y="1143000"/>
-            <a:ext cx="2203704" cy="4206240"/>
+            <a:ext cx="2203704" cy="4023360"/>
           </a:xfrm>
           <a:prstGeom prst="roundRect">
             <a:avLst>
@@ -3861,8 +4298,8 @@
         </p:blipFill>
         <p:spPr>
           <a:xfrm>
-            <a:off x="4709160" y="1417320"/>
-            <a:ext cx="384048" cy="384048"/>
+            <a:off x="4663440" y="1399032"/>
+            <a:ext cx="365760" cy="365760"/>
           </a:xfrm>
           <a:prstGeom prst="rect">
             <a:avLst/>
@@ -3877,8 +4314,8 @@
         </p:nvSpPr>
         <p:spPr>
           <a:xfrm>
-            <a:off x="4709160" y="1892808"/>
-            <a:ext cx="1655064" cy="411480"/>
+            <a:off x="4663440" y="1828800"/>
+            <a:ext cx="1746504" cy="548640"/>
           </a:xfrm>
           <a:prstGeom prst="rect">
             <a:avLst/>
@@ -3891,10 +4328,13 @@
           <a:lstStyle/>
           <a:p>
             <a:pPr indent="0" marL="0">
-              <a:buNone/>
-            </a:pPr>
-            <a:r>
-              <a:rPr lang="en-US" sz="2100" b="1" dirty="0">
+              <a:lnSpc>
+                <a:spcPct val="90000"/>
+              </a:lnSpc>
+              <a:buNone/>
+            </a:pPr>
+            <a:r>
+              <a:rPr lang="en-US" sz="1700" b="1" dirty="0">
                 <a:solidFill>
                   <a:srgbClr val="F8F5EE"/>
                 </a:solidFill>
@@ -3902,9 +4342,9 @@
                 <a:ea typeface="Source Serif Pro" pitchFamily="34" charset="-122"/>
                 <a:cs typeface="Source Serif Pro" pitchFamily="34" charset="-120"/>
               </a:rPr>
-              <a:t>Comunidad</a:t>
-            </a:r>
-            <a:endParaRPr lang="en-US" sz="2100" dirty="0"/>
+              <a:t>Comunidad de WhatsApp</a:t>
+            </a:r>
+            <a:endParaRPr lang="en-US" sz="1700" dirty="0"/>
           </a:p>
         </p:txBody>
       </p:sp>
@@ -3916,8 +4356,8 @@
         </p:nvSpPr>
         <p:spPr>
           <a:xfrm>
-            <a:off x="4709160" y="2286000"/>
-            <a:ext cx="1746504" cy="274320"/>
+            <a:off x="4663440" y="2377440"/>
+            <a:ext cx="1746504" cy="256032"/>
           </a:xfrm>
           <a:prstGeom prst="rect">
             <a:avLst/>
@@ -3933,7 +4373,7 @@
               <a:buNone/>
             </a:pPr>
             <a:r>
-              <a:rPr lang="en-US" sz="1050" dirty="0">
+              <a:rPr lang="en-US" sz="1050" i="1" dirty="0">
                 <a:solidFill>
                   <a:srgbClr val="EDE5CC"/>
                 </a:solidFill>
@@ -3941,7 +4381,7 @@
                 <a:ea typeface="Open Sans" pitchFamily="34" charset="-122"/>
                 <a:cs typeface="Open Sans" pitchFamily="34" charset="-120"/>
               </a:rPr>
-              <a:t>WhatsApp · espacio principal</a:t>
+              <a:t>nuestro espacio principal</a:t>
             </a:r>
             <a:endParaRPr lang="en-US" sz="1050" dirty="0"/>
           </a:p>
@@ -3955,8 +4395,8 @@
         </p:nvSpPr>
         <p:spPr>
           <a:xfrm>
-            <a:off x="4663440" y="3017520"/>
-            <a:ext cx="1700784" cy="2148840"/>
+            <a:off x="4617720" y="2971800"/>
+            <a:ext cx="1792224" cy="2057400"/>
           </a:xfrm>
           <a:prstGeom prst="rect">
             <a:avLst/>
@@ -3968,15 +4408,15 @@
           <a:bodyPr wrap="square" lIns="0" tIns="0" rIns="0" bIns="0" rtlCol="0" anchor="t"/>
           <a:lstStyle/>
           <a:p>
-            <a:pPr marL="190500" indent="-190500">
+            <a:pPr marL="177800" indent="-177800">
               <a:spcAft>
-                <a:spcPts val="900"/>
+                <a:spcPts val="700"/>
               </a:spcAft>
               <a:buSzPct val="100000"/>
               <a:buChar char="•"/>
             </a:pPr>
             <a:r>
-              <a:rPr lang="en-US" sz="1550" dirty="0">
+              <a:rPr lang="en-US" sz="1350" dirty="0">
                 <a:solidFill>
                   <a:srgbClr val="3F1E0D"/>
                 </a:solidFill>
@@ -3984,20 +4424,20 @@
                 <a:ea typeface="Open Sans" pitchFamily="34" charset="-122"/>
                 <a:cs typeface="Open Sans" pitchFamily="34" charset="-120"/>
               </a:rPr>
-              <a:t>dudas y preguntas</a:t>
-            </a:r>
-            <a:endParaRPr lang="en-US" sz="1550" dirty="0"/>
-          </a:p>
-          <a:p>
-            <a:pPr marL="190500" indent="-190500">
+              <a:t>hacer preguntas</a:t>
+            </a:r>
+            <a:endParaRPr lang="en-US" sz="1350" dirty="0"/>
+          </a:p>
+          <a:p>
+            <a:pPr marL="177800" indent="-177800">
               <a:spcAft>
-                <a:spcPts val="900"/>
+                <a:spcPts val="700"/>
               </a:spcAft>
               <a:buSzPct val="100000"/>
               <a:buChar char="•"/>
             </a:pPr>
             <a:r>
-              <a:rPr lang="en-US" sz="1550" dirty="0">
+              <a:rPr lang="en-US" sz="1350" dirty="0">
                 <a:solidFill>
                   <a:srgbClr val="3F1E0D"/>
                 </a:solidFill>
@@ -4005,20 +4445,20 @@
                 <a:ea typeface="Open Sans" pitchFamily="34" charset="-122"/>
                 <a:cs typeface="Open Sans" pitchFamily="34" charset="-120"/>
               </a:rPr>
-              <a:t>prácticas</a:t>
-            </a:r>
-            <a:endParaRPr lang="en-US" sz="1550" dirty="0"/>
-          </a:p>
-          <a:p>
-            <a:pPr marL="190500" indent="-190500">
+              <a:t>compartir prácticas</a:t>
+            </a:r>
+            <a:endParaRPr lang="en-US" sz="1350" dirty="0"/>
+          </a:p>
+          <a:p>
+            <a:pPr marL="177800" indent="-177800">
               <a:spcAft>
-                <a:spcPts val="900"/>
+                <a:spcPts val="700"/>
               </a:spcAft>
               <a:buSzPct val="100000"/>
               <a:buChar char="•"/>
             </a:pPr>
             <a:r>
-              <a:rPr lang="en-US" sz="1550" dirty="0">
+              <a:rPr lang="en-US" sz="1350" dirty="0">
                 <a:solidFill>
                   <a:srgbClr val="3F1E0D"/>
                 </a:solidFill>
@@ -4026,20 +4466,20 @@
                 <a:ea typeface="Open Sans" pitchFamily="34" charset="-122"/>
                 <a:cs typeface="Open Sans" pitchFamily="34" charset="-120"/>
               </a:rPr>
-              <a:t>feedback</a:t>
-            </a:r>
-            <a:endParaRPr lang="en-US" sz="1550" dirty="0"/>
-          </a:p>
-          <a:p>
-            <a:pPr marL="190500" indent="-190500">
+              <a:t>pedirme feedback</a:t>
+            </a:r>
+            <a:endParaRPr lang="en-US" sz="1350" dirty="0"/>
+          </a:p>
+          <a:p>
+            <a:pPr marL="177800" indent="-177800">
               <a:spcAft>
-                <a:spcPts val="900"/>
+                <a:spcPts val="700"/>
               </a:spcAft>
               <a:buSzPct val="100000"/>
               <a:buChar char="•"/>
             </a:pPr>
             <a:r>
-              <a:rPr lang="en-US" sz="1550" dirty="0">
+              <a:rPr lang="en-US" sz="1350" dirty="0">
                 <a:solidFill>
                   <a:srgbClr val="3F1E0D"/>
                 </a:solidFill>
@@ -4047,9 +4487,30 @@
                 <a:ea typeface="Open Sans" pitchFamily="34" charset="-122"/>
                 <a:cs typeface="Open Sans" pitchFamily="34" charset="-120"/>
               </a:rPr>
-              <a:t>avances y aprendizajes</a:t>
-            </a:r>
-            <a:endParaRPr lang="en-US" sz="1550" dirty="0"/>
+              <a:t>contar un avance o algo que aprendiste</a:t>
+            </a:r>
+            <a:endParaRPr lang="en-US" sz="1350" dirty="0"/>
+          </a:p>
+          <a:p>
+            <a:pPr marL="177800" indent="-177800">
+              <a:spcAft>
+                <a:spcPts val="700"/>
+              </a:spcAft>
+              <a:buSzPct val="100000"/>
+              <a:buChar char="•"/>
+            </a:pPr>
+            <a:r>
+              <a:rPr lang="en-US" sz="1350" dirty="0">
+                <a:solidFill>
+                  <a:srgbClr val="3F1E0D"/>
+                </a:solidFill>
+                <a:latin typeface="Open Sans" pitchFamily="34" charset="0"/>
+                <a:ea typeface="Open Sans" pitchFamily="34" charset="-122"/>
+                <a:cs typeface="Open Sans" pitchFamily="34" charset="-120"/>
+              </a:rPr>
+              <a:t>contarme algo que pasó en tu trabajo</a:t>
+            </a:r>
+            <a:endParaRPr lang="en-US" sz="1350" dirty="0"/>
           </a:p>
         </p:txBody>
       </p:sp>
@@ -4062,7 +4523,7 @@
         <p:spPr>
           <a:xfrm>
             <a:off x="6867144" y="1143000"/>
-            <a:ext cx="2203704" cy="4206240"/>
+            <a:ext cx="2203704" cy="4023360"/>
           </a:xfrm>
           <a:prstGeom prst="roundRect">
             <a:avLst>
@@ -4155,8 +4616,8 @@
         </p:blipFill>
         <p:spPr>
           <a:xfrm>
-            <a:off x="7187184" y="1417320"/>
-            <a:ext cx="384048" cy="384048"/>
+            <a:off x="7141464" y="1399032"/>
+            <a:ext cx="365760" cy="365760"/>
           </a:xfrm>
           <a:prstGeom prst="rect">
             <a:avLst/>
@@ -4171,8 +4632,8 @@
         </p:nvSpPr>
         <p:spPr>
           <a:xfrm>
-            <a:off x="7187184" y="1892808"/>
-            <a:ext cx="1655064" cy="411480"/>
+            <a:off x="7141464" y="1828800"/>
+            <a:ext cx="1746504" cy="548640"/>
           </a:xfrm>
           <a:prstGeom prst="rect">
             <a:avLst/>
@@ -4185,10 +4646,13 @@
           <a:lstStyle/>
           <a:p>
             <a:pPr indent="0" marL="0">
-              <a:buNone/>
-            </a:pPr>
-            <a:r>
-              <a:rPr lang="en-US" sz="2100" b="1" dirty="0">
+              <a:lnSpc>
+                <a:spcPct val="90000"/>
+              </a:lnSpc>
+              <a:buNone/>
+            </a:pPr>
+            <a:r>
+              <a:rPr lang="en-US" sz="1700" b="1" dirty="0">
                 <a:solidFill>
                   <a:srgbClr val="F8F5EE"/>
                 </a:solidFill>
@@ -4196,9 +4660,9 @@
                 <a:ea typeface="Source Serif Pro" pitchFamily="34" charset="-122"/>
                 <a:cs typeface="Source Serif Pro" pitchFamily="34" charset="-120"/>
               </a:rPr>
-              <a:t>Privado</a:t>
-            </a:r>
-            <a:endParaRPr lang="en-US" sz="2100" dirty="0"/>
+              <a:t>Mensaje privado</a:t>
+            </a:r>
+            <a:endParaRPr lang="en-US" sz="1700" dirty="0"/>
           </a:p>
         </p:txBody>
       </p:sp>
@@ -4210,8 +4674,8 @@
         </p:nvSpPr>
         <p:spPr>
           <a:xfrm>
-            <a:off x="7187184" y="2286000"/>
-            <a:ext cx="1746504" cy="274320"/>
+            <a:off x="7141464" y="2377440"/>
+            <a:ext cx="1746504" cy="256032"/>
           </a:xfrm>
           <a:prstGeom prst="rect">
             <a:avLst/>
@@ -4227,7 +4691,7 @@
               <a:buNone/>
             </a:pPr>
             <a:r>
-              <a:rPr lang="en-US" sz="1050" dirty="0">
+              <a:rPr lang="en-US" sz="1050" i="1" dirty="0">
                 <a:solidFill>
                   <a:srgbClr val="EDE5CC"/>
                 </a:solidFill>
@@ -4235,7 +4699,7 @@
                 <a:ea typeface="Open Sans" pitchFamily="34" charset="-122"/>
                 <a:cs typeface="Open Sans" pitchFamily="34" charset="-120"/>
               </a:rPr>
-              <a:t>mensaje directo</a:t>
+              <a:t>escríbeme directamente</a:t>
             </a:r>
             <a:endParaRPr lang="en-US" sz="1050" dirty="0"/>
           </a:p>
@@ -4249,8 +4713,8 @@
         </p:nvSpPr>
         <p:spPr>
           <a:xfrm>
-            <a:off x="7141464" y="3017520"/>
-            <a:ext cx="1700784" cy="2148840"/>
+            <a:off x="7095744" y="2971800"/>
+            <a:ext cx="1792224" cy="2057400"/>
           </a:xfrm>
           <a:prstGeom prst="rect">
             <a:avLst/>
@@ -4262,15 +4726,15 @@
           <a:bodyPr wrap="square" lIns="0" tIns="0" rIns="0" bIns="0" rtlCol="0" anchor="t"/>
           <a:lstStyle/>
           <a:p>
-            <a:pPr marL="190500" indent="-190500">
+            <a:pPr marL="177800" indent="-177800">
               <a:spcAft>
-                <a:spcPts val="900"/>
+                <a:spcPts val="700"/>
               </a:spcAft>
               <a:buSzPct val="100000"/>
               <a:buChar char="•"/>
             </a:pPr>
             <a:r>
-              <a:rPr lang="en-US" sz="1550" dirty="0">
+              <a:rPr lang="en-US" sz="1350" dirty="0">
                 <a:solidFill>
                   <a:srgbClr val="3F1E0D"/>
                 </a:solidFill>
@@ -4280,18 +4744,18 @@
               </a:rPr>
               <a:t>temas administrativos</a:t>
             </a:r>
-            <a:endParaRPr lang="en-US" sz="1550" dirty="0"/>
-          </a:p>
-          <a:p>
-            <a:pPr marL="190500" indent="-190500">
+            <a:endParaRPr lang="en-US" sz="1350" dirty="0"/>
+          </a:p>
+          <a:p>
+            <a:pPr marL="177800" indent="-177800">
               <a:spcAft>
-                <a:spcPts val="900"/>
+                <a:spcPts val="700"/>
               </a:spcAft>
               <a:buSzPct val="100000"/>
               <a:buChar char="•"/>
             </a:pPr>
             <a:r>
-              <a:rPr lang="en-US" sz="1550" dirty="0">
+              <a:rPr lang="en-US" sz="1350" dirty="0">
                 <a:solidFill>
                   <a:srgbClr val="3F1E0D"/>
                 </a:solidFill>
@@ -4299,9 +4763,9 @@
                 <a:ea typeface="Open Sans" pitchFamily="34" charset="-122"/>
                 <a:cs typeface="Open Sans" pitchFamily="34" charset="-120"/>
               </a:rPr>
-              <a:t>lo que prefieras mantener en privado</a:t>
-            </a:r>
-            <a:endParaRPr lang="en-US" sz="1550" dirty="0"/>
+              <a:t>algo que prefieres mantener en privado</a:t>
+            </a:r>
+            <a:endParaRPr lang="en-US" sz="1350" dirty="0"/>
           </a:p>
         </p:txBody>
       </p:sp>
@@ -4314,7 +4778,7 @@
         <p:spPr>
           <a:xfrm>
             <a:off x="9345168" y="1143000"/>
-            <a:ext cx="2203704" cy="4206240"/>
+            <a:ext cx="2203704" cy="4023360"/>
           </a:xfrm>
           <a:prstGeom prst="roundRect">
             <a:avLst>
@@ -4407,8 +4871,8 @@
         </p:blipFill>
         <p:spPr>
           <a:xfrm>
-            <a:off x="9665208" y="1417320"/>
-            <a:ext cx="384048" cy="384048"/>
+            <a:off x="9619488" y="1399032"/>
+            <a:ext cx="365760" cy="365760"/>
           </a:xfrm>
           <a:prstGeom prst="rect">
             <a:avLst/>
@@ -4423,8 +4887,8 @@
         </p:nvSpPr>
         <p:spPr>
           <a:xfrm>
-            <a:off x="9665208" y="1892808"/>
-            <a:ext cx="1655064" cy="411480"/>
+            <a:off x="9619488" y="1828800"/>
+            <a:ext cx="1746504" cy="548640"/>
           </a:xfrm>
           <a:prstGeom prst="rect">
             <a:avLst/>
@@ -4437,10 +4901,13 @@
           <a:lstStyle/>
           <a:p>
             <a:pPr indent="0" marL="0">
-              <a:buNone/>
-            </a:pPr>
-            <a:r>
-              <a:rPr lang="en-US" sz="2100" b="1" dirty="0">
+              <a:lnSpc>
+                <a:spcPct val="90000"/>
+              </a:lnSpc>
+              <a:buNone/>
+            </a:pPr>
+            <a:r>
+              <a:rPr lang="en-US" sz="1700" b="1" dirty="0">
                 <a:solidFill>
                   <a:srgbClr val="F8F5EE"/>
                 </a:solidFill>
@@ -4450,7 +4917,7 @@
               </a:rPr>
               <a:t>Sesión 1:1</a:t>
             </a:r>
-            <a:endParaRPr lang="en-US" sz="2100" dirty="0"/>
+            <a:endParaRPr lang="en-US" sz="1700" dirty="0"/>
           </a:p>
         </p:txBody>
       </p:sp>
@@ -4462,8 +4929,8 @@
         </p:nvSpPr>
         <p:spPr>
           <a:xfrm>
-            <a:off x="9665208" y="2286000"/>
-            <a:ext cx="1746504" cy="274320"/>
+            <a:off x="9619488" y="2377440"/>
+            <a:ext cx="1746504" cy="256032"/>
           </a:xfrm>
           <a:prstGeom prst="rect">
             <a:avLst/>
@@ -4479,7 +4946,7 @@
               <a:buNone/>
             </a:pPr>
             <a:r>
-              <a:rPr lang="en-US" sz="1050" dirty="0">
+              <a:rPr lang="en-US" sz="1050" i="1" dirty="0">
                 <a:solidFill>
                   <a:srgbClr val="EDE5CC"/>
                 </a:solidFill>
@@ -4487,7 +4954,7 @@
                 <a:ea typeface="Open Sans" pitchFamily="34" charset="-122"/>
                 <a:cs typeface="Open Sans" pitchFamily="34" charset="-120"/>
               </a:rPr>
-              <a:t>trabajo en profundidad</a:t>
+              <a:t>para trabajarlo bien</a:t>
             </a:r>
             <a:endParaRPr lang="en-US" sz="1050" dirty="0"/>
           </a:p>
@@ -4501,8 +4968,8 @@
         </p:nvSpPr>
         <p:spPr>
           <a:xfrm>
-            <a:off x="9619488" y="3017520"/>
-            <a:ext cx="1700784" cy="2148840"/>
+            <a:off x="9573768" y="2971800"/>
+            <a:ext cx="1792224" cy="2057400"/>
           </a:xfrm>
           <a:prstGeom prst="rect">
             <a:avLst/>
@@ -4514,15 +4981,15 @@
           <a:bodyPr wrap="square" lIns="0" tIns="0" rIns="0" bIns="0" rtlCol="0" anchor="t"/>
           <a:lstStyle/>
           <a:p>
-            <a:pPr marL="190500" indent="-190500">
+            <a:pPr marL="177800" indent="-177800">
               <a:spcAft>
-                <a:spcPts val="900"/>
+                <a:spcPts val="700"/>
               </a:spcAft>
               <a:buSzPct val="100000"/>
               <a:buChar char="•"/>
             </a:pPr>
             <a:r>
-              <a:rPr lang="en-US" sz="1550" dirty="0">
+              <a:rPr lang="en-US" sz="1350" dirty="0">
                 <a:solidFill>
                   <a:srgbClr val="3F1E0D"/>
                 </a:solidFill>
@@ -4530,9 +4997,9 @@
                 <a:ea typeface="Open Sans" pitchFamily="34" charset="-122"/>
                 <a:cs typeface="Open Sans" pitchFamily="34" charset="-120"/>
               </a:rPr>
-              <a:t>situaciones que necesitan más contexto y análisis</a:t>
-            </a:r>
-            <a:endParaRPr lang="en-US" sz="1550" dirty="0"/>
+              <a:t>situaciones que necesitan más contexto, análisis o trabajo en profundidad</a:t>
+            </a:r>
+            <a:endParaRPr lang="en-US" sz="1350" dirty="0"/>
           </a:p>
         </p:txBody>
       </p:sp>
@@ -4696,7 +5163,7 @@
                 <a:ea typeface="Source Serif Pro" pitchFamily="34" charset="-122"/>
                 <a:cs typeface="Source Serif Pro" pitchFamily="34" charset="-120"/>
               </a:rPr>
-              <a:t>Mi horario de trabajo</a:t>
+              <a:t>Cuándo reviso tus mensajes</a:t>
             </a:r>
             <a:endParaRPr lang="en-US" sz="3400" dirty="0"/>
           </a:p>
@@ -4735,7 +5202,7 @@
                 <a:ea typeface="Source Serif Pro" pitchFamily="34" charset="-122"/>
                 <a:cs typeface="Source Serif Pro" pitchFamily="34" charset="-120"/>
               </a:rPr>
-              <a:t>Cuándo reviso y respondo tus mensajes</a:t>
+              <a:t>Deja tus dudas, prácticas o situaciones en la comunidad siempre que lo necesites</a:t>
             </a:r>
             <a:endParaRPr lang="en-US" sz="1600" dirty="0"/>
           </a:p>
@@ -4750,11 +5217,11 @@
         <p:spPr>
           <a:xfrm>
             <a:off x="4389120" y="1143000"/>
-            <a:ext cx="7159752" cy="2788920"/>
+            <a:ext cx="7159752" cy="2651760"/>
           </a:xfrm>
           <a:prstGeom prst="roundRect">
             <a:avLst>
-              <a:gd name="adj" fmla="val 5246"/>
+              <a:gd name="adj" fmla="val 5517"/>
             </a:avLst>
           </a:prstGeom>
           <a:solidFill>
@@ -4775,40 +5242,16 @@
           </a:effectLst>
         </p:spPr>
       </p:sp>
-      <p:pic>
-        <p:nvPicPr>
-          <p:cNvPr id="8" name="Image 0" descr="preencoded.png">    </p:cNvPr>
-          <p:cNvPicPr>
-            <a:picLocks noChangeAspect="1"/>
-          </p:cNvPicPr>
-          <p:nvPr/>
-        </p:nvPicPr>
-        <p:blipFill>
-          <a:blip r:embed="rId1"/>
-          <a:stretch>
-            <a:fillRect/>
-          </a:stretch>
-        </p:blipFill>
-        <p:spPr>
-          <a:xfrm>
-            <a:off x="4846320" y="1554480"/>
-            <a:ext cx="347472" cy="347472"/>
-          </a:xfrm>
-          <a:prstGeom prst="rect">
-            <a:avLst/>
-          </a:prstGeom>
-        </p:spPr>
-      </p:pic>
-      <p:sp>
-        <p:nvSpPr>
-          <p:cNvPr id="9" name="Text 5"/>
+      <p:sp>
+        <p:nvSpPr>
+          <p:cNvPr id="8" name="Text 5"/>
           <p:cNvSpPr txBox="1"/>
           <p:nvPr/>
         </p:nvSpPr>
         <p:spPr>
           <a:xfrm>
-            <a:off x="5349240" y="1545336"/>
-            <a:ext cx="4572000" cy="365760"/>
+            <a:off x="4846320" y="1508760"/>
+            <a:ext cx="6245352" cy="320040"/>
           </a:xfrm>
           <a:prstGeom prst="rect">
             <a:avLst/>
@@ -4824,7 +5267,7 @@
               <a:buNone/>
             </a:pPr>
             <a:r>
-              <a:rPr lang="en-US" sz="1400" b="1" spc="400" kern="0" dirty="0">
+              <a:rPr lang="en-US" sz="1250" b="1" spc="300" kern="0" dirty="0">
                 <a:solidFill>
                   <a:srgbClr val="C68C6C"/>
                 </a:solidFill>
@@ -4832,22 +5275,22 @@
                 <a:ea typeface="Open Sans" pitchFamily="34" charset="-122"/>
                 <a:cs typeface="Open Sans" pitchFamily="34" charset="-120"/>
               </a:rPr>
-              <a:t>LUNES A VIERNES</a:t>
-            </a:r>
-            <a:endParaRPr lang="en-US" sz="1400" dirty="0"/>
-          </a:p>
-        </p:txBody>
-      </p:sp>
-      <p:sp>
-        <p:nvSpPr>
-          <p:cNvPr id="10" name="Text 6"/>
+              <a:t>REVISO Y RESPONDO LOS MENSAJES</a:t>
+            </a:r>
+            <a:endParaRPr lang="en-US" sz="1250" dirty="0"/>
+          </a:p>
+        </p:txBody>
+      </p:sp>
+      <p:sp>
+        <p:nvSpPr>
+          <p:cNvPr id="9" name="Text 6"/>
           <p:cNvSpPr txBox="1"/>
           <p:nvPr/>
         </p:nvSpPr>
         <p:spPr>
           <a:xfrm>
-            <a:off x="4846320" y="2057400"/>
-            <a:ext cx="6245352" cy="1143000"/>
+            <a:off x="4846320" y="1920240"/>
+            <a:ext cx="6245352" cy="1097280"/>
           </a:xfrm>
           <a:prstGeom prst="rect">
             <a:avLst/>
@@ -4863,7 +5306,7 @@
               <a:buNone/>
             </a:pPr>
             <a:r>
-              <a:rPr lang="en-US" sz="7000" b="1" dirty="0">
+              <a:rPr lang="en-US" sz="3000" i="1" dirty="0">
                 <a:solidFill>
                   <a:srgbClr val="F8F5EE"/>
                 </a:solidFill>
@@ -4871,65 +5314,79 @@
                 <a:ea typeface="Source Serif Pro" pitchFamily="34" charset="-122"/>
                 <a:cs typeface="Source Serif Pro" pitchFamily="34" charset="-120"/>
               </a:rPr>
-              <a:t>9:00 – 18:00</a:t>
-            </a:r>
-            <a:endParaRPr lang="en-US" sz="7000" dirty="0"/>
-          </a:p>
-        </p:txBody>
-      </p:sp>
-      <p:sp>
-        <p:nvSpPr>
-          <p:cNvPr id="11" name="Text 7"/>
-          <p:cNvSpPr txBox="1"/>
-          <p:nvPr/>
-        </p:nvSpPr>
-        <p:spPr>
-          <a:xfrm>
-            <a:off x="4846320" y="3246120"/>
-            <a:ext cx="6245352" cy="411480"/>
-          </a:xfrm>
-          <a:prstGeom prst="rect">
-            <a:avLst/>
-          </a:prstGeom>
-          <a:noFill/>
-          <a:ln/>
-        </p:spPr>
-        <p:txBody>
-          <a:bodyPr wrap="square" lIns="0" tIns="0" rIns="0" bIns="0" rtlCol="0" anchor="ctr"/>
-          <a:lstStyle/>
-          <a:p>
+              <a:t>de lunes a viernes, </a:t>
+            </a:r>
             <a:pPr indent="0" marL="0">
               <a:buNone/>
             </a:pPr>
             <a:r>
-              <a:rPr lang="en-US" sz="1800" i="1" dirty="0">
-                <a:solidFill>
-                  <a:srgbClr val="EDE5CC"/>
+              <a:rPr lang="en-US" sz="5400" b="1" dirty="0">
+                <a:solidFill>
+                  <a:srgbClr val="F8F5EE"/>
                 </a:solidFill>
                 <a:latin typeface="Source Serif Pro" pitchFamily="34" charset="0"/>
                 <a:ea typeface="Source Serif Pro" pitchFamily="34" charset="-122"/>
                 <a:cs typeface="Source Serif Pro" pitchFamily="34" charset="-120"/>
               </a:rPr>
+              <a:t>9 a 18 h</a:t>
+            </a:r>
+            <a:endParaRPr lang="en-US" sz="3000" dirty="0"/>
+          </a:p>
+        </p:txBody>
+      </p:sp>
+      <p:sp>
+        <p:nvSpPr>
+          <p:cNvPr id="10" name="Text 7"/>
+          <p:cNvSpPr txBox="1"/>
+          <p:nvPr/>
+        </p:nvSpPr>
+        <p:spPr>
+          <a:xfrm>
+            <a:off x="4846320" y="3063240"/>
+            <a:ext cx="6245352" cy="365760"/>
+          </a:xfrm>
+          <a:prstGeom prst="rect">
+            <a:avLst/>
+          </a:prstGeom>
+          <a:noFill/>
+          <a:ln/>
+        </p:spPr>
+        <p:txBody>
+          <a:bodyPr wrap="square" lIns="0" tIns="0" rIns="0" bIns="0" rtlCol="0" anchor="ctr"/>
+          <a:lstStyle/>
+          <a:p>
+            <a:pPr indent="0" marL="0">
+              <a:buNone/>
+            </a:pPr>
+            <a:r>
+              <a:rPr lang="en-US" sz="1700" i="1" dirty="0">
+                <a:solidFill>
+                  <a:srgbClr val="EDE5CC"/>
+                </a:solidFill>
+                <a:latin typeface="Source Serif Pro" pitchFamily="34" charset="0"/>
+                <a:ea typeface="Source Serif Pro" pitchFamily="34" charset="-122"/>
+                <a:cs typeface="Source Serif Pro" pitchFamily="34" charset="-120"/>
+              </a:rPr>
               <a:t>horario de Buenos Aires</a:t>
             </a:r>
-            <a:endParaRPr lang="en-US" sz="1800" dirty="0"/>
-          </a:p>
-        </p:txBody>
-      </p:sp>
-      <p:sp>
-        <p:nvSpPr>
-          <p:cNvPr id="12" name="Shape 8"/>
+            <a:endParaRPr lang="en-US" sz="1700" dirty="0"/>
+          </a:p>
+        </p:txBody>
+      </p:sp>
+      <p:sp>
+        <p:nvSpPr>
+          <p:cNvPr id="11" name="Shape 8"/>
           <p:cNvSpPr/>
           <p:nvPr/>
         </p:nvSpPr>
         <p:spPr>
           <a:xfrm>
-            <a:off x="4389120" y="4206240"/>
-            <a:ext cx="7159752" cy="1783080"/>
+            <a:off x="4389120" y="4069080"/>
+            <a:ext cx="7159752" cy="1417320"/>
           </a:xfrm>
           <a:prstGeom prst="roundRect">
             <a:avLst>
-              <a:gd name="adj" fmla="val 8205"/>
+              <a:gd name="adj" fmla="val 10323"/>
             </a:avLst>
           </a:prstGeom>
           <a:solidFill>
@@ -4952,14 +5409,14 @@
       </p:sp>
       <p:sp>
         <p:nvSpPr>
-          <p:cNvPr id="13" name="Shape 9"/>
+          <p:cNvPr id="12" name="Shape 9"/>
           <p:cNvSpPr/>
           <p:nvPr/>
         </p:nvSpPr>
         <p:spPr>
           <a:xfrm>
-            <a:off x="4800600" y="4681728"/>
-            <a:ext cx="822960" cy="822960"/>
+            <a:off x="4754880" y="4389120"/>
+            <a:ext cx="777240" cy="777240"/>
           </a:xfrm>
           <a:prstGeom prst="ellipse">
             <a:avLst/>
@@ -4977,22 +5434,22 @@
       </p:sp>
       <p:pic>
         <p:nvPicPr>
-          <p:cNvPr id="14" name="Image 1" descr="preencoded.png">    </p:cNvPr>
+          <p:cNvPr id="13" name="Image 0" descr="preencoded.png">    </p:cNvPr>
           <p:cNvPicPr>
             <a:picLocks noChangeAspect="1"/>
           </p:cNvPicPr>
           <p:nvPr/>
         </p:nvPicPr>
         <p:blipFill>
-          <a:blip r:embed="rId2"/>
+          <a:blip r:embed="rId1"/>
           <a:stretch>
             <a:fillRect/>
           </a:stretch>
         </p:blipFill>
         <p:spPr>
           <a:xfrm>
-            <a:off x="5022799" y="4903927"/>
-            <a:ext cx="378562" cy="378562"/>
+            <a:off x="4964735" y="4598975"/>
+            <a:ext cx="357530" cy="357530"/>
           </a:xfrm>
           <a:prstGeom prst="rect">
             <a:avLst/>
@@ -5001,14 +5458,14 @@
       </p:pic>
       <p:sp>
         <p:nvSpPr>
-          <p:cNvPr id="15" name="Text 10"/>
+          <p:cNvPr id="14" name="Text 10"/>
           <p:cNvSpPr txBox="1"/>
           <p:nvPr/>
         </p:nvSpPr>
         <p:spPr>
           <a:xfrm>
-            <a:off x="5943600" y="4206240"/>
-            <a:ext cx="5239512" cy="1783080"/>
+            <a:off x="5806440" y="4069080"/>
+            <a:ext cx="5422392" cy="1417320"/>
           </a:xfrm>
           <a:prstGeom prst="rect">
             <a:avLst/>
@@ -5022,12 +5479,12 @@
           <a:p>
             <a:pPr indent="0" marL="0">
               <a:spcAft>
-                <a:spcPts val="600"/>
+                <a:spcPts val="500"/>
               </a:spcAft>
               <a:buNone/>
             </a:pPr>
             <a:r>
-              <a:rPr lang="en-US" sz="1900" b="1" dirty="0">
+              <a:rPr lang="en-US" sz="1750" b="1" dirty="0">
                 <a:solidFill>
                   <a:srgbClr val="81552E"/>
                 </a:solidFill>
@@ -5035,19 +5492,19 @@
                 <a:ea typeface="Open Sans" pitchFamily="34" charset="-122"/>
                 <a:cs typeface="Open Sans" pitchFamily="34" charset="-120"/>
               </a:rPr>
-              <a:t>Escribime cuando lo necesites</a:t>
-            </a:r>
-            <a:endParaRPr lang="en-US" sz="1900" dirty="0"/>
+              <a:t>¿Fuera de ese horario o el fin de semana?</a:t>
+            </a:r>
+            <a:endParaRPr lang="en-US" sz="1750" dirty="0"/>
           </a:p>
           <a:p>
             <a:pPr indent="0" marL="0">
               <a:spcAft>
-                <a:spcPts val="600"/>
+                <a:spcPts val="500"/>
               </a:spcAft>
               <a:buNone/>
             </a:pPr>
             <a:r>
-              <a:rPr lang="en-US" sz="1550" dirty="0">
+              <a:rPr lang="en-US" sz="1500" dirty="0">
                 <a:solidFill>
                   <a:srgbClr val="3F1E0D"/>
                 </a:solidFill>
@@ -5055,9 +5512,48 @@
                 <a:ea typeface="Open Sans" pitchFamily="34" charset="-122"/>
                 <a:cs typeface="Open Sans" pitchFamily="34" charset="-120"/>
               </a:rPr>
-              <a:t>Si es fuera de horario o el fin de semana, escribilo igual: el mensaje queda ahí y lo retomo cuando vuelva a estar disponible.</a:t>
-            </a:r>
-            <a:endParaRPr lang="en-US" sz="1900" dirty="0"/>
+              <a:t>Escríbelo igual, con total tranquilidad. El mensaje queda ahí y lo retomo cuando vuelva a estar disponible.</a:t>
+            </a:r>
+            <a:endParaRPr lang="en-US" sz="1750" dirty="0"/>
+          </a:p>
+        </p:txBody>
+      </p:sp>
+      <p:sp>
+        <p:nvSpPr>
+          <p:cNvPr id="15" name="Text 11"/>
+          <p:cNvSpPr txBox="1"/>
+          <p:nvPr/>
+        </p:nvSpPr>
+        <p:spPr>
+          <a:xfrm>
+            <a:off x="4389120" y="5669280"/>
+            <a:ext cx="7159752" cy="411480"/>
+          </a:xfrm>
+          <a:prstGeom prst="rect">
+            <a:avLst/>
+          </a:prstGeom>
+          <a:noFill/>
+          <a:ln/>
+        </p:spPr>
+        <p:txBody>
+          <a:bodyPr wrap="square" lIns="0" tIns="0" rIns="0" bIns="0" rtlCol="0" anchor="ctr"/>
+          <a:lstStyle/>
+          <a:p>
+            <a:pPr algn="ctr" indent="0" marL="0">
+              <a:buNone/>
+            </a:pPr>
+            <a:r>
+              <a:rPr lang="en-US" sz="1600" i="1" dirty="0">
+                <a:solidFill>
+                  <a:srgbClr val="81552E"/>
+                </a:solidFill>
+                <a:latin typeface="Source Serif Pro" pitchFamily="34" charset="0"/>
+                <a:ea typeface="Source Serif Pro" pitchFamily="34" charset="-122"/>
+                <a:cs typeface="Source Serif Pro" pitchFamily="34" charset="-120"/>
+              </a:rPr>
+              <a:t>No tienes que guardarte una duda hasta nuestra próxima sesión.</a:t>
+            </a:r>
+            <a:endParaRPr lang="en-US" sz="1600" dirty="0"/>
           </a:p>
         </p:txBody>
       </p:sp>
@@ -5260,7 +5756,7 @@
                 <a:ea typeface="Source Serif Pro" pitchFamily="34" charset="-122"/>
                 <a:cs typeface="Source Serif Pro" pitchFamily="34" charset="-120"/>
               </a:rPr>
-              <a:t>Algo puntual que quieras revisar</a:t>
+              <a:t>Más adelante en este onboarding te muestro exactamente cómo pedirlo</a:t>
             </a:r>
             <a:endParaRPr lang="en-US" sz="1600" dirty="0"/>
           </a:p>
@@ -5275,11 +5771,11 @@
         <p:spPr>
           <a:xfrm>
             <a:off x="4389120" y="1143000"/>
-            <a:ext cx="2203704" cy="2697480"/>
+            <a:ext cx="1618488" cy="2606040"/>
           </a:xfrm>
           <a:prstGeom prst="roundRect">
             <a:avLst>
-              <a:gd name="adj" fmla="val 6639"/>
+              <a:gd name="adj" fmla="val 9040"/>
             </a:avLst>
           </a:prstGeom>
           <a:solidFill>
@@ -5308,8 +5804,8 @@
         </p:nvSpPr>
         <p:spPr>
           <a:xfrm>
-            <a:off x="5010912" y="1508760"/>
-            <a:ext cx="960120" cy="960120"/>
+            <a:off x="4786884" y="1463040"/>
+            <a:ext cx="822960" cy="822960"/>
           </a:xfrm>
           <a:prstGeom prst="ellipse">
             <a:avLst/>
@@ -5341,8 +5837,8 @@
         </p:blipFill>
         <p:spPr>
           <a:xfrm>
-            <a:off x="5270144" y="1767992"/>
-            <a:ext cx="441655" cy="441655"/>
+            <a:off x="5009083" y="1685239"/>
+            <a:ext cx="378562" cy="378562"/>
           </a:xfrm>
           <a:prstGeom prst="rect">
             <a:avLst/>
@@ -5357,8 +5853,8 @@
         </p:nvSpPr>
         <p:spPr>
           <a:xfrm>
-            <a:off x="4617720" y="2697480"/>
-            <a:ext cx="1746504" cy="960120"/>
+            <a:off x="4526280" y="2423160"/>
+            <a:ext cx="1344168" cy="1143000"/>
           </a:xfrm>
           <a:prstGeom prst="rect">
             <a:avLst/>
@@ -5374,7 +5870,7 @@
               <a:buNone/>
             </a:pPr>
             <a:r>
-              <a:rPr lang="en-US" sz="1600" b="1" dirty="0">
+              <a:rPr lang="en-US" sz="1350" b="1" dirty="0">
                 <a:solidFill>
                   <a:srgbClr val="81552E"/>
                 </a:solidFill>
@@ -5384,7 +5880,7 @@
               </a:rPr>
               <a:t>Una práctica</a:t>
             </a:r>
-            <a:endParaRPr lang="en-US" sz="1600" dirty="0"/>
+            <a:endParaRPr lang="en-US" sz="1350" dirty="0"/>
           </a:p>
         </p:txBody>
       </p:sp>
@@ -5396,12 +5892,12 @@
         </p:nvSpPr>
         <p:spPr>
           <a:xfrm>
-            <a:off x="6867144" y="1143000"/>
-            <a:ext cx="2203704" cy="2697480"/>
+            <a:off x="6236208" y="1143000"/>
+            <a:ext cx="1618488" cy="2606040"/>
           </a:xfrm>
           <a:prstGeom prst="roundRect">
             <a:avLst>
-              <a:gd name="adj" fmla="val 6639"/>
+              <a:gd name="adj" fmla="val 9040"/>
             </a:avLst>
           </a:prstGeom>
           <a:solidFill>
@@ -5430,8 +5926,8 @@
         </p:nvSpPr>
         <p:spPr>
           <a:xfrm>
-            <a:off x="7488936" y="1508760"/>
-            <a:ext cx="960120" cy="960120"/>
+            <a:off x="6633972" y="1463040"/>
+            <a:ext cx="822960" cy="822960"/>
           </a:xfrm>
           <a:prstGeom prst="ellipse">
             <a:avLst/>
@@ -5463,8 +5959,8 @@
         </p:blipFill>
         <p:spPr>
           <a:xfrm>
-            <a:off x="7748168" y="1767992"/>
-            <a:ext cx="441655" cy="441655"/>
+            <a:off x="6856171" y="1685239"/>
+            <a:ext cx="378562" cy="378562"/>
           </a:xfrm>
           <a:prstGeom prst="rect">
             <a:avLst/>
@@ -5479,8 +5975,8 @@
         </p:nvSpPr>
         <p:spPr>
           <a:xfrm>
-            <a:off x="7095744" y="2697480"/>
-            <a:ext cx="1746504" cy="960120"/>
+            <a:off x="6373368" y="2423160"/>
+            <a:ext cx="1344168" cy="1143000"/>
           </a:xfrm>
           <a:prstGeom prst="rect">
             <a:avLst/>
@@ -5496,7 +5992,7 @@
               <a:buNone/>
             </a:pPr>
             <a:r>
-              <a:rPr lang="en-US" sz="1600" b="1" dirty="0">
+              <a:rPr lang="en-US" sz="1350" b="1" dirty="0">
                 <a:solidFill>
                   <a:srgbClr val="81552E"/>
                 </a:solidFill>
@@ -5506,7 +6002,7 @@
               </a:rPr>
               <a:t>Una respuesta que estés preparando</a:t>
             </a:r>
-            <a:endParaRPr lang="en-US" sz="1600" dirty="0"/>
+            <a:endParaRPr lang="en-US" sz="1350" dirty="0"/>
           </a:p>
         </p:txBody>
       </p:sp>
@@ -5518,12 +6014,12 @@
         </p:nvSpPr>
         <p:spPr>
           <a:xfrm>
-            <a:off x="9345168" y="1143000"/>
-            <a:ext cx="2203704" cy="2697480"/>
+            <a:off x="8083296" y="1143000"/>
+            <a:ext cx="1618488" cy="2606040"/>
           </a:xfrm>
           <a:prstGeom prst="roundRect">
             <a:avLst>
-              <a:gd name="adj" fmla="val 6639"/>
+              <a:gd name="adj" fmla="val 9040"/>
             </a:avLst>
           </a:prstGeom>
           <a:solidFill>
@@ -5552,8 +6048,8 @@
         </p:nvSpPr>
         <p:spPr>
           <a:xfrm>
-            <a:off x="9966960" y="1508760"/>
-            <a:ext cx="960120" cy="960120"/>
+            <a:off x="8481060" y="1463040"/>
+            <a:ext cx="822960" cy="822960"/>
           </a:xfrm>
           <a:prstGeom prst="ellipse">
             <a:avLst/>
@@ -5585,8 +6081,8 @@
         </p:blipFill>
         <p:spPr>
           <a:xfrm>
-            <a:off x="10226192" y="1767992"/>
-            <a:ext cx="441655" cy="441655"/>
+            <a:off x="8703259" y="1685239"/>
+            <a:ext cx="378562" cy="378562"/>
           </a:xfrm>
           <a:prstGeom prst="rect">
             <a:avLst/>
@@ -5601,8 +6097,8 @@
         </p:nvSpPr>
         <p:spPr>
           <a:xfrm>
-            <a:off x="9573768" y="2697480"/>
-            <a:ext cx="1746504" cy="960120"/>
+            <a:off x="8220456" y="2423160"/>
+            <a:ext cx="1344168" cy="1143000"/>
           </a:xfrm>
           <a:prstGeom prst="rect">
             <a:avLst/>
@@ -5618,7 +6114,7 @@
               <a:buNone/>
             </a:pPr>
             <a:r>
-              <a:rPr lang="en-US" sz="1600" b="1" dirty="0">
+              <a:rPr lang="en-US" sz="1350" b="1" dirty="0">
                 <a:solidFill>
                   <a:srgbClr val="81552E"/>
                 </a:solidFill>
@@ -5626,9 +6122,9 @@
                 <a:ea typeface="Open Sans" pitchFamily="34" charset="-122"/>
                 <a:cs typeface="Open Sans" pitchFamily="34" charset="-120"/>
               </a:rPr>
-              <a:t>Un mensaje que quieras comunicar mejor</a:t>
-            </a:r>
-            <a:endParaRPr lang="en-US" sz="1600" dirty="0"/>
+              <a:t>Un mensaje que quieras comunicar con más claridad</a:t>
+            </a:r>
+            <a:endParaRPr lang="en-US" sz="1350" dirty="0"/>
           </a:p>
         </p:txBody>
       </p:sp>
@@ -5640,12 +6136,134 @@
         </p:nvSpPr>
         <p:spPr>
           <a:xfrm>
-            <a:off x="4389120" y="4160520"/>
-            <a:ext cx="7159752" cy="1828800"/>
+            <a:off x="9930384" y="1143000"/>
+            <a:ext cx="1618488" cy="2606040"/>
           </a:xfrm>
           <a:prstGeom prst="roundRect">
             <a:avLst>
-              <a:gd name="adj" fmla="val 8000"/>
+              <a:gd name="adj" fmla="val 9040"/>
+            </a:avLst>
+          </a:prstGeom>
+          <a:solidFill>
+            <a:srgbClr val="FFFDF9"/>
+          </a:solidFill>
+          <a:ln w="12700">
+            <a:solidFill>
+              <a:srgbClr val="FFFDF9"/>
+            </a:solidFill>
+            <a:prstDash val="solid"/>
+          </a:ln>
+          <a:effectLst>
+            <a:outerShdw sx="100000" sy="100000" kx="0" ky="0" algn="bl" rotWithShape="0" blurRad="177800" dist="38100" dir="5400000">
+              <a:srgbClr val="3F1E0D">
+                <a:alpha val="10000"/>
+              </a:srgbClr>
+            </a:outerShdw>
+          </a:effectLst>
+        </p:spPr>
+      </p:sp>
+      <p:sp>
+        <p:nvSpPr>
+          <p:cNvPr id="20" name="Shape 14"/>
+          <p:cNvSpPr/>
+          <p:nvPr/>
+        </p:nvSpPr>
+        <p:spPr>
+          <a:xfrm>
+            <a:off x="10328148" y="1463040"/>
+            <a:ext cx="822960" cy="822960"/>
+          </a:xfrm>
+          <a:prstGeom prst="ellipse">
+            <a:avLst/>
+          </a:prstGeom>
+          <a:solidFill>
+            <a:srgbClr val="C68C6C"/>
+          </a:solidFill>
+          <a:ln w="12700">
+            <a:solidFill>
+              <a:srgbClr val="C68C6C"/>
+            </a:solidFill>
+            <a:prstDash val="solid"/>
+          </a:ln>
+        </p:spPr>
+      </p:sp>
+      <p:pic>
+        <p:nvPicPr>
+          <p:cNvPr id="21" name="Image 3" descr="preencoded.png">    </p:cNvPr>
+          <p:cNvPicPr>
+            <a:picLocks noChangeAspect="1"/>
+          </p:cNvPicPr>
+          <p:nvPr/>
+        </p:nvPicPr>
+        <p:blipFill>
+          <a:blip r:embed="rId4"/>
+          <a:stretch>
+            <a:fillRect/>
+          </a:stretch>
+        </p:blipFill>
+        <p:spPr>
+          <a:xfrm>
+            <a:off x="10550347" y="1685239"/>
+            <a:ext cx="378562" cy="378562"/>
+          </a:xfrm>
+          <a:prstGeom prst="rect">
+            <a:avLst/>
+          </a:prstGeom>
+        </p:spPr>
+      </p:pic>
+      <p:sp>
+        <p:nvSpPr>
+          <p:cNvPr id="22" name="Text 15"/>
+          <p:cNvSpPr txBox="1"/>
+          <p:nvPr/>
+        </p:nvSpPr>
+        <p:spPr>
+          <a:xfrm>
+            <a:off x="10067544" y="2423160"/>
+            <a:ext cx="1344168" cy="1143000"/>
+          </a:xfrm>
+          <a:prstGeom prst="rect">
+            <a:avLst/>
+          </a:prstGeom>
+          <a:noFill/>
+          <a:ln/>
+        </p:spPr>
+        <p:txBody>
+          <a:bodyPr wrap="square" lIns="0" tIns="0" rIns="0" bIns="0" rtlCol="0" anchor="ctr"/>
+          <a:lstStyle/>
+          <a:p>
+            <a:pPr algn="ctr" indent="0" marL="0">
+              <a:buNone/>
+            </a:pPr>
+            <a:r>
+              <a:rPr lang="en-US" sz="1350" b="1" dirty="0">
+                <a:solidFill>
+                  <a:srgbClr val="81552E"/>
+                </a:solidFill>
+                <a:latin typeface="Open Sans" pitchFamily="34" charset="0"/>
+                <a:ea typeface="Open Sans" pitchFamily="34" charset="-122"/>
+                <a:cs typeface="Open Sans" pitchFamily="34" charset="-120"/>
+              </a:rPr>
+              <a:t>Algo puntual que quieras revisar</a:t>
+            </a:r>
+            <a:endParaRPr lang="en-US" sz="1350" dirty="0"/>
+          </a:p>
+        </p:txBody>
+      </p:sp>
+      <p:sp>
+        <p:nvSpPr>
+          <p:cNvPr id="23" name="Shape 16"/>
+          <p:cNvSpPr/>
+          <p:nvPr/>
+        </p:nvSpPr>
+        <p:spPr>
+          <a:xfrm>
+            <a:off x="4389120" y="4069080"/>
+            <a:ext cx="7159752" cy="1965960"/>
+          </a:xfrm>
+          <a:prstGeom prst="roundRect">
+            <a:avLst>
+              <a:gd name="adj" fmla="val 7442"/>
             </a:avLst>
           </a:prstGeom>
           <a:solidFill>
@@ -5668,14 +6286,14 @@
       </p:sp>
       <p:sp>
         <p:nvSpPr>
-          <p:cNvPr id="20" name="Shape 14"/>
+          <p:cNvPr id="24" name="Shape 17"/>
           <p:cNvSpPr/>
           <p:nvPr/>
         </p:nvSpPr>
         <p:spPr>
           <a:xfrm>
-            <a:off x="4800600" y="4663440"/>
-            <a:ext cx="822960" cy="822960"/>
+            <a:off x="4754880" y="4663440"/>
+            <a:ext cx="777240" cy="777240"/>
           </a:xfrm>
           <a:prstGeom prst="ellipse">
             <a:avLst/>
@@ -5693,22 +6311,22 @@
       </p:sp>
       <p:pic>
         <p:nvPicPr>
-          <p:cNvPr id="21" name="Image 3" descr="preencoded.png">    </p:cNvPr>
+          <p:cNvPr id="25" name="Image 4" descr="preencoded.png">    </p:cNvPr>
           <p:cNvPicPr>
             <a:picLocks noChangeAspect="1"/>
           </p:cNvPicPr>
           <p:nvPr/>
         </p:nvPicPr>
         <p:blipFill>
-          <a:blip r:embed="rId4"/>
+          <a:blip r:embed="rId5"/>
           <a:stretch>
             <a:fillRect/>
           </a:stretch>
         </p:blipFill>
         <p:spPr>
           <a:xfrm>
-            <a:off x="5022799" y="4885639"/>
-            <a:ext cx="378562" cy="378562"/>
+            <a:off x="4964735" y="4873295"/>
+            <a:ext cx="357530" cy="357530"/>
           </a:xfrm>
           <a:prstGeom prst="rect">
             <a:avLst/>
@@ -5717,14 +6335,14 @@
       </p:pic>
       <p:sp>
         <p:nvSpPr>
-          <p:cNvPr id="22" name="Text 15"/>
+          <p:cNvPr id="26" name="Text 18"/>
           <p:cNvSpPr txBox="1"/>
           <p:nvPr/>
         </p:nvSpPr>
         <p:spPr>
           <a:xfrm>
-            <a:off x="5943600" y="4160520"/>
-            <a:ext cx="5239512" cy="1828800"/>
+            <a:off x="5806440" y="4069080"/>
+            <a:ext cx="5422392" cy="1965960"/>
           </a:xfrm>
           <a:prstGeom prst="rect">
             <a:avLst/>
@@ -5738,12 +6356,12 @@
           <a:p>
             <a:pPr indent="0" marL="0">
               <a:spcAft>
-                <a:spcPts val="600"/>
+                <a:spcPts val="500"/>
               </a:spcAft>
               <a:buNone/>
             </a:pPr>
             <a:r>
-              <a:rPr lang="en-US" sz="1900" b="1" dirty="0">
+              <a:rPr lang="en-US" sz="1750" b="1" dirty="0">
                 <a:solidFill>
                   <a:srgbClr val="F8F5EE"/>
                 </a:solidFill>
@@ -5753,17 +6371,17 @@
               </a:rPr>
               <a:t>¿Algo más grande?</a:t>
             </a:r>
-            <a:endParaRPr lang="en-US" sz="1900" dirty="0"/>
+            <a:endParaRPr lang="en-US" sz="1750" dirty="0"/>
           </a:p>
           <a:p>
             <a:pPr indent="0" marL="0">
               <a:spcAft>
-                <a:spcPts val="600"/>
+                <a:spcPts val="500"/>
               </a:spcAft>
               <a:buNone/>
             </a:pPr>
             <a:r>
-              <a:rPr lang="en-US" sz="1550" dirty="0">
+              <a:rPr lang="en-US" sz="1500" dirty="0">
                 <a:solidFill>
                   <a:srgbClr val="EDE5CC"/>
                 </a:solidFill>
@@ -5771,9 +6389,9 @@
                 <a:ea typeface="Open Sans" pitchFamily="34" charset="-122"/>
                 <a:cs typeface="Open Sans" pitchFamily="34" charset="-120"/>
               </a:rPr>
-              <a:t>Una presentación completa, una conversación compleja o algo con mucho contexto: lo llevamos a la sesión 1:1.</a:t>
-            </a:r>
-            <a:endParaRPr lang="en-US" sz="1900" dirty="0"/>
+              <a:t>Una presentación completa, una conversación compleja o algo que necesita bastante contexto: lo dejamos para la sesión 1:1, donde le damos el tiempo y la profundidad que merece.</a:t>
+            </a:r>
+            <a:endParaRPr lang="en-US" sz="1750" dirty="0"/>
           </a:p>
         </p:txBody>
       </p:sp>
@@ -5976,7 +6594,7 @@
                 <a:ea typeface="Source Serif Pro" pitchFamily="34" charset="-122"/>
                 <a:cs typeface="Source Serif Pro" pitchFamily="34" charset="-120"/>
               </a:rPr>
-              <a:t>Nada de inglés desconectado de tu vida profesional</a:t>
+              <a:t>No con un inglés desconectado de tu vida profesional</a:t>
             </a:r>
             <a:endParaRPr lang="en-US" sz="1600" dirty="0"/>
           </a:p>
@@ -5984,18 +6602,57 @@
       </p:sp>
       <p:sp>
         <p:nvSpPr>
-          <p:cNvPr id="7" name="Shape 4"/>
+          <p:cNvPr id="7" name="Text 4"/>
+          <p:cNvSpPr txBox="1"/>
+          <p:nvPr/>
+        </p:nvSpPr>
+        <p:spPr>
+          <a:xfrm>
+            <a:off x="4389120" y="1143000"/>
+            <a:ext cx="7159752" cy="320040"/>
+          </a:xfrm>
+          <a:prstGeom prst="rect">
+            <a:avLst/>
+          </a:prstGeom>
+          <a:noFill/>
+          <a:ln/>
+        </p:spPr>
+        <p:txBody>
+          <a:bodyPr wrap="square" lIns="0" tIns="0" rIns="0" bIns="0" rtlCol="0" anchor="ctr"/>
+          <a:lstStyle/>
+          <a:p>
+            <a:pPr indent="0" marL="0">
+              <a:buNone/>
+            </a:pPr>
+            <a:r>
+              <a:rPr lang="en-US" sz="1150" b="1" spc="200" kern="0" dirty="0">
+                <a:solidFill>
+                  <a:srgbClr val="C68C6C"/>
+                </a:solidFill>
+                <a:latin typeface="Open Sans" pitchFamily="34" charset="0"/>
+                <a:ea typeface="Open Sans" pitchFamily="34" charset="-122"/>
+                <a:cs typeface="Open Sans" pitchFamily="34" charset="-120"/>
+              </a:rPr>
+              <a:t>TRAE SITUACIONES Y MATERIALES REALES DE TU TRABAJO</a:t>
+            </a:r>
+            <a:endParaRPr lang="en-US" sz="1150" dirty="0"/>
+          </a:p>
+        </p:txBody>
+      </p:sp>
+      <p:sp>
+        <p:nvSpPr>
+          <p:cNvPr id="8" name="Shape 5"/>
           <p:cNvSpPr/>
           <p:nvPr/>
         </p:nvSpPr>
         <p:spPr>
           <a:xfrm>
-            <a:off x="4389120" y="1143000"/>
-            <a:ext cx="3442716" cy="1371600"/>
+            <a:off x="4389120" y="1600200"/>
+            <a:ext cx="3465576" cy="777240"/>
           </a:xfrm>
           <a:prstGeom prst="roundRect">
             <a:avLst>
-              <a:gd name="adj" fmla="val 10667"/>
+              <a:gd name="adj" fmla="val 18824"/>
             </a:avLst>
           </a:prstGeom>
           <a:solidFill>
@@ -6018,14 +6675,14 @@
       </p:sp>
       <p:sp>
         <p:nvSpPr>
-          <p:cNvPr id="8" name="Shape 5"/>
+          <p:cNvPr id="9" name="Shape 6"/>
           <p:cNvSpPr/>
           <p:nvPr/>
         </p:nvSpPr>
         <p:spPr>
           <a:xfrm>
-            <a:off x="4681728" y="1463040"/>
-            <a:ext cx="731520" cy="731520"/>
+            <a:off x="4590288" y="1723644"/>
+            <a:ext cx="530352" cy="530352"/>
           </a:xfrm>
           <a:prstGeom prst="ellipse">
             <a:avLst/>
@@ -6043,7 +6700,7 @@
       </p:sp>
       <p:pic>
         <p:nvPicPr>
-          <p:cNvPr id="9" name="Image 0" descr="preencoded.png">    </p:cNvPr>
+          <p:cNvPr id="10" name="Image 0" descr="preencoded.png">    </p:cNvPr>
           <p:cNvPicPr>
             <a:picLocks noChangeAspect="1"/>
           </p:cNvPicPr>
@@ -6057,8 +6714,8 @@
         </p:blipFill>
         <p:spPr>
           <a:xfrm>
-            <a:off x="4879238" y="1660550"/>
-            <a:ext cx="336499" cy="336499"/>
+            <a:off x="4733483" y="1866839"/>
+            <a:ext cx="243962" cy="243962"/>
           </a:xfrm>
           <a:prstGeom prst="rect">
             <a:avLst/>
@@ -6067,14 +6724,14 @@
       </p:pic>
       <p:sp>
         <p:nvSpPr>
-          <p:cNvPr id="10" name="Text 6"/>
+          <p:cNvPr id="11" name="Text 7"/>
           <p:cNvSpPr txBox="1"/>
           <p:nvPr/>
         </p:nvSpPr>
         <p:spPr>
           <a:xfrm>
-            <a:off x="5623560" y="1143000"/>
-            <a:ext cx="2025396" cy="1371600"/>
+            <a:off x="5285232" y="1600200"/>
+            <a:ext cx="2414016" cy="777240"/>
           </a:xfrm>
           <a:prstGeom prst="rect">
             <a:avLst/>
@@ -6090,7 +6747,7 @@
               <a:buNone/>
             </a:pPr>
             <a:r>
-              <a:rPr lang="en-US" sz="1650" b="1" dirty="0">
+              <a:rPr lang="en-US" sz="1500" b="1" dirty="0">
                 <a:solidFill>
                   <a:srgbClr val="81552E"/>
                 </a:solidFill>
@@ -6098,26 +6755,26 @@
                 <a:ea typeface="Open Sans" pitchFamily="34" charset="-122"/>
                 <a:cs typeface="Open Sans" pitchFamily="34" charset="-120"/>
               </a:rPr>
-              <a:t>Reuniones y conversaciones</a:t>
-            </a:r>
-            <a:endParaRPr lang="en-US" sz="1650" dirty="0"/>
-          </a:p>
-        </p:txBody>
-      </p:sp>
-      <p:sp>
-        <p:nvSpPr>
-          <p:cNvPr id="11" name="Shape 7"/>
+              <a:t>Presentaciones</a:t>
+            </a:r>
+            <a:endParaRPr lang="en-US" sz="1500" dirty="0"/>
+          </a:p>
+        </p:txBody>
+      </p:sp>
+      <p:sp>
+        <p:nvSpPr>
+          <p:cNvPr id="12" name="Shape 8"/>
           <p:cNvSpPr/>
           <p:nvPr/>
         </p:nvSpPr>
         <p:spPr>
           <a:xfrm>
-            <a:off x="8106156" y="1143000"/>
-            <a:ext cx="3442716" cy="1371600"/>
+            <a:off x="8083296" y="1600200"/>
+            <a:ext cx="3465576" cy="777240"/>
           </a:xfrm>
           <a:prstGeom prst="roundRect">
             <a:avLst>
-              <a:gd name="adj" fmla="val 10667"/>
+              <a:gd name="adj" fmla="val 18824"/>
             </a:avLst>
           </a:prstGeom>
           <a:solidFill>
@@ -6140,14 +6797,14 @@
       </p:sp>
       <p:sp>
         <p:nvSpPr>
-          <p:cNvPr id="12" name="Shape 8"/>
+          <p:cNvPr id="13" name="Shape 9"/>
           <p:cNvSpPr/>
           <p:nvPr/>
         </p:nvSpPr>
         <p:spPr>
           <a:xfrm>
-            <a:off x="8398764" y="1463040"/>
-            <a:ext cx="731520" cy="731520"/>
+            <a:off x="8284464" y="1723644"/>
+            <a:ext cx="530352" cy="530352"/>
           </a:xfrm>
           <a:prstGeom prst="ellipse">
             <a:avLst/>
@@ -6165,7 +6822,7 @@
       </p:sp>
       <p:pic>
         <p:nvPicPr>
-          <p:cNvPr id="13" name="Image 1" descr="preencoded.png">    </p:cNvPr>
+          <p:cNvPr id="14" name="Image 1" descr="preencoded.png">    </p:cNvPr>
           <p:cNvPicPr>
             <a:picLocks noChangeAspect="1"/>
           </p:cNvPicPr>
@@ -6179,8 +6836,8 @@
         </p:blipFill>
         <p:spPr>
           <a:xfrm>
-            <a:off x="8596274" y="1660550"/>
-            <a:ext cx="336499" cy="336499"/>
+            <a:off x="8427659" y="1866839"/>
+            <a:ext cx="243962" cy="243962"/>
           </a:xfrm>
           <a:prstGeom prst="rect">
             <a:avLst/>
@@ -6189,14 +6846,14 @@
       </p:pic>
       <p:sp>
         <p:nvSpPr>
-          <p:cNvPr id="14" name="Text 9"/>
+          <p:cNvPr id="15" name="Text 10"/>
           <p:cNvSpPr txBox="1"/>
           <p:nvPr/>
         </p:nvSpPr>
         <p:spPr>
           <a:xfrm>
-            <a:off x="9340596" y="1143000"/>
-            <a:ext cx="2025396" cy="1371600"/>
+            <a:off x="8979408" y="1600200"/>
+            <a:ext cx="2414016" cy="777240"/>
           </a:xfrm>
           <a:prstGeom prst="rect">
             <a:avLst/>
@@ -6212,7 +6869,7 @@
               <a:buNone/>
             </a:pPr>
             <a:r>
-              <a:rPr lang="en-US" sz="1650" b="1" dirty="0">
+              <a:rPr lang="en-US" sz="1500" b="1" dirty="0">
                 <a:solidFill>
                   <a:srgbClr val="81552E"/>
                 </a:solidFill>
@@ -6220,26 +6877,26 @@
                 <a:ea typeface="Open Sans" pitchFamily="34" charset="-122"/>
                 <a:cs typeface="Open Sans" pitchFamily="34" charset="-120"/>
               </a:rPr>
-              <a:t>Presentaciones</a:t>
-            </a:r>
-            <a:endParaRPr lang="en-US" sz="1650" dirty="0"/>
-          </a:p>
-        </p:txBody>
-      </p:sp>
-      <p:sp>
-        <p:nvSpPr>
-          <p:cNvPr id="15" name="Shape 10"/>
+              <a:t>Emails</a:t>
+            </a:r>
+            <a:endParaRPr lang="en-US" sz="1500" dirty="0"/>
+          </a:p>
+        </p:txBody>
+      </p:sp>
+      <p:sp>
+        <p:nvSpPr>
+          <p:cNvPr id="16" name="Shape 11"/>
           <p:cNvSpPr/>
           <p:nvPr/>
         </p:nvSpPr>
         <p:spPr>
           <a:xfrm>
-            <a:off x="4389120" y="2788920"/>
-            <a:ext cx="3442716" cy="1371600"/>
+            <a:off x="4389120" y="2560320"/>
+            <a:ext cx="3465576" cy="777240"/>
           </a:xfrm>
           <a:prstGeom prst="roundRect">
             <a:avLst>
-              <a:gd name="adj" fmla="val 10667"/>
+              <a:gd name="adj" fmla="val 18824"/>
             </a:avLst>
           </a:prstGeom>
           <a:solidFill>
@@ -6262,14 +6919,14 @@
       </p:sp>
       <p:sp>
         <p:nvSpPr>
-          <p:cNvPr id="16" name="Shape 11"/>
+          <p:cNvPr id="17" name="Shape 12"/>
           <p:cNvSpPr/>
           <p:nvPr/>
         </p:nvSpPr>
         <p:spPr>
           <a:xfrm>
-            <a:off x="4681728" y="3108960"/>
-            <a:ext cx="731520" cy="731520"/>
+            <a:off x="4590288" y="2683764"/>
+            <a:ext cx="530352" cy="530352"/>
           </a:xfrm>
           <a:prstGeom prst="ellipse">
             <a:avLst/>
@@ -6287,7 +6944,7 @@
       </p:sp>
       <p:pic>
         <p:nvPicPr>
-          <p:cNvPr id="17" name="Image 2" descr="preencoded.png">    </p:cNvPr>
+          <p:cNvPr id="18" name="Image 2" descr="preencoded.png">    </p:cNvPr>
           <p:cNvPicPr>
             <a:picLocks noChangeAspect="1"/>
           </p:cNvPicPr>
@@ -6301,8 +6958,8 @@
         </p:blipFill>
         <p:spPr>
           <a:xfrm>
-            <a:off x="4879238" y="3306470"/>
-            <a:ext cx="336499" cy="336499"/>
+            <a:off x="4733483" y="2826959"/>
+            <a:ext cx="243962" cy="243962"/>
           </a:xfrm>
           <a:prstGeom prst="rect">
             <a:avLst/>
@@ -6311,14 +6968,14 @@
       </p:pic>
       <p:sp>
         <p:nvSpPr>
-          <p:cNvPr id="18" name="Text 12"/>
+          <p:cNvPr id="19" name="Text 13"/>
           <p:cNvSpPr txBox="1"/>
           <p:nvPr/>
         </p:nvSpPr>
         <p:spPr>
           <a:xfrm>
-            <a:off x="5623560" y="2788920"/>
-            <a:ext cx="2025396" cy="1371600"/>
+            <a:off x="5285232" y="2560320"/>
+            <a:ext cx="2414016" cy="777240"/>
           </a:xfrm>
           <a:prstGeom prst="rect">
             <a:avLst/>
@@ -6334,7 +6991,7 @@
               <a:buNone/>
             </a:pPr>
             <a:r>
-              <a:rPr lang="en-US" sz="1650" b="1" dirty="0">
+              <a:rPr lang="en-US" sz="1500" b="1" dirty="0">
                 <a:solidFill>
                   <a:srgbClr val="81552E"/>
                 </a:solidFill>
@@ -6342,26 +6999,26 @@
                 <a:ea typeface="Open Sans" pitchFamily="34" charset="-122"/>
                 <a:cs typeface="Open Sans" pitchFamily="34" charset="-120"/>
               </a:rPr>
-              <a:t>Emails</a:t>
-            </a:r>
-            <a:endParaRPr lang="en-US" sz="1650" dirty="0"/>
-          </a:p>
-        </p:txBody>
-      </p:sp>
-      <p:sp>
-        <p:nvSpPr>
-          <p:cNvPr id="19" name="Shape 13"/>
+              <a:t>Transcripciones</a:t>
+            </a:r>
+            <a:endParaRPr lang="en-US" sz="1500" dirty="0"/>
+          </a:p>
+        </p:txBody>
+      </p:sp>
+      <p:sp>
+        <p:nvSpPr>
+          <p:cNvPr id="20" name="Shape 14"/>
           <p:cNvSpPr/>
           <p:nvPr/>
         </p:nvSpPr>
         <p:spPr>
           <a:xfrm>
-            <a:off x="8106156" y="2788920"/>
-            <a:ext cx="3442716" cy="1371600"/>
+            <a:off x="8083296" y="2560320"/>
+            <a:ext cx="3465576" cy="777240"/>
           </a:xfrm>
           <a:prstGeom prst="roundRect">
             <a:avLst>
-              <a:gd name="adj" fmla="val 10667"/>
+              <a:gd name="adj" fmla="val 18824"/>
             </a:avLst>
           </a:prstGeom>
           <a:solidFill>
@@ -6384,14 +7041,14 @@
       </p:sp>
       <p:sp>
         <p:nvSpPr>
-          <p:cNvPr id="20" name="Shape 14"/>
+          <p:cNvPr id="21" name="Shape 15"/>
           <p:cNvSpPr/>
           <p:nvPr/>
         </p:nvSpPr>
         <p:spPr>
           <a:xfrm>
-            <a:off x="8398764" y="3108960"/>
-            <a:ext cx="731520" cy="731520"/>
+            <a:off x="8284464" y="2683764"/>
+            <a:ext cx="530352" cy="530352"/>
           </a:xfrm>
           <a:prstGeom prst="ellipse">
             <a:avLst/>
@@ -6409,7 +7066,7 @@
       </p:sp>
       <p:pic>
         <p:nvPicPr>
-          <p:cNvPr id="21" name="Image 3" descr="preencoded.png">    </p:cNvPr>
+          <p:cNvPr id="22" name="Image 3" descr="preencoded.png">    </p:cNvPr>
           <p:cNvPicPr>
             <a:picLocks noChangeAspect="1"/>
           </p:cNvPicPr>
@@ -6423,8 +7080,8 @@
         </p:blipFill>
         <p:spPr>
           <a:xfrm>
-            <a:off x="8596274" y="3306470"/>
-            <a:ext cx="336499" cy="336499"/>
+            <a:off x="8427659" y="2826959"/>
+            <a:ext cx="243962" cy="243962"/>
           </a:xfrm>
           <a:prstGeom prst="rect">
             <a:avLst/>
@@ -6433,14 +7090,14 @@
       </p:pic>
       <p:sp>
         <p:nvSpPr>
-          <p:cNvPr id="22" name="Text 15"/>
+          <p:cNvPr id="23" name="Text 16"/>
           <p:cNvSpPr txBox="1"/>
           <p:nvPr/>
         </p:nvSpPr>
         <p:spPr>
           <a:xfrm>
-            <a:off x="9340596" y="2788920"/>
-            <a:ext cx="2025396" cy="1371600"/>
+            <a:off x="8979408" y="2560320"/>
+            <a:ext cx="2414016" cy="777240"/>
           </a:xfrm>
           <a:prstGeom prst="rect">
             <a:avLst/>
@@ -6456,7 +7113,7 @@
               <a:buNone/>
             </a:pPr>
             <a:r>
-              <a:rPr lang="en-US" sz="1650" b="1" dirty="0">
+              <a:rPr lang="en-US" sz="1500" b="1" dirty="0">
                 <a:solidFill>
                   <a:srgbClr val="81552E"/>
                 </a:solidFill>
@@ -6464,15 +7121,259 @@
                 <a:ea typeface="Open Sans" pitchFamily="34" charset="-122"/>
                 <a:cs typeface="Open Sans" pitchFamily="34" charset="-120"/>
               </a:rPr>
-              <a:t>Documentos, transcripciones y capturas</a:t>
-            </a:r>
-            <a:endParaRPr lang="en-US" sz="1650" dirty="0"/>
-          </a:p>
-        </p:txBody>
-      </p:sp>
-      <p:sp>
-        <p:nvSpPr>
-          <p:cNvPr id="23" name="Shape 16"/>
+              <a:t>Capturas</a:t>
+            </a:r>
+            <a:endParaRPr lang="en-US" sz="1500" dirty="0"/>
+          </a:p>
+        </p:txBody>
+      </p:sp>
+      <p:sp>
+        <p:nvSpPr>
+          <p:cNvPr id="24" name="Shape 17"/>
+          <p:cNvSpPr/>
+          <p:nvPr/>
+        </p:nvSpPr>
+        <p:spPr>
+          <a:xfrm>
+            <a:off x="4389120" y="3520440"/>
+            <a:ext cx="3465576" cy="777240"/>
+          </a:xfrm>
+          <a:prstGeom prst="roundRect">
+            <a:avLst>
+              <a:gd name="adj" fmla="val 18824"/>
+            </a:avLst>
+          </a:prstGeom>
+          <a:solidFill>
+            <a:srgbClr val="FFFDF9"/>
+          </a:solidFill>
+          <a:ln w="12700">
+            <a:solidFill>
+              <a:srgbClr val="FFFDF9"/>
+            </a:solidFill>
+            <a:prstDash val="solid"/>
+          </a:ln>
+          <a:effectLst>
+            <a:outerShdw sx="100000" sy="100000" kx="0" ky="0" algn="bl" rotWithShape="0" blurRad="177800" dist="38100" dir="5400000">
+              <a:srgbClr val="3F1E0D">
+                <a:alpha val="10000"/>
+              </a:srgbClr>
+            </a:outerShdw>
+          </a:effectLst>
+        </p:spPr>
+      </p:sp>
+      <p:sp>
+        <p:nvSpPr>
+          <p:cNvPr id="25" name="Shape 18"/>
+          <p:cNvSpPr/>
+          <p:nvPr/>
+        </p:nvSpPr>
+        <p:spPr>
+          <a:xfrm>
+            <a:off x="4590288" y="3643884"/>
+            <a:ext cx="530352" cy="530352"/>
+          </a:xfrm>
+          <a:prstGeom prst="ellipse">
+            <a:avLst/>
+          </a:prstGeom>
+          <a:solidFill>
+            <a:srgbClr val="FBF2D0"/>
+          </a:solidFill>
+          <a:ln w="12700">
+            <a:solidFill>
+              <a:srgbClr val="FBF2D0"/>
+            </a:solidFill>
+            <a:prstDash val="solid"/>
+          </a:ln>
+        </p:spPr>
+      </p:sp>
+      <p:pic>
+        <p:nvPicPr>
+          <p:cNvPr id="26" name="Image 4" descr="preencoded.png">    </p:cNvPr>
+          <p:cNvPicPr>
+            <a:picLocks noChangeAspect="1"/>
+          </p:cNvPicPr>
+          <p:nvPr/>
+        </p:nvPicPr>
+        <p:blipFill>
+          <a:blip r:embed="rId5"/>
+          <a:stretch>
+            <a:fillRect/>
+          </a:stretch>
+        </p:blipFill>
+        <p:spPr>
+          <a:xfrm>
+            <a:off x="4733483" y="3787079"/>
+            <a:ext cx="243962" cy="243962"/>
+          </a:xfrm>
+          <a:prstGeom prst="rect">
+            <a:avLst/>
+          </a:prstGeom>
+        </p:spPr>
+      </p:pic>
+      <p:sp>
+        <p:nvSpPr>
+          <p:cNvPr id="27" name="Text 19"/>
+          <p:cNvSpPr txBox="1"/>
+          <p:nvPr/>
+        </p:nvSpPr>
+        <p:spPr>
+          <a:xfrm>
+            <a:off x="5285232" y="3520440"/>
+            <a:ext cx="2414016" cy="777240"/>
+          </a:xfrm>
+          <a:prstGeom prst="rect">
+            <a:avLst/>
+          </a:prstGeom>
+          <a:noFill/>
+          <a:ln/>
+        </p:spPr>
+        <p:txBody>
+          <a:bodyPr wrap="square" lIns="0" tIns="0" rIns="0" bIns="0" rtlCol="0" anchor="ctr"/>
+          <a:lstStyle/>
+          <a:p>
+            <a:pPr indent="0" marL="0">
+              <a:buNone/>
+            </a:pPr>
+            <a:r>
+              <a:rPr lang="en-US" sz="1500" b="1" dirty="0">
+                <a:solidFill>
+                  <a:srgbClr val="81552E"/>
+                </a:solidFill>
+                <a:latin typeface="Open Sans" pitchFamily="34" charset="0"/>
+                <a:ea typeface="Open Sans" pitchFamily="34" charset="-122"/>
+                <a:cs typeface="Open Sans" pitchFamily="34" charset="-120"/>
+              </a:rPr>
+              <a:t>Documentos</a:t>
+            </a:r>
+            <a:endParaRPr lang="en-US" sz="1500" dirty="0"/>
+          </a:p>
+        </p:txBody>
+      </p:sp>
+      <p:sp>
+        <p:nvSpPr>
+          <p:cNvPr id="28" name="Shape 20"/>
+          <p:cNvSpPr/>
+          <p:nvPr/>
+        </p:nvSpPr>
+        <p:spPr>
+          <a:xfrm>
+            <a:off x="8083296" y="3520440"/>
+            <a:ext cx="3465576" cy="777240"/>
+          </a:xfrm>
+          <a:prstGeom prst="roundRect">
+            <a:avLst>
+              <a:gd name="adj" fmla="val 18824"/>
+            </a:avLst>
+          </a:prstGeom>
+          <a:solidFill>
+            <a:srgbClr val="FFFDF9"/>
+          </a:solidFill>
+          <a:ln w="12700">
+            <a:solidFill>
+              <a:srgbClr val="FFFDF9"/>
+            </a:solidFill>
+            <a:prstDash val="solid"/>
+          </a:ln>
+          <a:effectLst>
+            <a:outerShdw sx="100000" sy="100000" kx="0" ky="0" algn="bl" rotWithShape="0" blurRad="177800" dist="38100" dir="5400000">
+              <a:srgbClr val="3F1E0D">
+                <a:alpha val="10000"/>
+              </a:srgbClr>
+            </a:outerShdw>
+          </a:effectLst>
+        </p:spPr>
+      </p:sp>
+      <p:sp>
+        <p:nvSpPr>
+          <p:cNvPr id="29" name="Shape 21"/>
+          <p:cNvSpPr/>
+          <p:nvPr/>
+        </p:nvSpPr>
+        <p:spPr>
+          <a:xfrm>
+            <a:off x="8284464" y="3643884"/>
+            <a:ext cx="530352" cy="530352"/>
+          </a:xfrm>
+          <a:prstGeom prst="ellipse">
+            <a:avLst/>
+          </a:prstGeom>
+          <a:solidFill>
+            <a:srgbClr val="FBF2D0"/>
+          </a:solidFill>
+          <a:ln w="12700">
+            <a:solidFill>
+              <a:srgbClr val="FBF2D0"/>
+            </a:solidFill>
+            <a:prstDash val="solid"/>
+          </a:ln>
+        </p:spPr>
+      </p:sp>
+      <p:pic>
+        <p:nvPicPr>
+          <p:cNvPr id="30" name="Image 5" descr="preencoded.png">    </p:cNvPr>
+          <p:cNvPicPr>
+            <a:picLocks noChangeAspect="1"/>
+          </p:cNvPicPr>
+          <p:nvPr/>
+        </p:nvPicPr>
+        <p:blipFill>
+          <a:blip r:embed="rId6"/>
+          <a:stretch>
+            <a:fillRect/>
+          </a:stretch>
+        </p:blipFill>
+        <p:spPr>
+          <a:xfrm>
+            <a:off x="8427659" y="3787079"/>
+            <a:ext cx="243962" cy="243962"/>
+          </a:xfrm>
+          <a:prstGeom prst="rect">
+            <a:avLst/>
+          </a:prstGeom>
+        </p:spPr>
+      </p:pic>
+      <p:sp>
+        <p:nvSpPr>
+          <p:cNvPr id="31" name="Text 22"/>
+          <p:cNvSpPr txBox="1"/>
+          <p:nvPr/>
+        </p:nvSpPr>
+        <p:spPr>
+          <a:xfrm>
+            <a:off x="8979408" y="3520440"/>
+            <a:ext cx="2414016" cy="777240"/>
+          </a:xfrm>
+          <a:prstGeom prst="rect">
+            <a:avLst/>
+          </a:prstGeom>
+          <a:noFill/>
+          <a:ln/>
+        </p:spPr>
+        <p:txBody>
+          <a:bodyPr wrap="square" lIns="0" tIns="0" rIns="0" bIns="0" rtlCol="0" anchor="ctr"/>
+          <a:lstStyle/>
+          <a:p>
+            <a:pPr indent="0" marL="0">
+              <a:buNone/>
+            </a:pPr>
+            <a:r>
+              <a:rPr lang="en-US" sz="1500" b="1" dirty="0">
+                <a:solidFill>
+                  <a:srgbClr val="81552E"/>
+                </a:solidFill>
+                <a:latin typeface="Open Sans" pitchFamily="34" charset="0"/>
+                <a:ea typeface="Open Sans" pitchFamily="34" charset="-122"/>
+                <a:cs typeface="Open Sans" pitchFamily="34" charset="-120"/>
+              </a:rPr>
+              <a:t>Reuniones o conversaciones</a:t>
+            </a:r>
+            <a:endParaRPr lang="en-US" sz="1500" dirty="0"/>
+          </a:p>
+        </p:txBody>
+      </p:sp>
+      <p:sp>
+        <p:nvSpPr>
+          <p:cNvPr id="32" name="Shape 23"/>
           <p:cNvSpPr/>
           <p:nvPr/>
         </p:nvSpPr>
@@ -6506,14 +7407,14 @@
       </p:sp>
       <p:sp>
         <p:nvSpPr>
-          <p:cNvPr id="24" name="Shape 17"/>
+          <p:cNvPr id="33" name="Shape 24"/>
           <p:cNvSpPr/>
           <p:nvPr/>
         </p:nvSpPr>
         <p:spPr>
           <a:xfrm>
-            <a:off x="4800600" y="4928616"/>
-            <a:ext cx="786384" cy="786384"/>
+            <a:off x="4754880" y="4937760"/>
+            <a:ext cx="777240" cy="777240"/>
           </a:xfrm>
           <a:prstGeom prst="ellipse">
             <a:avLst/>
@@ -6531,22 +7432,22 @@
       </p:sp>
       <p:pic>
         <p:nvPicPr>
-          <p:cNvPr id="25" name="Image 4" descr="preencoded.png">    </p:cNvPr>
+          <p:cNvPr id="34" name="Image 6" descr="preencoded.png">    </p:cNvPr>
           <p:cNvPicPr>
             <a:picLocks noChangeAspect="1"/>
           </p:cNvPicPr>
           <p:nvPr/>
         </p:nvPicPr>
         <p:blipFill>
-          <a:blip r:embed="rId5"/>
+          <a:blip r:embed="rId7"/>
           <a:stretch>
             <a:fillRect/>
           </a:stretch>
         </p:blipFill>
         <p:spPr>
           <a:xfrm>
-            <a:off x="5012924" y="5140940"/>
-            <a:ext cx="361737" cy="361737"/>
+            <a:off x="4964735" y="5147615"/>
+            <a:ext cx="357530" cy="357530"/>
           </a:xfrm>
           <a:prstGeom prst="rect">
             <a:avLst/>
@@ -6555,14 +7456,14 @@
       </p:pic>
       <p:sp>
         <p:nvSpPr>
-          <p:cNvPr id="26" name="Text 18"/>
+          <p:cNvPr id="35" name="Text 25"/>
           <p:cNvSpPr txBox="1"/>
           <p:nvPr/>
         </p:nvSpPr>
         <p:spPr>
           <a:xfrm>
-            <a:off x="5897880" y="4526280"/>
-            <a:ext cx="5330952" cy="1600200"/>
+            <a:off x="5806440" y="4526280"/>
+            <a:ext cx="5422392" cy="1600200"/>
           </a:xfrm>
           <a:prstGeom prst="rect">
             <a:avLst/>
@@ -6576,12 +7477,12 @@
           <a:p>
             <a:pPr indent="0" marL="0">
               <a:spcAft>
-                <a:spcPts val="600"/>
+                <a:spcPts val="500"/>
               </a:spcAft>
               <a:buNone/>
             </a:pPr>
             <a:r>
-              <a:rPr lang="en-US" sz="1800" b="1" dirty="0">
+              <a:rPr lang="en-US" sz="1750" b="1" dirty="0">
                 <a:solidFill>
                   <a:srgbClr val="F8F5EE"/>
                 </a:solidFill>
@@ -6589,14 +7490,14 @@
                 <a:ea typeface="Open Sans" pitchFamily="34" charset="-122"/>
                 <a:cs typeface="Open Sans" pitchFamily="34" charset="-120"/>
               </a:rPr>
-              <a:t>¿Información confidencial? Anonimizala.</a:t>
-            </a:r>
-            <a:endParaRPr lang="en-US" sz="1800" dirty="0"/>
+              <a:t>¿Información confidencial o sensible? Anonimízala.</a:t>
+            </a:r>
+            <a:endParaRPr lang="en-US" sz="1750" dirty="0"/>
           </a:p>
           <a:p>
             <a:pPr indent="0" marL="0">
               <a:spcAft>
-                <a:spcPts val="600"/>
+                <a:spcPts val="500"/>
               </a:spcAft>
               <a:buNone/>
             </a:pPr>
@@ -6609,9 +7510,9 @@
                 <a:ea typeface="Open Sans" pitchFamily="34" charset="-122"/>
                 <a:cs typeface="Open Sans" pitchFamily="34" charset="-120"/>
               </a:rPr>
-              <a:t>No necesito datos privados de tu empresa: necesito entender la situación comunicativa.</a:t>
-            </a:r>
-            <a:endParaRPr lang="en-US" sz="1800" dirty="0"/>
+              <a:t>No necesito conocer información privada de tu empresa. Lo que necesito es entender la situación comunicativa para ayudarte a entrenarla.</a:t>
+            </a:r>
+            <a:endParaRPr lang="en-US" sz="1750" dirty="0"/>
           </a:p>
         </p:txBody>
       </p:sp>
@@ -6775,7 +7676,7 @@
                 <a:ea typeface="Source Serif Pro" pitchFamily="34" charset="-122"/>
                 <a:cs typeface="Source Serif Pro" pitchFamily="34" charset="-120"/>
               </a:rPr>
-              <a:t>Estamos haciendo esto juntas</a:t>
+              <a:t>Para eso estoy yo</a:t>
             </a:r>
             <a:endParaRPr lang="en-US" sz="3400" dirty="0"/>
           </a:p>
@@ -6789,7 +7690,7 @@
         </p:nvSpPr>
         <p:spPr>
           <a:xfrm>
-            <a:off x="640080" y="2935224"/>
+            <a:off x="640080" y="1892808"/>
             <a:ext cx="3291840" cy="731520"/>
           </a:xfrm>
           <a:prstGeom prst="rect">
@@ -6814,7 +7715,7 @@
                 <a:ea typeface="Source Serif Pro" pitchFamily="34" charset="-122"/>
                 <a:cs typeface="Source Serif Pro" pitchFamily="34" charset="-120"/>
               </a:rPr>
-              <a:t>No espero semanas perfectas: quiero un proceso real y constante</a:t>
+              <a:t>No necesitas llegar sabiendo qué practicar ni diagnosticar sola qué te está pasando</a:t>
             </a:r>
             <a:endParaRPr lang="en-US" sz="1600" dirty="0"/>
           </a:p>
@@ -6829,7 +7730,7 @@
         <p:spPr>
           <a:xfrm>
             <a:off x="4389120" y="1143000"/>
-            <a:ext cx="3442716" cy="3520440"/>
+            <a:ext cx="3442716" cy="3611880"/>
           </a:xfrm>
           <a:prstGeom prst="roundRect">
             <a:avLst>
@@ -6862,8 +7763,8 @@
         </p:nvSpPr>
         <p:spPr>
           <a:xfrm>
-            <a:off x="4800600" y="1463040"/>
-            <a:ext cx="2619756" cy="548640"/>
+            <a:off x="4754880" y="1417320"/>
+            <a:ext cx="2711196" cy="502920"/>
           </a:xfrm>
           <a:prstGeom prst="rect">
             <a:avLst/>
@@ -6879,7 +7780,7 @@
               <a:buNone/>
             </a:pPr>
             <a:r>
-              <a:rPr lang="en-US" sz="2600" b="1" dirty="0">
+              <a:rPr lang="en-US" sz="2200" b="1" dirty="0">
                 <a:solidFill>
                   <a:srgbClr val="81552E"/>
                 </a:solidFill>
@@ -6887,46 +7788,22 @@
                 <a:ea typeface="Source Serif Pro" pitchFamily="34" charset="-122"/>
                 <a:cs typeface="Source Serif Pro" pitchFamily="34" charset="-120"/>
               </a:rPr>
-              <a:t>Tu parte</a:t>
-            </a:r>
-            <a:endParaRPr lang="en-US" sz="2600" dirty="0"/>
-          </a:p>
-        </p:txBody>
-      </p:sp>
-      <p:pic>
-        <p:nvPicPr>
-          <p:cNvPr id="9" name="Image 0" descr="preencoded.png">    </p:cNvPr>
-          <p:cNvPicPr>
-            <a:picLocks noChangeAspect="1"/>
-          </p:cNvPicPr>
-          <p:nvPr/>
-        </p:nvPicPr>
-        <p:blipFill>
-          <a:blip r:embed="rId1"/>
-          <a:stretch>
-            <a:fillRect/>
-          </a:stretch>
-        </p:blipFill>
-        <p:spPr>
-          <a:xfrm>
-            <a:off x="4800600" y="2340864"/>
-            <a:ext cx="256032" cy="256032"/>
-          </a:xfrm>
-          <a:prstGeom prst="rect">
-            <a:avLst/>
-          </a:prstGeom>
-        </p:spPr>
-      </p:pic>
-      <p:sp>
-        <p:nvSpPr>
-          <p:cNvPr id="10" name="Text 6"/>
+              <a:t>Tú traes tu realidad</a:t>
+            </a:r>
+            <a:endParaRPr lang="en-US" sz="2200" dirty="0"/>
+          </a:p>
+        </p:txBody>
+      </p:sp>
+      <p:sp>
+        <p:nvSpPr>
+          <p:cNvPr id="9" name="Text 6"/>
           <p:cNvSpPr txBox="1"/>
           <p:nvPr/>
         </p:nvSpPr>
         <p:spPr>
           <a:xfrm>
-            <a:off x="5230368" y="2240280"/>
-            <a:ext cx="2345436" cy="457200"/>
+            <a:off x="4754880" y="2057400"/>
+            <a:ext cx="2802636" cy="2514600"/>
           </a:xfrm>
           <a:prstGeom prst="rect">
             <a:avLst/>
@@ -6935,14 +7812,18 @@
           <a:ln/>
         </p:spPr>
         <p:txBody>
-          <a:bodyPr wrap="square" lIns="0" tIns="0" rIns="0" bIns="0" rtlCol="0" anchor="ctr"/>
-          <a:lstStyle/>
-          <a:p>
-            <a:pPr indent="0" marL="0">
-              <a:buNone/>
-            </a:pPr>
-            <a:r>
-              <a:rPr lang="en-US" sz="1550" dirty="0">
+          <a:bodyPr wrap="square" lIns="0" tIns="0" rIns="0" bIns="0" rtlCol="0" anchor="t"/>
+          <a:lstStyle/>
+          <a:p>
+            <a:pPr marL="190500" indent="-190500">
+              <a:spcAft>
+                <a:spcPts val="800"/>
+              </a:spcAft>
+              <a:buSzPct val="100000"/>
+              <a:buChar char="•"/>
+            </a:pPr>
+            <a:r>
+              <a:rPr lang="en-US" sz="1450" dirty="0">
                 <a:solidFill>
                   <a:srgbClr val="3F1E0D"/>
                 </a:solidFill>
@@ -6950,62 +7831,20 @@
                 <a:ea typeface="Open Sans" pitchFamily="34" charset="-122"/>
                 <a:cs typeface="Open Sans" pitchFamily="34" charset="-120"/>
               </a:rPr>
-              <a:t>traer tu realidad</a:t>
-            </a:r>
-            <a:endParaRPr lang="en-US" sz="1550" dirty="0"/>
-          </a:p>
-        </p:txBody>
-      </p:sp>
-      <p:pic>
-        <p:nvPicPr>
-          <p:cNvPr id="11" name="Image 1" descr="preencoded.png">    </p:cNvPr>
-          <p:cNvPicPr>
-            <a:picLocks noChangeAspect="1"/>
-          </p:cNvPicPr>
-          <p:nvPr/>
-        </p:nvPicPr>
-        <p:blipFill>
-          <a:blip r:embed="rId2"/>
-          <a:stretch>
-            <a:fillRect/>
-          </a:stretch>
-        </p:blipFill>
-        <p:spPr>
-          <a:xfrm>
-            <a:off x="4800600" y="2907792"/>
-            <a:ext cx="256032" cy="256032"/>
-          </a:xfrm>
-          <a:prstGeom prst="rect">
-            <a:avLst/>
-          </a:prstGeom>
-        </p:spPr>
-      </p:pic>
-      <p:sp>
-        <p:nvSpPr>
-          <p:cNvPr id="12" name="Text 7"/>
-          <p:cNvSpPr txBox="1"/>
-          <p:nvPr/>
-        </p:nvSpPr>
-        <p:spPr>
-          <a:xfrm>
-            <a:off x="5230368" y="2807208"/>
-            <a:ext cx="2345436" cy="457200"/>
-          </a:xfrm>
-          <a:prstGeom prst="rect">
-            <a:avLst/>
-          </a:prstGeom>
-          <a:noFill/>
-          <a:ln/>
-        </p:spPr>
-        <p:txBody>
-          <a:bodyPr wrap="square" lIns="0" tIns="0" rIns="0" bIns="0" rtlCol="0" anchor="ctr"/>
-          <a:lstStyle/>
-          <a:p>
-            <a:pPr indent="0" marL="0">
-              <a:buNone/>
-            </a:pPr>
-            <a:r>
-              <a:rPr lang="en-US" sz="1550" dirty="0">
+              <a:t>las reuniones que tienes</a:t>
+            </a:r>
+            <a:endParaRPr lang="en-US" sz="1450" dirty="0"/>
+          </a:p>
+          <a:p>
+            <a:pPr marL="190500" indent="-190500">
+              <a:spcAft>
+                <a:spcPts val="800"/>
+              </a:spcAft>
+              <a:buSzPct val="100000"/>
+              <a:buChar char="•"/>
+            </a:pPr>
+            <a:r>
+              <a:rPr lang="en-US" sz="1450" dirty="0">
                 <a:solidFill>
                   <a:srgbClr val="3F1E0D"/>
                 </a:solidFill>
@@ -7013,62 +7852,20 @@
                 <a:ea typeface="Open Sans" pitchFamily="34" charset="-122"/>
                 <a:cs typeface="Open Sans" pitchFamily="34" charset="-120"/>
               </a:rPr>
-              <a:t>practicar y probar</a:t>
-            </a:r>
-            <a:endParaRPr lang="en-US" sz="1550" dirty="0"/>
-          </a:p>
-        </p:txBody>
-      </p:sp>
-      <p:pic>
-        <p:nvPicPr>
-          <p:cNvPr id="13" name="Image 2" descr="preencoded.png">    </p:cNvPr>
-          <p:cNvPicPr>
-            <a:picLocks noChangeAspect="1"/>
-          </p:cNvPicPr>
-          <p:nvPr/>
-        </p:nvPicPr>
-        <p:blipFill>
-          <a:blip r:embed="rId3"/>
-          <a:stretch>
-            <a:fillRect/>
-          </a:stretch>
-        </p:blipFill>
-        <p:spPr>
-          <a:xfrm>
-            <a:off x="4800600" y="3474720"/>
-            <a:ext cx="256032" cy="256032"/>
-          </a:xfrm>
-          <a:prstGeom prst="rect">
-            <a:avLst/>
-          </a:prstGeom>
-        </p:spPr>
-      </p:pic>
-      <p:sp>
-        <p:nvSpPr>
-          <p:cNvPr id="14" name="Text 8"/>
-          <p:cNvSpPr txBox="1"/>
-          <p:nvPr/>
-        </p:nvSpPr>
-        <p:spPr>
-          <a:xfrm>
-            <a:off x="5230368" y="3374136"/>
-            <a:ext cx="2345436" cy="457200"/>
-          </a:xfrm>
-          <a:prstGeom prst="rect">
-            <a:avLst/>
-          </a:prstGeom>
-          <a:noFill/>
-          <a:ln/>
-        </p:spPr>
-        <p:txBody>
-          <a:bodyPr wrap="square" lIns="0" tIns="0" rIns="0" bIns="0" rtlCol="0" anchor="ctr"/>
-          <a:lstStyle/>
-          <a:p>
-            <a:pPr indent="0" marL="0">
-              <a:buNone/>
-            </a:pPr>
-            <a:r>
-              <a:rPr lang="en-US" sz="1550" dirty="0">
+              <a:t>las situaciones que te cuestan</a:t>
+            </a:r>
+            <a:endParaRPr lang="en-US" sz="1450" dirty="0"/>
+          </a:p>
+          <a:p>
+            <a:pPr marL="190500" indent="-190500">
+              <a:spcAft>
+                <a:spcPts val="800"/>
+              </a:spcAft>
+              <a:buSzPct val="100000"/>
+              <a:buChar char="•"/>
+            </a:pPr>
+            <a:r>
+              <a:rPr lang="en-US" sz="1450" dirty="0">
                 <a:solidFill>
                   <a:srgbClr val="3F1E0D"/>
                 </a:solidFill>
@@ -7076,62 +7873,20 @@
                 <a:ea typeface="Open Sans" pitchFamily="34" charset="-122"/>
                 <a:cs typeface="Open Sans" pitchFamily="34" charset="-120"/>
               </a:rPr>
-              <a:t>contarme qué salió bien y qué no</a:t>
-            </a:r>
-            <a:endParaRPr lang="en-US" sz="1550" dirty="0"/>
-          </a:p>
-        </p:txBody>
-      </p:sp>
-      <p:pic>
-        <p:nvPicPr>
-          <p:cNvPr id="15" name="Image 3" descr="preencoded.png">    </p:cNvPr>
-          <p:cNvPicPr>
-            <a:picLocks noChangeAspect="1"/>
-          </p:cNvPicPr>
-          <p:nvPr/>
-        </p:nvPicPr>
-        <p:blipFill>
-          <a:blip r:embed="rId4"/>
-          <a:stretch>
-            <a:fillRect/>
-          </a:stretch>
-        </p:blipFill>
-        <p:spPr>
-          <a:xfrm>
-            <a:off x="4800600" y="4041648"/>
-            <a:ext cx="256032" cy="256032"/>
-          </a:xfrm>
-          <a:prstGeom prst="rect">
-            <a:avLst/>
-          </a:prstGeom>
-        </p:spPr>
-      </p:pic>
-      <p:sp>
-        <p:nvSpPr>
-          <p:cNvPr id="16" name="Text 9"/>
-          <p:cNvSpPr txBox="1"/>
-          <p:nvPr/>
-        </p:nvSpPr>
-        <p:spPr>
-          <a:xfrm>
-            <a:off x="5230368" y="3941064"/>
-            <a:ext cx="2345436" cy="457200"/>
-          </a:xfrm>
-          <a:prstGeom prst="rect">
-            <a:avLst/>
-          </a:prstGeom>
-          <a:noFill/>
-          <a:ln/>
-        </p:spPr>
-        <p:txBody>
-          <a:bodyPr wrap="square" lIns="0" tIns="0" rIns="0" bIns="0" rtlCol="0" anchor="ctr"/>
-          <a:lstStyle/>
-          <a:p>
-            <a:pPr indent="0" marL="0">
-              <a:buNone/>
-            </a:pPr>
-            <a:r>
-              <a:rPr lang="en-US" sz="1550" dirty="0">
+              <a:t>lo que salió bien</a:t>
+            </a:r>
+            <a:endParaRPr lang="en-US" sz="1450" dirty="0"/>
+          </a:p>
+          <a:p>
+            <a:pPr marL="190500" indent="-190500">
+              <a:spcAft>
+                <a:spcPts val="800"/>
+              </a:spcAft>
+              <a:buSzPct val="100000"/>
+              <a:buChar char="•"/>
+            </a:pPr>
+            <a:r>
+              <a:rPr lang="en-US" sz="1450" dirty="0">
                 <a:solidFill>
                   <a:srgbClr val="3F1E0D"/>
                 </a:solidFill>
@@ -7139,22 +7894,43 @@
                 <a:ea typeface="Open Sans" pitchFamily="34" charset="-122"/>
                 <a:cs typeface="Open Sans" pitchFamily="34" charset="-120"/>
               </a:rPr>
-              <a:t>pedir ayuda</a:t>
-            </a:r>
-            <a:endParaRPr lang="en-US" sz="1550" dirty="0"/>
-          </a:p>
-        </p:txBody>
-      </p:sp>
-      <p:sp>
-        <p:nvSpPr>
-          <p:cNvPr id="17" name="Shape 10"/>
+              <a:t>lo que no salió como querías</a:t>
+            </a:r>
+            <a:endParaRPr lang="en-US" sz="1450" dirty="0"/>
+          </a:p>
+          <a:p>
+            <a:pPr marL="190500" indent="-190500">
+              <a:spcAft>
+                <a:spcPts val="800"/>
+              </a:spcAft>
+              <a:buSzPct val="100000"/>
+              <a:buChar char="•"/>
+            </a:pPr>
+            <a:r>
+              <a:rPr lang="en-US" sz="1450" dirty="0">
+                <a:solidFill>
+                  <a:srgbClr val="3F1E0D"/>
+                </a:solidFill>
+                <a:latin typeface="Open Sans" pitchFamily="34" charset="0"/>
+                <a:ea typeface="Open Sans" pitchFamily="34" charset="-122"/>
+                <a:cs typeface="Open Sans" pitchFamily="34" charset="-120"/>
+              </a:rPr>
+              <a:t>las dudas que vayan apareciendo</a:t>
+            </a:r>
+            <a:endParaRPr lang="en-US" sz="1450" dirty="0"/>
+          </a:p>
+        </p:txBody>
+      </p:sp>
+      <p:sp>
+        <p:nvSpPr>
+          <p:cNvPr id="10" name="Shape 7"/>
           <p:cNvSpPr/>
           <p:nvPr/>
         </p:nvSpPr>
         <p:spPr>
           <a:xfrm>
             <a:off x="8106156" y="1143000"/>
-            <a:ext cx="3442716" cy="3520440"/>
+            <a:ext cx="3442716" cy="3611880"/>
           </a:xfrm>
           <a:prstGeom prst="roundRect">
             <a:avLst>
@@ -7181,14 +7957,14 @@
       </p:sp>
       <p:sp>
         <p:nvSpPr>
-          <p:cNvPr id="18" name="Text 11"/>
+          <p:cNvPr id="11" name="Text 8"/>
           <p:cNvSpPr txBox="1"/>
           <p:nvPr/>
         </p:nvSpPr>
         <p:spPr>
           <a:xfrm>
-            <a:off x="8517636" y="1463040"/>
-            <a:ext cx="2619756" cy="548640"/>
+            <a:off x="8471916" y="1417320"/>
+            <a:ext cx="2711196" cy="502920"/>
           </a:xfrm>
           <a:prstGeom prst="rect">
             <a:avLst/>
@@ -7204,7 +7980,7 @@
               <a:buNone/>
             </a:pPr>
             <a:r>
-              <a:rPr lang="en-US" sz="2600" b="1" dirty="0">
+              <a:rPr lang="en-US" sz="2200" b="1" dirty="0">
                 <a:solidFill>
                   <a:srgbClr val="F8F5EE"/>
                 </a:solidFill>
@@ -7212,46 +7988,22 @@
                 <a:ea typeface="Source Serif Pro" pitchFamily="34" charset="-122"/>
                 <a:cs typeface="Source Serif Pro" pitchFamily="34" charset="-120"/>
               </a:rPr>
-              <a:t>Mi parte</a:t>
-            </a:r>
-            <a:endParaRPr lang="en-US" sz="2600" dirty="0"/>
-          </a:p>
-        </p:txBody>
-      </p:sp>
-      <p:pic>
-        <p:nvPicPr>
-          <p:cNvPr id="19" name="Image 4" descr="preencoded.png">    </p:cNvPr>
-          <p:cNvPicPr>
-            <a:picLocks noChangeAspect="1"/>
-          </p:cNvPicPr>
-          <p:nvPr/>
-        </p:nvPicPr>
-        <p:blipFill>
-          <a:blip r:embed="rId5"/>
-          <a:stretch>
-            <a:fillRect/>
-          </a:stretch>
-        </p:blipFill>
-        <p:spPr>
-          <a:xfrm>
-            <a:off x="8517636" y="2340864"/>
-            <a:ext cx="256032" cy="256032"/>
-          </a:xfrm>
-          <a:prstGeom prst="rect">
-            <a:avLst/>
-          </a:prstGeom>
-        </p:spPr>
-      </p:pic>
-      <p:sp>
-        <p:nvSpPr>
-          <p:cNvPr id="20" name="Text 12"/>
+              <a:t>Mi trabajo es</a:t>
+            </a:r>
+            <a:endParaRPr lang="en-US" sz="2200" dirty="0"/>
+          </a:p>
+        </p:txBody>
+      </p:sp>
+      <p:sp>
+        <p:nvSpPr>
+          <p:cNvPr id="12" name="Text 9"/>
           <p:cNvSpPr txBox="1"/>
           <p:nvPr/>
         </p:nvSpPr>
         <p:spPr>
           <a:xfrm>
-            <a:off x="8947404" y="2240280"/>
-            <a:ext cx="2345436" cy="457200"/>
+            <a:off x="8471916" y="2057400"/>
+            <a:ext cx="2802636" cy="2514600"/>
           </a:xfrm>
           <a:prstGeom prst="rect">
             <a:avLst/>
@@ -7260,14 +8012,18 @@
           <a:ln/>
         </p:spPr>
         <p:txBody>
-          <a:bodyPr wrap="square" lIns="0" tIns="0" rIns="0" bIns="0" rtlCol="0" anchor="ctr"/>
-          <a:lstStyle/>
-          <a:p>
-            <a:pPr indent="0" marL="0">
-              <a:buNone/>
-            </a:pPr>
-            <a:r>
-              <a:rPr lang="en-US" sz="1550" dirty="0">
+          <a:bodyPr wrap="square" lIns="0" tIns="0" rIns="0" bIns="0" rtlCol="0" anchor="t"/>
+          <a:lstStyle/>
+          <a:p>
+            <a:pPr marL="190500" indent="-190500">
+              <a:spcAft>
+                <a:spcPts val="800"/>
+              </a:spcAft>
+              <a:buSzPct val="100000"/>
+              <a:buChar char="•"/>
+            </a:pPr>
+            <a:r>
+              <a:rPr lang="en-US" sz="1450" dirty="0">
                 <a:solidFill>
                   <a:srgbClr val="F8F5EE"/>
                 </a:solidFill>
@@ -7275,62 +8031,20 @@
                 <a:ea typeface="Open Sans" pitchFamily="34" charset="-122"/>
                 <a:cs typeface="Open Sans" pitchFamily="34" charset="-120"/>
               </a:rPr>
-              <a:t>entender qué está interfiriendo</a:t>
-            </a:r>
-            <a:endParaRPr lang="en-US" sz="1550" dirty="0"/>
-          </a:p>
-        </p:txBody>
-      </p:sp>
-      <p:pic>
-        <p:nvPicPr>
-          <p:cNvPr id="21" name="Image 5" descr="preencoded.png">    </p:cNvPr>
-          <p:cNvPicPr>
-            <a:picLocks noChangeAspect="1"/>
-          </p:cNvPicPr>
-          <p:nvPr/>
-        </p:nvPicPr>
-        <p:blipFill>
-          <a:blip r:embed="rId6"/>
-          <a:stretch>
-            <a:fillRect/>
-          </a:stretch>
-        </p:blipFill>
-        <p:spPr>
-          <a:xfrm>
-            <a:off x="8517636" y="2907792"/>
-            <a:ext cx="256032" cy="256032"/>
-          </a:xfrm>
-          <a:prstGeom prst="rect">
-            <a:avLst/>
-          </a:prstGeom>
-        </p:spPr>
-      </p:pic>
-      <p:sp>
-        <p:nvSpPr>
-          <p:cNvPr id="22" name="Text 13"/>
-          <p:cNvSpPr txBox="1"/>
-          <p:nvPr/>
-        </p:nvSpPr>
-        <p:spPr>
-          <a:xfrm>
-            <a:off x="8947404" y="2807208"/>
-            <a:ext cx="2345436" cy="457200"/>
-          </a:xfrm>
-          <a:prstGeom prst="rect">
-            <a:avLst/>
-          </a:prstGeom>
-          <a:noFill/>
-          <a:ln/>
-        </p:spPr>
-        <p:txBody>
-          <a:bodyPr wrap="square" lIns="0" tIns="0" rIns="0" bIns="0" rtlCol="0" anchor="ctr"/>
-          <a:lstStyle/>
-          <a:p>
-            <a:pPr indent="0" marL="0">
-              <a:buNone/>
-            </a:pPr>
-            <a:r>
-              <a:rPr lang="en-US" sz="1550" dirty="0">
+              <a:t>ayudarte a entender qué está interfiriendo</a:t>
+            </a:r>
+            <a:endParaRPr lang="en-US" sz="1450" dirty="0"/>
+          </a:p>
+          <a:p>
+            <a:pPr marL="190500" indent="-190500">
+              <a:spcAft>
+                <a:spcPts val="800"/>
+              </a:spcAft>
+              <a:buSzPct val="100000"/>
+              <a:buChar char="•"/>
+            </a:pPr>
+            <a:r>
+              <a:rPr lang="en-US" sz="1450" dirty="0">
                 <a:solidFill>
                   <a:srgbClr val="F8F5EE"/>
                 </a:solidFill>
@@ -7338,62 +8052,20 @@
                 <a:ea typeface="Open Sans" pitchFamily="34" charset="-122"/>
                 <a:cs typeface="Open Sans" pitchFamily="34" charset="-120"/>
               </a:rPr>
-              <a:t>elegir qué entrenar</a:t>
-            </a:r>
-            <a:endParaRPr lang="en-US" sz="1550" dirty="0"/>
-          </a:p>
-        </p:txBody>
-      </p:sp>
-      <p:pic>
-        <p:nvPicPr>
-          <p:cNvPr id="23" name="Image 6" descr="preencoded.png">    </p:cNvPr>
-          <p:cNvPicPr>
-            <a:picLocks noChangeAspect="1"/>
-          </p:cNvPicPr>
-          <p:nvPr/>
-        </p:nvPicPr>
-        <p:blipFill>
-          <a:blip r:embed="rId7"/>
-          <a:stretch>
-            <a:fillRect/>
-          </a:stretch>
-        </p:blipFill>
-        <p:spPr>
-          <a:xfrm>
-            <a:off x="8517636" y="3474720"/>
-            <a:ext cx="256032" cy="256032"/>
-          </a:xfrm>
-          <a:prstGeom prst="rect">
-            <a:avLst/>
-          </a:prstGeom>
-        </p:spPr>
-      </p:pic>
-      <p:sp>
-        <p:nvSpPr>
-          <p:cNvPr id="24" name="Text 14"/>
-          <p:cNvSpPr txBox="1"/>
-          <p:nvPr/>
-        </p:nvSpPr>
-        <p:spPr>
-          <a:xfrm>
-            <a:off x="8947404" y="3374136"/>
-            <a:ext cx="2345436" cy="457200"/>
-          </a:xfrm>
-          <a:prstGeom prst="rect">
-            <a:avLst/>
-          </a:prstGeom>
-          <a:noFill/>
-          <a:ln/>
-        </p:spPr>
-        <p:txBody>
-          <a:bodyPr wrap="square" lIns="0" tIns="0" rIns="0" bIns="0" rtlCol="0" anchor="ctr"/>
-          <a:lstStyle/>
-          <a:p>
-            <a:pPr indent="0" marL="0">
-              <a:buNone/>
-            </a:pPr>
-            <a:r>
-              <a:rPr lang="en-US" sz="1550" dirty="0">
+              <a:t>elegir qué necesitamos entrenar</a:t>
+            </a:r>
+            <a:endParaRPr lang="en-US" sz="1450" dirty="0"/>
+          </a:p>
+          <a:p>
+            <a:pPr marL="190500" indent="-190500">
+              <a:spcAft>
+                <a:spcPts val="800"/>
+              </a:spcAft>
+              <a:buSzPct val="100000"/>
+              <a:buChar char="•"/>
+            </a:pPr>
+            <a:r>
+              <a:rPr lang="en-US" sz="1450" dirty="0">
                 <a:solidFill>
                   <a:srgbClr val="F8F5EE"/>
                 </a:solidFill>
@@ -7401,84 +8073,21 @@
                 <a:ea typeface="Open Sans" pitchFamily="34" charset="-122"/>
                 <a:cs typeface="Open Sans" pitchFamily="34" charset="-120"/>
               </a:rPr>
-              <a:t>darte dirección y herramientas</a:t>
-            </a:r>
-            <a:endParaRPr lang="en-US" sz="1550" dirty="0"/>
-          </a:p>
-        </p:txBody>
-      </p:sp>
-      <p:pic>
-        <p:nvPicPr>
-          <p:cNvPr id="25" name="Image 7" descr="preencoded.png">    </p:cNvPr>
-          <p:cNvPicPr>
-            <a:picLocks noChangeAspect="1"/>
-          </p:cNvPicPr>
-          <p:nvPr/>
-        </p:nvPicPr>
-        <p:blipFill>
-          <a:blip r:embed="rId8"/>
-          <a:stretch>
-            <a:fillRect/>
-          </a:stretch>
-        </p:blipFill>
-        <p:spPr>
-          <a:xfrm>
-            <a:off x="8517636" y="4041648"/>
-            <a:ext cx="256032" cy="256032"/>
-          </a:xfrm>
-          <a:prstGeom prst="rect">
-            <a:avLst/>
-          </a:prstGeom>
-        </p:spPr>
-      </p:pic>
-      <p:sp>
-        <p:nvSpPr>
-          <p:cNvPr id="26" name="Text 15"/>
-          <p:cNvSpPr txBox="1"/>
-          <p:nvPr/>
-        </p:nvSpPr>
-        <p:spPr>
-          <a:xfrm>
-            <a:off x="8947404" y="3941064"/>
-            <a:ext cx="2345436" cy="457200"/>
-          </a:xfrm>
-          <a:prstGeom prst="rect">
-            <a:avLst/>
-          </a:prstGeom>
-          <a:noFill/>
-          <a:ln/>
-        </p:spPr>
-        <p:txBody>
-          <a:bodyPr wrap="square" lIns="0" tIns="0" rIns="0" bIns="0" rtlCol="0" anchor="ctr"/>
-          <a:lstStyle/>
-          <a:p>
-            <a:pPr indent="0" marL="0">
-              <a:buNone/>
-            </a:pPr>
-            <a:r>
-              <a:rPr lang="en-US" sz="1550" dirty="0">
-                <a:solidFill>
-                  <a:srgbClr val="F8F5EE"/>
-                </a:solidFill>
-                <a:latin typeface="Open Sans" pitchFamily="34" charset="0"/>
-                <a:ea typeface="Open Sans" pitchFamily="34" charset="-122"/>
-                <a:cs typeface="Open Sans" pitchFamily="34" charset="-120"/>
-              </a:rPr>
-              <a:t>darte feedback</a:t>
-            </a:r>
-            <a:endParaRPr lang="en-US" sz="1550" dirty="0"/>
-          </a:p>
-        </p:txBody>
-      </p:sp>
-      <p:sp>
-        <p:nvSpPr>
-          <p:cNvPr id="27" name="Shape 16"/>
+              <a:t>darte dirección, herramientas y feedback</a:t>
+            </a:r>
+            <a:endParaRPr lang="en-US" sz="1450" dirty="0"/>
+          </a:p>
+        </p:txBody>
+      </p:sp>
+      <p:sp>
+        <p:nvSpPr>
+          <p:cNvPr id="13" name="Shape 10"/>
           <p:cNvSpPr/>
           <p:nvPr/>
         </p:nvSpPr>
         <p:spPr>
           <a:xfrm>
-            <a:off x="4389120" y="4937760"/>
+            <a:off x="4389120" y="5029200"/>
             <a:ext cx="7159752" cy="1051560"/>
           </a:xfrm>
           <a:prstGeom prst="roundRect">
@@ -7506,13 +8115,13 @@
       </p:sp>
       <p:sp>
         <p:nvSpPr>
-          <p:cNvPr id="28" name="Shape 17"/>
+          <p:cNvPr id="14" name="Shape 11"/>
           <p:cNvSpPr/>
           <p:nvPr/>
         </p:nvSpPr>
         <p:spPr>
           <a:xfrm>
-            <a:off x="4754880" y="5148072"/>
+            <a:off x="4754880" y="5230368"/>
             <a:ext cx="640080" cy="640080"/>
           </a:xfrm>
           <a:prstGeom prst="ellipse">
@@ -7531,21 +8140,21 @@
       </p:sp>
       <p:pic>
         <p:nvPicPr>
-          <p:cNvPr id="29" name="Image 8" descr="preencoded.png">    </p:cNvPr>
+          <p:cNvPr id="15" name="Image 0" descr="preencoded.png">    </p:cNvPr>
           <p:cNvPicPr>
             <a:picLocks noChangeAspect="1"/>
           </p:cNvPicPr>
           <p:nvPr/>
         </p:nvPicPr>
         <p:blipFill>
-          <a:blip r:embed="rId9"/>
+          <a:blip r:embed="rId1"/>
           <a:stretch>
             <a:fillRect/>
           </a:stretch>
         </p:blipFill>
         <p:spPr>
           <a:xfrm>
-            <a:off x="4927702" y="5320894"/>
+            <a:off x="4927702" y="5403190"/>
             <a:ext cx="294437" cy="294437"/>
           </a:xfrm>
           <a:prstGeom prst="rect">
@@ -7555,13 +8164,13 @@
       </p:pic>
       <p:sp>
         <p:nvSpPr>
-          <p:cNvPr id="30" name="Text 18"/>
+          <p:cNvPr id="16" name="Text 12"/>
           <p:cNvSpPr txBox="1"/>
           <p:nvPr/>
         </p:nvSpPr>
         <p:spPr>
           <a:xfrm>
-            <a:off x="5623560" y="4937760"/>
+            <a:off x="5623560" y="5029200"/>
             <a:ext cx="5605272" cy="1051560"/>
           </a:xfrm>
           <a:prstGeom prst="rect">
@@ -7578,7 +8187,7 @@
               <a:buNone/>
             </a:pPr>
             <a:r>
-              <a:rPr lang="en-US" sz="2100" i="1" dirty="0">
+              <a:rPr lang="en-US" sz="1700" b="1" i="1" dirty="0">
                 <a:solidFill>
                   <a:srgbClr val="81552E"/>
                 </a:solidFill>
@@ -7586,13 +8195,13 @@
                 <a:ea typeface="Source Serif Pro" pitchFamily="34" charset="-122"/>
                 <a:cs typeface="Source Serif Pro" pitchFamily="34" charset="-120"/>
               </a:rPr>
-              <a:t>No necesitás diagnosticar sola qué practicar. </a:t>
+              <a:t>No espero semanas perfectas. </a:t>
             </a:r>
             <a:pPr indent="0" marL="0">
               <a:buNone/>
             </a:pPr>
             <a:r>
-              <a:rPr lang="en-US" sz="2100" b="1" i="1" dirty="0">
+              <a:rPr lang="en-US" sz="1700" i="1" dirty="0">
                 <a:solidFill>
                   <a:srgbClr val="81552E"/>
                 </a:solidFill>
@@ -7600,9 +8209,9 @@
                 <a:ea typeface="Source Serif Pro" pitchFamily="34" charset="-122"/>
                 <a:cs typeface="Source Serif Pro" pitchFamily="34" charset="-120"/>
               </a:rPr>
-              <a:t>Para eso estoy yo.</a:t>
-            </a:r>
-            <a:endParaRPr lang="en-US" sz="2100" dirty="0"/>
+              <a:t>Quiero un proceso real, constante y conectado con lo que necesitas en tu trabajo.</a:t>
+            </a:r>
+            <a:endParaRPr lang="en-US" sz="1700" dirty="0"/>
           </a:p>
         </p:txBody>
       </p:sp>
@@ -7805,7 +8414,7 @@
                 <a:ea typeface="Source Serif Pro" pitchFamily="34" charset="-122"/>
                 <a:cs typeface="Source Serif Pro" pitchFamily="34" charset="-120"/>
               </a:rPr>
-              <a:t>Antes de seguir con la próxima clase</a:t>
+              <a:t>Ya sabes cómo vamos a acompañarnos y qué espacios tienes dentro de AT WORK</a:t>
             </a:r>
             <a:endParaRPr lang="en-US" sz="1600" dirty="0"/>
           </a:p>
@@ -7819,12 +8428,12 @@
         </p:nvSpPr>
         <p:spPr>
           <a:xfrm>
-            <a:off x="4389120" y="1417320"/>
-            <a:ext cx="7159752" cy="1325880"/>
+            <a:off x="4389120" y="1143000"/>
+            <a:ext cx="7159752" cy="1051560"/>
           </a:xfrm>
           <a:prstGeom prst="roundRect">
             <a:avLst>
-              <a:gd name="adj" fmla="val 11034"/>
+              <a:gd name="adj" fmla="val 13913"/>
             </a:avLst>
           </a:prstGeom>
           <a:solidFill>
@@ -7853,8 +8462,8 @@
         </p:nvSpPr>
         <p:spPr>
           <a:xfrm>
-            <a:off x="4754880" y="1709928"/>
-            <a:ext cx="731520" cy="731520"/>
+            <a:off x="4709160" y="1348740"/>
+            <a:ext cx="640080" cy="640080"/>
           </a:xfrm>
           <a:prstGeom prst="ellipse">
             <a:avLst/>
@@ -7886,8 +8495,8 @@
         </p:blipFill>
         <p:spPr>
           <a:xfrm>
-            <a:off x="4952390" y="1907438"/>
-            <a:ext cx="336499" cy="336499"/>
+            <a:off x="4881982" y="1521562"/>
+            <a:ext cx="294437" cy="294437"/>
           </a:xfrm>
           <a:prstGeom prst="rect">
             <a:avLst/>
@@ -7902,8 +8511,8 @@
         </p:nvSpPr>
         <p:spPr>
           <a:xfrm>
-            <a:off x="5806440" y="1417320"/>
-            <a:ext cx="5422392" cy="1325880"/>
+            <a:off x="5623560" y="1143000"/>
+            <a:ext cx="5605272" cy="1051560"/>
           </a:xfrm>
           <a:prstGeom prst="rect">
             <a:avLst/>
@@ -7919,7 +8528,7 @@
               <a:buNone/>
             </a:pPr>
             <a:r>
-              <a:rPr lang="en-US" sz="1900" dirty="0">
+              <a:rPr lang="en-US" sz="1700" dirty="0">
                 <a:solidFill>
                   <a:srgbClr val="3F1E0D"/>
                 </a:solidFill>
@@ -7927,13 +8536,13 @@
                 <a:ea typeface="Open Sans" pitchFamily="34" charset="-122"/>
                 <a:cs typeface="Open Sans" pitchFamily="34" charset="-120"/>
               </a:rPr>
-              <a:t>Descargá, completá y firmá tu </a:t>
+              <a:t>Descarga el </a:t>
             </a:r>
             <a:pPr indent="0" marL="0">
               <a:buNone/>
             </a:pPr>
             <a:r>
-              <a:rPr lang="en-US" sz="1900" b="1" dirty="0">
+              <a:rPr lang="en-US" sz="1700" b="1" dirty="0">
                 <a:solidFill>
                   <a:srgbClr val="3F1E0D"/>
                 </a:solidFill>
@@ -7943,7 +8552,21 @@
               </a:rPr>
               <a:t>Acuerdo de Trabajo</a:t>
             </a:r>
-            <a:endParaRPr lang="en-US" sz="1900" dirty="0"/>
+            <a:pPr indent="0" marL="0">
+              <a:buNone/>
+            </a:pPr>
+            <a:r>
+              <a:rPr lang="en-US" sz="1700" dirty="0">
+                <a:solidFill>
+                  <a:srgbClr val="3F1E0D"/>
+                </a:solidFill>
+                <a:latin typeface="Open Sans" pitchFamily="34" charset="0"/>
+                <a:ea typeface="Open Sans" pitchFamily="34" charset="-122"/>
+                <a:cs typeface="Open Sans" pitchFamily="34" charset="-120"/>
+              </a:rPr>
+              <a:t> adjunto a esta clase</a:t>
+            </a:r>
+            <a:endParaRPr lang="en-US" sz="1700" dirty="0"/>
           </a:p>
         </p:txBody>
       </p:sp>
@@ -7955,12 +8578,12 @@
         </p:nvSpPr>
         <p:spPr>
           <a:xfrm>
-            <a:off x="4389120" y="2999232"/>
-            <a:ext cx="7159752" cy="1325880"/>
+            <a:off x="4389120" y="2395728"/>
+            <a:ext cx="7159752" cy="1051560"/>
           </a:xfrm>
           <a:prstGeom prst="roundRect">
             <a:avLst>
-              <a:gd name="adj" fmla="val 11034"/>
+              <a:gd name="adj" fmla="val 13913"/>
             </a:avLst>
           </a:prstGeom>
           <a:solidFill>
@@ -7989,8 +8612,8 @@
         </p:nvSpPr>
         <p:spPr>
           <a:xfrm>
-            <a:off x="4754880" y="3291840"/>
-            <a:ext cx="731520" cy="731520"/>
+            <a:off x="4709160" y="2601468"/>
+            <a:ext cx="640080" cy="640080"/>
           </a:xfrm>
           <a:prstGeom prst="ellipse">
             <a:avLst/>
@@ -8022,8 +8645,8 @@
         </p:blipFill>
         <p:spPr>
           <a:xfrm>
-            <a:off x="4952390" y="3489350"/>
-            <a:ext cx="336499" cy="336499"/>
+            <a:off x="4881982" y="2774290"/>
+            <a:ext cx="294437" cy="294437"/>
           </a:xfrm>
           <a:prstGeom prst="rect">
             <a:avLst/>
@@ -8038,8 +8661,8 @@
         </p:nvSpPr>
         <p:spPr>
           <a:xfrm>
-            <a:off x="5806440" y="2999232"/>
-            <a:ext cx="5422392" cy="1325880"/>
+            <a:off x="5623560" y="2395728"/>
+            <a:ext cx="5605272" cy="1051560"/>
           </a:xfrm>
           <a:prstGeom prst="rect">
             <a:avLst/>
@@ -8055,7 +8678,7 @@
               <a:buNone/>
             </a:pPr>
             <a:r>
-              <a:rPr lang="en-US" sz="1900" dirty="0">
+              <a:rPr lang="en-US" sz="1700" dirty="0">
                 <a:solidFill>
                   <a:srgbClr val="3F1E0D"/>
                 </a:solidFill>
@@ -8063,23 +8686,9 @@
                 <a:ea typeface="Open Sans" pitchFamily="34" charset="-122"/>
                 <a:cs typeface="Open Sans" pitchFamily="34" charset="-120"/>
               </a:rPr>
-              <a:t>Subilo a </a:t>
-            </a:r>
-            <a:pPr indent="0" marL="0">
-              <a:buNone/>
-            </a:pPr>
-            <a:r>
-              <a:rPr lang="en-US" sz="1900" b="1" dirty="0">
-                <a:solidFill>
-                  <a:srgbClr val="3F1E0D"/>
-                </a:solidFill>
-                <a:latin typeface="Open Sans" pitchFamily="34" charset="0"/>
-                <a:ea typeface="Open Sans" pitchFamily="34" charset="-122"/>
-                <a:cs typeface="Open Sans" pitchFamily="34" charset="-120"/>
-              </a:rPr>
-              <a:t>01 · MI CONTEXTO PROFESIONAL</a:t>
-            </a:r>
-            <a:endParaRPr lang="en-US" sz="1900" dirty="0"/>
+              <a:t>Complétalo y fírmalo</a:t>
+            </a:r>
+            <a:endParaRPr lang="en-US" sz="1700" dirty="0"/>
           </a:p>
         </p:txBody>
       </p:sp>
@@ -8091,12 +8700,12 @@
         </p:nvSpPr>
         <p:spPr>
           <a:xfrm>
-            <a:off x="4389120" y="4581144"/>
-            <a:ext cx="7159752" cy="1325880"/>
+            <a:off x="4389120" y="3648456"/>
+            <a:ext cx="7159752" cy="1051560"/>
           </a:xfrm>
           <a:prstGeom prst="roundRect">
             <a:avLst>
-              <a:gd name="adj" fmla="val 11034"/>
+              <a:gd name="adj" fmla="val 13913"/>
             </a:avLst>
           </a:prstGeom>
           <a:solidFill>
@@ -8125,8 +8734,8 @@
         </p:nvSpPr>
         <p:spPr>
           <a:xfrm>
-            <a:off x="4754880" y="4873752"/>
-            <a:ext cx="731520" cy="731520"/>
+            <a:off x="4709160" y="3854196"/>
+            <a:ext cx="640080" cy="640080"/>
           </a:xfrm>
           <a:prstGeom prst="ellipse">
             <a:avLst/>
@@ -8158,8 +8767,8 @@
         </p:blipFill>
         <p:spPr>
           <a:xfrm>
-            <a:off x="4952390" y="5071262"/>
-            <a:ext cx="336499" cy="336499"/>
+            <a:off x="4881982" y="4027018"/>
+            <a:ext cx="294437" cy="294437"/>
           </a:xfrm>
           <a:prstGeom prst="rect">
             <a:avLst/>
@@ -8174,8 +8783,8 @@
         </p:nvSpPr>
         <p:spPr>
           <a:xfrm>
-            <a:off x="5806440" y="4581144"/>
-            <a:ext cx="5422392" cy="1325880"/>
+            <a:off x="5623560" y="3648456"/>
+            <a:ext cx="5605272" cy="1051560"/>
           </a:xfrm>
           <a:prstGeom prst="rect">
             <a:avLst/>
@@ -8191,7 +8800,7 @@
               <a:buNone/>
             </a:pPr>
             <a:r>
-              <a:rPr lang="en-US" sz="1900" dirty="0">
+              <a:rPr lang="en-US" sz="1700" dirty="0">
                 <a:solidFill>
                   <a:srgbClr val="3F1E0D"/>
                 </a:solidFill>
@@ -8199,13 +8808,13 @@
                 <a:ea typeface="Open Sans" pitchFamily="34" charset="-122"/>
                 <a:cs typeface="Open Sans" pitchFamily="34" charset="-120"/>
               </a:rPr>
-              <a:t>Seguí con la próxima clase: </a:t>
+              <a:t>Súbelo a tu carpeta, dentro de </a:t>
             </a:r>
             <a:pPr indent="0" marL="0">
               <a:buNone/>
             </a:pPr>
             <a:r>
-              <a:rPr lang="en-US" sz="1900" b="1" dirty="0">
+              <a:rPr lang="en-US" sz="1700" b="1" dirty="0">
                 <a:solidFill>
                   <a:srgbClr val="3F1E0D"/>
                 </a:solidFill>
@@ -8213,9 +8822,145 @@
                 <a:ea typeface="Open Sans" pitchFamily="34" charset="-122"/>
                 <a:cs typeface="Open Sans" pitchFamily="34" charset="-120"/>
               </a:rPr>
-              <a:t>Tu ecosistema AT WORK</a:t>
-            </a:r>
-            <a:endParaRPr lang="en-US" sz="1900" dirty="0"/>
+              <a:t>01 · MI CONTEXTO PROFESIONAL</a:t>
+            </a:r>
+            <a:endParaRPr lang="en-US" sz="1700" dirty="0"/>
+          </a:p>
+        </p:txBody>
+      </p:sp>
+      <p:sp>
+        <p:nvSpPr>
+          <p:cNvPr id="19" name="Shape 13"/>
+          <p:cNvSpPr/>
+          <p:nvPr/>
+        </p:nvSpPr>
+        <p:spPr>
+          <a:xfrm>
+            <a:off x="4389120" y="4901184"/>
+            <a:ext cx="7159752" cy="1051560"/>
+          </a:xfrm>
+          <a:prstGeom prst="roundRect">
+            <a:avLst>
+              <a:gd name="adj" fmla="val 13913"/>
+            </a:avLst>
+          </a:prstGeom>
+          <a:solidFill>
+            <a:srgbClr val="F8F5EE"/>
+          </a:solidFill>
+          <a:ln w="12700">
+            <a:solidFill>
+              <a:srgbClr val="F8F5EE"/>
+            </a:solidFill>
+            <a:prstDash val="solid"/>
+          </a:ln>
+          <a:effectLst>
+            <a:outerShdw sx="100000" sy="100000" kx="0" ky="0" algn="bl" rotWithShape="0" blurRad="177800" dist="38100" dir="5400000">
+              <a:srgbClr val="3F1E0D">
+                <a:alpha val="10000"/>
+              </a:srgbClr>
+            </a:outerShdw>
+          </a:effectLst>
+        </p:spPr>
+      </p:sp>
+      <p:sp>
+        <p:nvSpPr>
+          <p:cNvPr id="20" name="Shape 14"/>
+          <p:cNvSpPr/>
+          <p:nvPr/>
+        </p:nvSpPr>
+        <p:spPr>
+          <a:xfrm>
+            <a:off x="4709160" y="5106924"/>
+            <a:ext cx="640080" cy="640080"/>
+          </a:xfrm>
+          <a:prstGeom prst="ellipse">
+            <a:avLst/>
+          </a:prstGeom>
+          <a:solidFill>
+            <a:srgbClr val="3F1E0D"/>
+          </a:solidFill>
+          <a:ln w="12700">
+            <a:solidFill>
+              <a:srgbClr val="3F1E0D"/>
+            </a:solidFill>
+            <a:prstDash val="solid"/>
+          </a:ln>
+        </p:spPr>
+      </p:sp>
+      <p:pic>
+        <p:nvPicPr>
+          <p:cNvPr id="21" name="Image 3" descr="preencoded.png">    </p:cNvPr>
+          <p:cNvPicPr>
+            <a:picLocks noChangeAspect="1"/>
+          </p:cNvPicPr>
+          <p:nvPr/>
+        </p:nvPicPr>
+        <p:blipFill>
+          <a:blip r:embed="rId4"/>
+          <a:stretch>
+            <a:fillRect/>
+          </a:stretch>
+        </p:blipFill>
+        <p:spPr>
+          <a:xfrm>
+            <a:off x="4881982" y="5279746"/>
+            <a:ext cx="294437" cy="294437"/>
+          </a:xfrm>
+          <a:prstGeom prst="rect">
+            <a:avLst/>
+          </a:prstGeom>
+        </p:spPr>
+      </p:pic>
+      <p:sp>
+        <p:nvSpPr>
+          <p:cNvPr id="22" name="Text 15"/>
+          <p:cNvSpPr txBox="1"/>
+          <p:nvPr/>
+        </p:nvSpPr>
+        <p:spPr>
+          <a:xfrm>
+            <a:off x="5623560" y="4901184"/>
+            <a:ext cx="5605272" cy="1051560"/>
+          </a:xfrm>
+          <a:prstGeom prst="rect">
+            <a:avLst/>
+          </a:prstGeom>
+          <a:noFill/>
+          <a:ln/>
+        </p:spPr>
+        <p:txBody>
+          <a:bodyPr wrap="square" lIns="0" tIns="0" rIns="0" bIns="0" rtlCol="0" anchor="ctr"/>
+          <a:lstStyle/>
+          <a:p>
+            <a:pPr indent="0" marL="0">
+              <a:buNone/>
+            </a:pPr>
+            <a:r>
+              <a:rPr lang="en-US" sz="1700" dirty="0">
+                <a:solidFill>
+                  <a:srgbClr val="3F1E0D"/>
+                </a:solidFill>
+                <a:latin typeface="Open Sans" pitchFamily="34" charset="0"/>
+                <a:ea typeface="Open Sans" pitchFamily="34" charset="-122"/>
+                <a:cs typeface="Open Sans" pitchFamily="34" charset="-120"/>
+              </a:rPr>
+              <a:t>Sigue con la próxima clase: </a:t>
+            </a:r>
+            <a:pPr indent="0" marL="0">
+              <a:buNone/>
+            </a:pPr>
+            <a:r>
+              <a:rPr lang="en-US" sz="1700" b="1" dirty="0">
+                <a:solidFill>
+                  <a:srgbClr val="3F1E0D"/>
+                </a:solidFill>
+                <a:latin typeface="Open Sans" pitchFamily="34" charset="0"/>
+                <a:ea typeface="Open Sans" pitchFamily="34" charset="-122"/>
+                <a:cs typeface="Open Sans" pitchFamily="34" charset="-120"/>
+              </a:rPr>
+              <a:t>cómo se organiza el ecosistema AT WORK</a:t>
+            </a:r>
+            <a:endParaRPr lang="en-US" sz="1700" dirty="0"/>
           </a:p>
         </p:txBody>
       </p:sp>

--- a/onboarding/ONB02_Como_vamos_a_trabajar_juntas.pptx
+++ b/onboarding/ONB02_Como_vamos_a_trabajar_juntas.pptx
@@ -2333,16 +2333,40 @@
           <a:chExt cx="0" cy="0"/>
         </a:xfrm>
       </p:grpSpPr>
-      <p:sp>
-        <p:nvSpPr>
-          <p:cNvPr id="3" name="Text 0"/>
+      <p:pic>
+        <p:nvPicPr>
+          <p:cNvPr id="3" name="Image 0" descr="Breaking Barriers at work">    </p:cNvPr>
+          <p:cNvPicPr>
+            <a:picLocks noChangeAspect="1"/>
+          </p:cNvPicPr>
+          <p:nvPr/>
+        </p:nvPicPr>
+        <p:blipFill>
+          <a:blip r:embed="rId1"/>
+          <a:stretch>
+            <a:fillRect/>
+          </a:stretch>
+        </p:blipFill>
+        <p:spPr>
+          <a:xfrm>
+            <a:off x="640080" y="274320"/>
+            <a:ext cx="1188720" cy="542536"/>
+          </a:xfrm>
+          <a:prstGeom prst="rect">
+            <a:avLst/>
+          </a:prstGeom>
+        </p:spPr>
+      </p:pic>
+      <p:sp>
+        <p:nvSpPr>
+          <p:cNvPr id="4" name="Text 0"/>
           <p:cNvSpPr txBox="1"/>
           <p:nvPr/>
         </p:nvSpPr>
         <p:spPr>
           <a:xfrm>
-            <a:off x="640080" y="384048"/>
-            <a:ext cx="4572000" cy="274320"/>
+            <a:off x="7891272" y="384048"/>
+            <a:ext cx="3657600" cy="274320"/>
           </a:xfrm>
           <a:prstGeom prst="rect">
             <a:avLst/>
@@ -2354,86 +2378,47 @@
           <a:bodyPr wrap="square" lIns="0" tIns="0" rIns="0" bIns="0" rtlCol="0" anchor="ctr"/>
           <a:lstStyle/>
           <a:p>
-            <a:pPr indent="0" marL="0">
-              <a:buNone/>
-            </a:pPr>
-            <a:r>
-              <a:rPr lang="en-US" sz="1050" b="1" spc="300" kern="0" dirty="0">
-                <a:solidFill>
-                  <a:srgbClr val="C68C6C"/>
+            <a:pPr algn="r" indent="0" marL="0">
+              <a:buNone/>
+            </a:pPr>
+            <a:r>
+              <a:rPr lang="en-US" sz="1100" i="1" dirty="0">
+                <a:solidFill>
+                  <a:srgbClr val="8A6A55"/>
+                </a:solidFill>
+                <a:latin typeface="Source Serif Pro" pitchFamily="34" charset="0"/>
+                <a:ea typeface="Source Serif Pro" pitchFamily="34" charset="-122"/>
+                <a:cs typeface="Source Serif Pro" pitchFamily="34" charset="-120"/>
+              </a:rPr>
+              <a:t>by Flor Pérsico</a:t>
+            </a:r>
+            <a:pPr algn="r" indent="0" marL="0">
+              <a:buNone/>
+            </a:pPr>
+            <a:r>
+              <a:rPr lang="en-US" sz="1100" dirty="0">
+                <a:solidFill>
+                  <a:srgbClr val="8A6A55"/>
                 </a:solidFill>
                 <a:latin typeface="Open Sans" pitchFamily="34" charset="0"/>
                 <a:ea typeface="Open Sans" pitchFamily="34" charset="-122"/>
                 <a:cs typeface="Open Sans" pitchFamily="34" charset="-120"/>
               </a:rPr>
-              <a:t>BREAKING BARRIERS · AT WORK</a:t>
-            </a:r>
-            <a:endParaRPr lang="en-US" sz="1050" dirty="0"/>
-          </a:p>
-        </p:txBody>
-      </p:sp>
-      <p:sp>
-        <p:nvSpPr>
-          <p:cNvPr id="4" name="Text 1"/>
+              <a:t>   ·   02 / 09</a:t>
+            </a:r>
+            <a:endParaRPr lang="en-US" sz="1100" dirty="0"/>
+          </a:p>
+        </p:txBody>
+      </p:sp>
+      <p:sp>
+        <p:nvSpPr>
+          <p:cNvPr id="5" name="Text 1"/>
           <p:cNvSpPr txBox="1"/>
           <p:nvPr/>
         </p:nvSpPr>
         <p:spPr>
           <a:xfrm>
-            <a:off x="7891272" y="384048"/>
-            <a:ext cx="3657600" cy="274320"/>
-          </a:xfrm>
-          <a:prstGeom prst="rect">
-            <a:avLst/>
-          </a:prstGeom>
-          <a:noFill/>
-          <a:ln/>
-        </p:spPr>
-        <p:txBody>
-          <a:bodyPr wrap="square" lIns="0" tIns="0" rIns="0" bIns="0" rtlCol="0" anchor="ctr"/>
-          <a:lstStyle/>
-          <a:p>
-            <a:pPr algn="r" indent="0" marL="0">
-              <a:buNone/>
-            </a:pPr>
-            <a:r>
-              <a:rPr lang="en-US" sz="1100" i="1" dirty="0">
-                <a:solidFill>
-                  <a:srgbClr val="8A6A55"/>
-                </a:solidFill>
-                <a:latin typeface="Source Serif Pro" pitchFamily="34" charset="0"/>
-                <a:ea typeface="Source Serif Pro" pitchFamily="34" charset="-122"/>
-                <a:cs typeface="Source Serif Pro" pitchFamily="34" charset="-120"/>
-              </a:rPr>
-              <a:t>by Flor Pérsico</a:t>
-            </a:r>
-            <a:pPr algn="r" indent="0" marL="0">
-              <a:buNone/>
-            </a:pPr>
-            <a:r>
-              <a:rPr lang="en-US" sz="1100" dirty="0">
-                <a:solidFill>
-                  <a:srgbClr val="8A6A55"/>
-                </a:solidFill>
-                <a:latin typeface="Open Sans" pitchFamily="34" charset="0"/>
-                <a:ea typeface="Open Sans" pitchFamily="34" charset="-122"/>
-                <a:cs typeface="Open Sans" pitchFamily="34" charset="-120"/>
-              </a:rPr>
-              <a:t>   ·   02 / 09</a:t>
-            </a:r>
-            <a:endParaRPr lang="en-US" sz="1100" dirty="0"/>
-          </a:p>
-        </p:txBody>
-      </p:sp>
-      <p:sp>
-        <p:nvSpPr>
-          <p:cNvPr id="5" name="Text 2"/>
-          <p:cNvSpPr txBox="1"/>
-          <p:nvPr/>
-        </p:nvSpPr>
-        <p:spPr>
-          <a:xfrm>
-            <a:off x="640080" y="1097280"/>
+            <a:off x="640080" y="1280160"/>
             <a:ext cx="3429000" cy="1783080"/>
           </a:xfrm>
           <a:prstGeom prst="rect">
@@ -2469,13 +2454,13 @@
       </p:sp>
       <p:sp>
         <p:nvSpPr>
-          <p:cNvPr id="6" name="Text 3"/>
+          <p:cNvPr id="6" name="Text 2"/>
           <p:cNvSpPr txBox="1"/>
           <p:nvPr/>
         </p:nvSpPr>
         <p:spPr>
           <a:xfrm>
-            <a:off x="640080" y="2414016"/>
+            <a:off x="640080" y="2596896"/>
             <a:ext cx="3291840" cy="731520"/>
           </a:xfrm>
           <a:prstGeom prst="rect">
@@ -2508,13 +2493,13 @@
       </p:sp>
       <p:sp>
         <p:nvSpPr>
-          <p:cNvPr id="7" name="Shape 4"/>
+          <p:cNvPr id="7" name="Shape 3"/>
           <p:cNvSpPr/>
           <p:nvPr/>
         </p:nvSpPr>
         <p:spPr>
           <a:xfrm>
-            <a:off x="4389120" y="1143000"/>
+            <a:off x="4389120" y="1280160"/>
             <a:ext cx="7159752" cy="1051560"/>
           </a:xfrm>
           <a:prstGeom prst="roundRect">
@@ -2542,13 +2527,13 @@
       </p:sp>
       <p:sp>
         <p:nvSpPr>
-          <p:cNvPr id="8" name="Shape 5"/>
+          <p:cNvPr id="8" name="Shape 4"/>
           <p:cNvSpPr/>
           <p:nvPr/>
         </p:nvSpPr>
         <p:spPr>
           <a:xfrm>
-            <a:off x="4663440" y="1394460"/>
+            <a:off x="4663440" y="1531620"/>
             <a:ext cx="548640" cy="548640"/>
           </a:xfrm>
           <a:prstGeom prst="ellipse">
@@ -2567,13 +2552,13 @@
       </p:sp>
       <p:sp>
         <p:nvSpPr>
-          <p:cNvPr id="9" name="Text 6"/>
+          <p:cNvPr id="9" name="Text 5"/>
           <p:cNvSpPr txBox="1"/>
           <p:nvPr/>
         </p:nvSpPr>
         <p:spPr>
           <a:xfrm>
-            <a:off x="4663440" y="1394460"/>
+            <a:off x="4663440" y="1531620"/>
             <a:ext cx="548640" cy="548640"/>
           </a:xfrm>
           <a:prstGeom prst="rect">
@@ -2606,13 +2591,13 @@
       </p:sp>
       <p:sp>
         <p:nvSpPr>
-          <p:cNvPr id="10" name="Text 7"/>
+          <p:cNvPr id="10" name="Text 6"/>
           <p:cNvSpPr txBox="1"/>
           <p:nvPr/>
         </p:nvSpPr>
         <p:spPr>
           <a:xfrm>
-            <a:off x="5440680" y="1143000"/>
+            <a:off x="5440680" y="1280160"/>
             <a:ext cx="5239512" cy="1051560"/>
           </a:xfrm>
           <a:prstGeom prst="rect">
@@ -2659,21 +2644,21 @@
       </p:sp>
       <p:pic>
         <p:nvPicPr>
-          <p:cNvPr id="11" name="Image 0" descr="preencoded.png">    </p:cNvPr>
+          <p:cNvPr id="11" name="Image 1" descr="preencoded.png">    </p:cNvPr>
           <p:cNvPicPr>
             <a:picLocks noChangeAspect="1"/>
           </p:cNvPicPr>
           <p:nvPr/>
         </p:nvPicPr>
         <p:blipFill>
-          <a:blip r:embed="rId1"/>
+          <a:blip r:embed="rId2"/>
           <a:stretch>
             <a:fillRect/>
           </a:stretch>
         </p:blipFill>
         <p:spPr>
           <a:xfrm>
-            <a:off x="10817352" y="1463040"/>
+            <a:off x="10817352" y="1600200"/>
             <a:ext cx="411480" cy="411480"/>
           </a:xfrm>
           <a:prstGeom prst="rect">
@@ -2683,13 +2668,13 @@
       </p:pic>
       <p:sp>
         <p:nvSpPr>
-          <p:cNvPr id="12" name="Shape 8"/>
+          <p:cNvPr id="12" name="Shape 7"/>
           <p:cNvSpPr/>
           <p:nvPr/>
         </p:nvSpPr>
         <p:spPr>
           <a:xfrm>
-            <a:off x="4389120" y="2395728"/>
+            <a:off x="4389120" y="2532888"/>
             <a:ext cx="7159752" cy="1051560"/>
           </a:xfrm>
           <a:prstGeom prst="roundRect">
@@ -2717,13 +2702,13 @@
       </p:sp>
       <p:sp>
         <p:nvSpPr>
-          <p:cNvPr id="13" name="Shape 9"/>
+          <p:cNvPr id="13" name="Shape 8"/>
           <p:cNvSpPr/>
           <p:nvPr/>
         </p:nvSpPr>
         <p:spPr>
           <a:xfrm>
-            <a:off x="4663440" y="2647188"/>
+            <a:off x="4663440" y="2784348"/>
             <a:ext cx="548640" cy="548640"/>
           </a:xfrm>
           <a:prstGeom prst="ellipse">
@@ -2742,13 +2727,13 @@
       </p:sp>
       <p:sp>
         <p:nvSpPr>
-          <p:cNvPr id="14" name="Text 10"/>
+          <p:cNvPr id="14" name="Text 9"/>
           <p:cNvSpPr txBox="1"/>
           <p:nvPr/>
         </p:nvSpPr>
         <p:spPr>
           <a:xfrm>
-            <a:off x="4663440" y="2647188"/>
+            <a:off x="4663440" y="2784348"/>
             <a:ext cx="548640" cy="548640"/>
           </a:xfrm>
           <a:prstGeom prst="rect">
@@ -2781,13 +2766,13 @@
       </p:sp>
       <p:sp>
         <p:nvSpPr>
-          <p:cNvPr id="15" name="Text 11"/>
+          <p:cNvPr id="15" name="Text 10"/>
           <p:cNvSpPr txBox="1"/>
           <p:nvPr/>
         </p:nvSpPr>
         <p:spPr>
           <a:xfrm>
-            <a:off x="5440680" y="2395728"/>
+            <a:off x="5440680" y="2532888"/>
             <a:ext cx="5239512" cy="1051560"/>
           </a:xfrm>
           <a:prstGeom prst="rect">
@@ -2820,21 +2805,21 @@
       </p:sp>
       <p:pic>
         <p:nvPicPr>
-          <p:cNvPr id="16" name="Image 1" descr="preencoded.png">    </p:cNvPr>
+          <p:cNvPr id="16" name="Image 2" descr="preencoded.png">    </p:cNvPr>
           <p:cNvPicPr>
             <a:picLocks noChangeAspect="1"/>
           </p:cNvPicPr>
           <p:nvPr/>
         </p:nvPicPr>
         <p:blipFill>
-          <a:blip r:embed="rId2"/>
+          <a:blip r:embed="rId3"/>
           <a:stretch>
             <a:fillRect/>
           </a:stretch>
         </p:blipFill>
         <p:spPr>
           <a:xfrm>
-            <a:off x="10817352" y="2715768"/>
+            <a:off x="10817352" y="2852928"/>
             <a:ext cx="411480" cy="411480"/>
           </a:xfrm>
           <a:prstGeom prst="rect">
@@ -2844,13 +2829,13 @@
       </p:pic>
       <p:sp>
         <p:nvSpPr>
-          <p:cNvPr id="17" name="Shape 12"/>
+          <p:cNvPr id="17" name="Shape 11"/>
           <p:cNvSpPr/>
           <p:nvPr/>
         </p:nvSpPr>
         <p:spPr>
           <a:xfrm>
-            <a:off x="4389120" y="3648456"/>
+            <a:off x="4389120" y="3785616"/>
             <a:ext cx="7159752" cy="1051560"/>
           </a:xfrm>
           <a:prstGeom prst="roundRect">
@@ -2878,13 +2863,13 @@
       </p:sp>
       <p:sp>
         <p:nvSpPr>
-          <p:cNvPr id="18" name="Shape 13"/>
+          <p:cNvPr id="18" name="Shape 12"/>
           <p:cNvSpPr/>
           <p:nvPr/>
         </p:nvSpPr>
         <p:spPr>
           <a:xfrm>
-            <a:off x="4663440" y="3899916"/>
+            <a:off x="4663440" y="4037076"/>
             <a:ext cx="548640" cy="548640"/>
           </a:xfrm>
           <a:prstGeom prst="ellipse">
@@ -2903,13 +2888,13 @@
       </p:sp>
       <p:sp>
         <p:nvSpPr>
-          <p:cNvPr id="19" name="Text 14"/>
+          <p:cNvPr id="19" name="Text 13"/>
           <p:cNvSpPr txBox="1"/>
           <p:nvPr/>
         </p:nvSpPr>
         <p:spPr>
           <a:xfrm>
-            <a:off x="4663440" y="3899916"/>
+            <a:off x="4663440" y="4037076"/>
             <a:ext cx="548640" cy="548640"/>
           </a:xfrm>
           <a:prstGeom prst="rect">
@@ -2942,13 +2927,13 @@
       </p:sp>
       <p:sp>
         <p:nvSpPr>
-          <p:cNvPr id="20" name="Text 15"/>
+          <p:cNvPr id="20" name="Text 14"/>
           <p:cNvSpPr txBox="1"/>
           <p:nvPr/>
         </p:nvSpPr>
         <p:spPr>
           <a:xfrm>
-            <a:off x="5440680" y="3648456"/>
+            <a:off x="5440680" y="3785616"/>
             <a:ext cx="5239512" cy="1051560"/>
           </a:xfrm>
           <a:prstGeom prst="rect">
@@ -2995,21 +2980,21 @@
       </p:sp>
       <p:pic>
         <p:nvPicPr>
-          <p:cNvPr id="21" name="Image 2" descr="preencoded.png">    </p:cNvPr>
+          <p:cNvPr id="21" name="Image 3" descr="preencoded.png">    </p:cNvPr>
           <p:cNvPicPr>
             <a:picLocks noChangeAspect="1"/>
           </p:cNvPicPr>
           <p:nvPr/>
         </p:nvPicPr>
         <p:blipFill>
-          <a:blip r:embed="rId3"/>
+          <a:blip r:embed="rId4"/>
           <a:stretch>
             <a:fillRect/>
           </a:stretch>
         </p:blipFill>
         <p:spPr>
           <a:xfrm>
-            <a:off x="10817352" y="3968496"/>
+            <a:off x="10817352" y="4105656"/>
             <a:ext cx="411480" cy="411480"/>
           </a:xfrm>
           <a:prstGeom prst="rect">
@@ -3019,13 +3004,13 @@
       </p:pic>
       <p:sp>
         <p:nvSpPr>
-          <p:cNvPr id="22" name="Shape 16"/>
+          <p:cNvPr id="22" name="Shape 15"/>
           <p:cNvSpPr/>
           <p:nvPr/>
         </p:nvSpPr>
         <p:spPr>
           <a:xfrm>
-            <a:off x="4389120" y="4992624"/>
+            <a:off x="4389120" y="5129784"/>
             <a:ext cx="7159752" cy="1097280"/>
           </a:xfrm>
           <a:prstGeom prst="roundRect">
@@ -3053,13 +3038,13 @@
       </p:sp>
       <p:sp>
         <p:nvSpPr>
-          <p:cNvPr id="23" name="Shape 17"/>
+          <p:cNvPr id="23" name="Shape 16"/>
           <p:cNvSpPr/>
           <p:nvPr/>
         </p:nvSpPr>
         <p:spPr>
           <a:xfrm>
-            <a:off x="4754880" y="5152644"/>
+            <a:off x="4754880" y="5289804"/>
             <a:ext cx="777240" cy="777240"/>
           </a:xfrm>
           <a:prstGeom prst="ellipse">
@@ -3078,21 +3063,21 @@
       </p:sp>
       <p:pic>
         <p:nvPicPr>
-          <p:cNvPr id="24" name="Image 3" descr="preencoded.png">    </p:cNvPr>
+          <p:cNvPr id="24" name="Image 4" descr="preencoded.png">    </p:cNvPr>
           <p:cNvPicPr>
             <a:picLocks noChangeAspect="1"/>
           </p:cNvPicPr>
           <p:nvPr/>
         </p:nvPicPr>
         <p:blipFill>
-          <a:blip r:embed="rId4"/>
+          <a:blip r:embed="rId5"/>
           <a:stretch>
             <a:fillRect/>
           </a:stretch>
         </p:blipFill>
         <p:spPr>
           <a:xfrm>
-            <a:off x="4964735" y="5362499"/>
+            <a:off x="4964735" y="5499659"/>
             <a:ext cx="357530" cy="357530"/>
           </a:xfrm>
           <a:prstGeom prst="rect">
@@ -3102,13 +3087,13 @@
       </p:pic>
       <p:sp>
         <p:nvSpPr>
-          <p:cNvPr id="25" name="Text 18"/>
+          <p:cNvPr id="25" name="Text 17"/>
           <p:cNvSpPr txBox="1"/>
           <p:nvPr/>
         </p:nvSpPr>
         <p:spPr>
           <a:xfrm>
-            <a:off x="5806440" y="4992624"/>
+            <a:off x="5806440" y="5129784"/>
             <a:ext cx="5422392" cy="1097280"/>
           </a:xfrm>
           <a:prstGeom prst="rect">
@@ -3174,16 +3159,40 @@
           <a:chExt cx="0" cy="0"/>
         </a:xfrm>
       </p:grpSpPr>
-      <p:sp>
-        <p:nvSpPr>
-          <p:cNvPr id="3" name="Text 0"/>
+      <p:pic>
+        <p:nvPicPr>
+          <p:cNvPr id="3" name="Image 0" descr="Breaking Barriers at work">    </p:cNvPr>
+          <p:cNvPicPr>
+            <a:picLocks noChangeAspect="1"/>
+          </p:cNvPicPr>
+          <p:nvPr/>
+        </p:nvPicPr>
+        <p:blipFill>
+          <a:blip r:embed="rId1"/>
+          <a:stretch>
+            <a:fillRect/>
+          </a:stretch>
+        </p:blipFill>
+        <p:spPr>
+          <a:xfrm>
+            <a:off x="640080" y="274320"/>
+            <a:ext cx="1188720" cy="542536"/>
+          </a:xfrm>
+          <a:prstGeom prst="rect">
+            <a:avLst/>
+          </a:prstGeom>
+        </p:spPr>
+      </p:pic>
+      <p:sp>
+        <p:nvSpPr>
+          <p:cNvPr id="4" name="Text 0"/>
           <p:cNvSpPr txBox="1"/>
           <p:nvPr/>
         </p:nvSpPr>
         <p:spPr>
           <a:xfrm>
-            <a:off x="640080" y="384048"/>
-            <a:ext cx="4572000" cy="274320"/>
+            <a:off x="7891272" y="384048"/>
+            <a:ext cx="3657600" cy="274320"/>
           </a:xfrm>
           <a:prstGeom prst="rect">
             <a:avLst/>
@@ -3195,86 +3204,47 @@
           <a:bodyPr wrap="square" lIns="0" tIns="0" rIns="0" bIns="0" rtlCol="0" anchor="ctr"/>
           <a:lstStyle/>
           <a:p>
-            <a:pPr indent="0" marL="0">
-              <a:buNone/>
-            </a:pPr>
-            <a:r>
-              <a:rPr lang="en-US" sz="1050" b="1" spc="300" kern="0" dirty="0">
-                <a:solidFill>
-                  <a:srgbClr val="C68C6C"/>
+            <a:pPr algn="r" indent="0" marL="0">
+              <a:buNone/>
+            </a:pPr>
+            <a:r>
+              <a:rPr lang="en-US" sz="1100" i="1" dirty="0">
+                <a:solidFill>
+                  <a:srgbClr val="8A6A55"/>
+                </a:solidFill>
+                <a:latin typeface="Source Serif Pro" pitchFamily="34" charset="0"/>
+                <a:ea typeface="Source Serif Pro" pitchFamily="34" charset="-122"/>
+                <a:cs typeface="Source Serif Pro" pitchFamily="34" charset="-120"/>
+              </a:rPr>
+              <a:t>by Flor Pérsico</a:t>
+            </a:r>
+            <a:pPr algn="r" indent="0" marL="0">
+              <a:buNone/>
+            </a:pPr>
+            <a:r>
+              <a:rPr lang="en-US" sz="1100" dirty="0">
+                <a:solidFill>
+                  <a:srgbClr val="8A6A55"/>
                 </a:solidFill>
                 <a:latin typeface="Open Sans" pitchFamily="34" charset="0"/>
                 <a:ea typeface="Open Sans" pitchFamily="34" charset="-122"/>
                 <a:cs typeface="Open Sans" pitchFamily="34" charset="-120"/>
               </a:rPr>
-              <a:t>BREAKING BARRIERS · AT WORK</a:t>
-            </a:r>
-            <a:endParaRPr lang="en-US" sz="1050" dirty="0"/>
-          </a:p>
-        </p:txBody>
-      </p:sp>
-      <p:sp>
-        <p:nvSpPr>
-          <p:cNvPr id="4" name="Text 1"/>
+              <a:t>   ·   03 / 09</a:t>
+            </a:r>
+            <a:endParaRPr lang="en-US" sz="1100" dirty="0"/>
+          </a:p>
+        </p:txBody>
+      </p:sp>
+      <p:sp>
+        <p:nvSpPr>
+          <p:cNvPr id="5" name="Text 1"/>
           <p:cNvSpPr txBox="1"/>
           <p:nvPr/>
         </p:nvSpPr>
         <p:spPr>
           <a:xfrm>
-            <a:off x="7891272" y="384048"/>
-            <a:ext cx="3657600" cy="274320"/>
-          </a:xfrm>
-          <a:prstGeom prst="rect">
-            <a:avLst/>
-          </a:prstGeom>
-          <a:noFill/>
-          <a:ln/>
-        </p:spPr>
-        <p:txBody>
-          <a:bodyPr wrap="square" lIns="0" tIns="0" rIns="0" bIns="0" rtlCol="0" anchor="ctr"/>
-          <a:lstStyle/>
-          <a:p>
-            <a:pPr algn="r" indent="0" marL="0">
-              <a:buNone/>
-            </a:pPr>
-            <a:r>
-              <a:rPr lang="en-US" sz="1100" i="1" dirty="0">
-                <a:solidFill>
-                  <a:srgbClr val="8A6A55"/>
-                </a:solidFill>
-                <a:latin typeface="Source Serif Pro" pitchFamily="34" charset="0"/>
-                <a:ea typeface="Source Serif Pro" pitchFamily="34" charset="-122"/>
-                <a:cs typeface="Source Serif Pro" pitchFamily="34" charset="-120"/>
-              </a:rPr>
-              <a:t>by Flor Pérsico</a:t>
-            </a:r>
-            <a:pPr algn="r" indent="0" marL="0">
-              <a:buNone/>
-            </a:pPr>
-            <a:r>
-              <a:rPr lang="en-US" sz="1100" dirty="0">
-                <a:solidFill>
-                  <a:srgbClr val="8A6A55"/>
-                </a:solidFill>
-                <a:latin typeface="Open Sans" pitchFamily="34" charset="0"/>
-                <a:ea typeface="Open Sans" pitchFamily="34" charset="-122"/>
-                <a:cs typeface="Open Sans" pitchFamily="34" charset="-120"/>
-              </a:rPr>
-              <a:t>   ·   03 / 09</a:t>
-            </a:r>
-            <a:endParaRPr lang="en-US" sz="1100" dirty="0"/>
-          </a:p>
-        </p:txBody>
-      </p:sp>
-      <p:sp>
-        <p:nvSpPr>
-          <p:cNvPr id="5" name="Text 2"/>
-          <p:cNvSpPr txBox="1"/>
-          <p:nvPr/>
-        </p:nvSpPr>
-        <p:spPr>
-          <a:xfrm>
-            <a:off x="640080" y="1097280"/>
+            <a:off x="640080" y="1280160"/>
             <a:ext cx="3429000" cy="1783080"/>
           </a:xfrm>
           <a:prstGeom prst="rect">
@@ -3310,13 +3280,13 @@
       </p:sp>
       <p:sp>
         <p:nvSpPr>
-          <p:cNvPr id="6" name="Text 3"/>
+          <p:cNvPr id="6" name="Text 2"/>
           <p:cNvSpPr txBox="1"/>
           <p:nvPr/>
         </p:nvSpPr>
         <p:spPr>
           <a:xfrm>
-            <a:off x="640080" y="2414016"/>
+            <a:off x="640080" y="2596896"/>
             <a:ext cx="3291840" cy="731520"/>
           </a:xfrm>
           <a:prstGeom prst="rect">
@@ -3349,13 +3319,13 @@
       </p:sp>
       <p:sp>
         <p:nvSpPr>
-          <p:cNvPr id="7" name="Shape 4"/>
+          <p:cNvPr id="7" name="Shape 3"/>
           <p:cNvSpPr/>
           <p:nvPr/>
         </p:nvSpPr>
         <p:spPr>
           <a:xfrm>
-            <a:off x="4389120" y="1143000"/>
+            <a:off x="4389120" y="1280160"/>
             <a:ext cx="3442716" cy="2331720"/>
           </a:xfrm>
           <a:prstGeom prst="roundRect">
@@ -3383,13 +3353,13 @@
       </p:sp>
       <p:sp>
         <p:nvSpPr>
-          <p:cNvPr id="8" name="Shape 5"/>
+          <p:cNvPr id="8" name="Shape 4"/>
           <p:cNvSpPr/>
           <p:nvPr/>
         </p:nvSpPr>
         <p:spPr>
           <a:xfrm>
-            <a:off x="4709160" y="1435608"/>
+            <a:off x="4709160" y="1572768"/>
             <a:ext cx="640080" cy="640080"/>
           </a:xfrm>
           <a:prstGeom prst="ellipse">
@@ -3408,21 +3378,21 @@
       </p:sp>
       <p:pic>
         <p:nvPicPr>
-          <p:cNvPr id="9" name="Image 0" descr="preencoded.png">    </p:cNvPr>
+          <p:cNvPr id="9" name="Image 1" descr="preencoded.png">    </p:cNvPr>
           <p:cNvPicPr>
             <a:picLocks noChangeAspect="1"/>
           </p:cNvPicPr>
           <p:nvPr/>
         </p:nvPicPr>
         <p:blipFill>
-          <a:blip r:embed="rId1"/>
+          <a:blip r:embed="rId2"/>
           <a:stretch>
             <a:fillRect/>
           </a:stretch>
         </p:blipFill>
         <p:spPr>
           <a:xfrm>
-            <a:off x="4881982" y="1608430"/>
+            <a:off x="4881982" y="1745590"/>
             <a:ext cx="294437" cy="294437"/>
           </a:xfrm>
           <a:prstGeom prst="rect">
@@ -3432,13 +3402,13 @@
       </p:pic>
       <p:sp>
         <p:nvSpPr>
-          <p:cNvPr id="10" name="Text 6"/>
+          <p:cNvPr id="10" name="Text 5"/>
           <p:cNvSpPr txBox="1"/>
           <p:nvPr/>
         </p:nvSpPr>
         <p:spPr>
           <a:xfrm>
-            <a:off x="4709160" y="2148840"/>
+            <a:off x="4709160" y="2286000"/>
             <a:ext cx="2894076" cy="502920"/>
           </a:xfrm>
           <a:prstGeom prst="rect">
@@ -3471,13 +3441,13 @@
       </p:sp>
       <p:sp>
         <p:nvSpPr>
-          <p:cNvPr id="11" name="Text 7"/>
+          <p:cNvPr id="11" name="Text 6"/>
           <p:cNvSpPr txBox="1"/>
           <p:nvPr/>
         </p:nvSpPr>
         <p:spPr>
           <a:xfrm>
-            <a:off x="4709160" y="2697480"/>
+            <a:off x="4709160" y="2834640"/>
             <a:ext cx="2894076" cy="640080"/>
           </a:xfrm>
           <a:prstGeom prst="rect">
@@ -3510,13 +3480,13 @@
       </p:sp>
       <p:sp>
         <p:nvSpPr>
-          <p:cNvPr id="12" name="Shape 8"/>
+          <p:cNvPr id="12" name="Shape 7"/>
           <p:cNvSpPr/>
           <p:nvPr/>
         </p:nvSpPr>
         <p:spPr>
           <a:xfrm>
-            <a:off x="8106156" y="1143000"/>
+            <a:off x="8106156" y="1280160"/>
             <a:ext cx="3442716" cy="2331720"/>
           </a:xfrm>
           <a:prstGeom prst="roundRect">
@@ -3544,13 +3514,13 @@
       </p:sp>
       <p:sp>
         <p:nvSpPr>
-          <p:cNvPr id="13" name="Shape 9"/>
+          <p:cNvPr id="13" name="Shape 8"/>
           <p:cNvSpPr/>
           <p:nvPr/>
         </p:nvSpPr>
         <p:spPr>
           <a:xfrm>
-            <a:off x="8426196" y="1435608"/>
+            <a:off x="8426196" y="1572768"/>
             <a:ext cx="640080" cy="640080"/>
           </a:xfrm>
           <a:prstGeom prst="ellipse">
@@ -3569,21 +3539,21 @@
       </p:sp>
       <p:pic>
         <p:nvPicPr>
-          <p:cNvPr id="14" name="Image 1" descr="preencoded.png">    </p:cNvPr>
+          <p:cNvPr id="14" name="Image 2" descr="preencoded.png">    </p:cNvPr>
           <p:cNvPicPr>
             <a:picLocks noChangeAspect="1"/>
           </p:cNvPicPr>
           <p:nvPr/>
         </p:nvPicPr>
         <p:blipFill>
-          <a:blip r:embed="rId2"/>
+          <a:blip r:embed="rId3"/>
           <a:stretch>
             <a:fillRect/>
           </a:stretch>
         </p:blipFill>
         <p:spPr>
           <a:xfrm>
-            <a:off x="8599018" y="1608430"/>
+            <a:off x="8599018" y="1745590"/>
             <a:ext cx="294437" cy="294437"/>
           </a:xfrm>
           <a:prstGeom prst="rect">
@@ -3593,13 +3563,13 @@
       </p:pic>
       <p:sp>
         <p:nvSpPr>
-          <p:cNvPr id="15" name="Text 10"/>
+          <p:cNvPr id="15" name="Text 9"/>
           <p:cNvSpPr txBox="1"/>
           <p:nvPr/>
         </p:nvSpPr>
         <p:spPr>
           <a:xfrm>
-            <a:off x="8426196" y="2148840"/>
+            <a:off x="8426196" y="2286000"/>
             <a:ext cx="2894076" cy="502920"/>
           </a:xfrm>
           <a:prstGeom prst="rect">
@@ -3632,13 +3602,13 @@
       </p:sp>
       <p:sp>
         <p:nvSpPr>
-          <p:cNvPr id="16" name="Text 11"/>
+          <p:cNvPr id="16" name="Text 10"/>
           <p:cNvSpPr txBox="1"/>
           <p:nvPr/>
         </p:nvSpPr>
         <p:spPr>
           <a:xfrm>
-            <a:off x="8426196" y="2697480"/>
+            <a:off x="8426196" y="2834640"/>
             <a:ext cx="2894076" cy="640080"/>
           </a:xfrm>
           <a:prstGeom prst="rect">
@@ -3671,13 +3641,13 @@
       </p:sp>
       <p:sp>
         <p:nvSpPr>
-          <p:cNvPr id="17" name="Shape 12"/>
+          <p:cNvPr id="17" name="Shape 11"/>
           <p:cNvSpPr/>
           <p:nvPr/>
         </p:nvSpPr>
         <p:spPr>
           <a:xfrm>
-            <a:off x="4389120" y="3749040"/>
+            <a:off x="4389120" y="3886200"/>
             <a:ext cx="3442716" cy="2331720"/>
           </a:xfrm>
           <a:prstGeom prst="roundRect">
@@ -3705,13 +3675,13 @@
       </p:sp>
       <p:sp>
         <p:nvSpPr>
-          <p:cNvPr id="18" name="Shape 13"/>
+          <p:cNvPr id="18" name="Shape 12"/>
           <p:cNvSpPr/>
           <p:nvPr/>
         </p:nvSpPr>
         <p:spPr>
           <a:xfrm>
-            <a:off x="4709160" y="4041648"/>
+            <a:off x="4709160" y="4178808"/>
             <a:ext cx="640080" cy="640080"/>
           </a:xfrm>
           <a:prstGeom prst="ellipse">
@@ -3730,21 +3700,21 @@
       </p:sp>
       <p:pic>
         <p:nvPicPr>
-          <p:cNvPr id="19" name="Image 2" descr="preencoded.png">    </p:cNvPr>
+          <p:cNvPr id="19" name="Image 3" descr="preencoded.png">    </p:cNvPr>
           <p:cNvPicPr>
             <a:picLocks noChangeAspect="1"/>
           </p:cNvPicPr>
           <p:nvPr/>
         </p:nvPicPr>
         <p:blipFill>
-          <a:blip r:embed="rId3"/>
+          <a:blip r:embed="rId4"/>
           <a:stretch>
             <a:fillRect/>
           </a:stretch>
         </p:blipFill>
         <p:spPr>
           <a:xfrm>
-            <a:off x="4881982" y="4214470"/>
+            <a:off x="4881982" y="4351630"/>
             <a:ext cx="294437" cy="294437"/>
           </a:xfrm>
           <a:prstGeom prst="rect">
@@ -3754,13 +3724,13 @@
       </p:pic>
       <p:sp>
         <p:nvSpPr>
-          <p:cNvPr id="20" name="Text 14"/>
+          <p:cNvPr id="20" name="Text 13"/>
           <p:cNvSpPr txBox="1"/>
           <p:nvPr/>
         </p:nvSpPr>
         <p:spPr>
           <a:xfrm>
-            <a:off x="4709160" y="4754880"/>
+            <a:off x="4709160" y="4892040"/>
             <a:ext cx="2894076" cy="502920"/>
           </a:xfrm>
           <a:prstGeom prst="rect">
@@ -3793,13 +3763,13 @@
       </p:sp>
       <p:sp>
         <p:nvSpPr>
-          <p:cNvPr id="21" name="Text 15"/>
+          <p:cNvPr id="21" name="Text 14"/>
           <p:cNvSpPr txBox="1"/>
           <p:nvPr/>
         </p:nvSpPr>
         <p:spPr>
           <a:xfrm>
-            <a:off x="4709160" y="5303520"/>
+            <a:off x="4709160" y="5440680"/>
             <a:ext cx="2894076" cy="640080"/>
           </a:xfrm>
           <a:prstGeom prst="rect">
@@ -3832,13 +3802,13 @@
       </p:sp>
       <p:sp>
         <p:nvSpPr>
-          <p:cNvPr id="22" name="Shape 16"/>
+          <p:cNvPr id="22" name="Shape 15"/>
           <p:cNvSpPr/>
           <p:nvPr/>
         </p:nvSpPr>
         <p:spPr>
           <a:xfrm>
-            <a:off x="8106156" y="3749040"/>
+            <a:off x="8106156" y="3886200"/>
             <a:ext cx="3442716" cy="2331720"/>
           </a:xfrm>
           <a:prstGeom prst="roundRect">
@@ -3866,13 +3836,13 @@
       </p:sp>
       <p:sp>
         <p:nvSpPr>
-          <p:cNvPr id="23" name="Shape 17"/>
+          <p:cNvPr id="23" name="Shape 16"/>
           <p:cNvSpPr/>
           <p:nvPr/>
         </p:nvSpPr>
         <p:spPr>
           <a:xfrm>
-            <a:off x="8426196" y="4041648"/>
+            <a:off x="8426196" y="4178808"/>
             <a:ext cx="640080" cy="640080"/>
           </a:xfrm>
           <a:prstGeom prst="ellipse">
@@ -3891,21 +3861,21 @@
       </p:sp>
       <p:pic>
         <p:nvPicPr>
-          <p:cNvPr id="24" name="Image 3" descr="preencoded.png">    </p:cNvPr>
+          <p:cNvPr id="24" name="Image 4" descr="preencoded.png">    </p:cNvPr>
           <p:cNvPicPr>
             <a:picLocks noChangeAspect="1"/>
           </p:cNvPicPr>
           <p:nvPr/>
         </p:nvPicPr>
         <p:blipFill>
-          <a:blip r:embed="rId4"/>
+          <a:blip r:embed="rId5"/>
           <a:stretch>
             <a:fillRect/>
           </a:stretch>
         </p:blipFill>
         <p:spPr>
           <a:xfrm>
-            <a:off x="8599018" y="4214470"/>
+            <a:off x="8599018" y="4351630"/>
             <a:ext cx="294437" cy="294437"/>
           </a:xfrm>
           <a:prstGeom prst="rect">
@@ -3915,13 +3885,13 @@
       </p:pic>
       <p:sp>
         <p:nvSpPr>
-          <p:cNvPr id="25" name="Text 18"/>
+          <p:cNvPr id="25" name="Text 17"/>
           <p:cNvSpPr txBox="1"/>
           <p:nvPr/>
         </p:nvSpPr>
         <p:spPr>
           <a:xfrm>
-            <a:off x="8426196" y="4754880"/>
+            <a:off x="8426196" y="4892040"/>
             <a:ext cx="2894076" cy="502920"/>
           </a:xfrm>
           <a:prstGeom prst="rect">
@@ -3954,13 +3924,13 @@
       </p:sp>
       <p:sp>
         <p:nvSpPr>
-          <p:cNvPr id="26" name="Text 19"/>
+          <p:cNvPr id="26" name="Text 18"/>
           <p:cNvSpPr txBox="1"/>
           <p:nvPr/>
         </p:nvSpPr>
         <p:spPr>
           <a:xfrm>
-            <a:off x="8426196" y="5303520"/>
+            <a:off x="8426196" y="5440680"/>
             <a:ext cx="2894076" cy="640080"/>
           </a:xfrm>
           <a:prstGeom prst="rect">
@@ -4023,16 +3993,40 @@
           <a:chExt cx="0" cy="0"/>
         </a:xfrm>
       </p:grpSpPr>
-      <p:sp>
-        <p:nvSpPr>
-          <p:cNvPr id="3" name="Text 0"/>
+      <p:pic>
+        <p:nvPicPr>
+          <p:cNvPr id="3" name="Image 0" descr="Breaking Barriers at work">    </p:cNvPr>
+          <p:cNvPicPr>
+            <a:picLocks noChangeAspect="1"/>
+          </p:cNvPicPr>
+          <p:nvPr/>
+        </p:nvPicPr>
+        <p:blipFill>
+          <a:blip r:embed="rId1"/>
+          <a:stretch>
+            <a:fillRect/>
+          </a:stretch>
+        </p:blipFill>
+        <p:spPr>
+          <a:xfrm>
+            <a:off x="640080" y="274320"/>
+            <a:ext cx="1188720" cy="542536"/>
+          </a:xfrm>
+          <a:prstGeom prst="rect">
+            <a:avLst/>
+          </a:prstGeom>
+        </p:spPr>
+      </p:pic>
+      <p:sp>
+        <p:nvSpPr>
+          <p:cNvPr id="4" name="Text 0"/>
           <p:cNvSpPr txBox="1"/>
           <p:nvPr/>
         </p:nvSpPr>
         <p:spPr>
           <a:xfrm>
-            <a:off x="640080" y="384048"/>
-            <a:ext cx="4572000" cy="274320"/>
+            <a:off x="7891272" y="384048"/>
+            <a:ext cx="3657600" cy="274320"/>
           </a:xfrm>
           <a:prstGeom prst="rect">
             <a:avLst/>
@@ -4044,86 +4038,47 @@
           <a:bodyPr wrap="square" lIns="0" tIns="0" rIns="0" bIns="0" rtlCol="0" anchor="ctr"/>
           <a:lstStyle/>
           <a:p>
-            <a:pPr indent="0" marL="0">
-              <a:buNone/>
-            </a:pPr>
-            <a:r>
-              <a:rPr lang="en-US" sz="1050" b="1" spc="300" kern="0" dirty="0">
-                <a:solidFill>
-                  <a:srgbClr val="C68C6C"/>
+            <a:pPr algn="r" indent="0" marL="0">
+              <a:buNone/>
+            </a:pPr>
+            <a:r>
+              <a:rPr lang="en-US" sz="1100" i="1" dirty="0">
+                <a:solidFill>
+                  <a:srgbClr val="8A6A55"/>
+                </a:solidFill>
+                <a:latin typeface="Source Serif Pro" pitchFamily="34" charset="0"/>
+                <a:ea typeface="Source Serif Pro" pitchFamily="34" charset="-122"/>
+                <a:cs typeface="Source Serif Pro" pitchFamily="34" charset="-120"/>
+              </a:rPr>
+              <a:t>by Flor Pérsico</a:t>
+            </a:r>
+            <a:pPr algn="r" indent="0" marL="0">
+              <a:buNone/>
+            </a:pPr>
+            <a:r>
+              <a:rPr lang="en-US" sz="1100" dirty="0">
+                <a:solidFill>
+                  <a:srgbClr val="8A6A55"/>
                 </a:solidFill>
                 <a:latin typeface="Open Sans" pitchFamily="34" charset="0"/>
                 <a:ea typeface="Open Sans" pitchFamily="34" charset="-122"/>
                 <a:cs typeface="Open Sans" pitchFamily="34" charset="-120"/>
               </a:rPr>
-              <a:t>BREAKING BARRIERS · AT WORK</a:t>
-            </a:r>
-            <a:endParaRPr lang="en-US" sz="1050" dirty="0"/>
-          </a:p>
-        </p:txBody>
-      </p:sp>
-      <p:sp>
-        <p:nvSpPr>
-          <p:cNvPr id="4" name="Text 1"/>
+              <a:t>   ·   04 / 09</a:t>
+            </a:r>
+            <a:endParaRPr lang="en-US" sz="1100" dirty="0"/>
+          </a:p>
+        </p:txBody>
+      </p:sp>
+      <p:sp>
+        <p:nvSpPr>
+          <p:cNvPr id="5" name="Text 1"/>
           <p:cNvSpPr txBox="1"/>
           <p:nvPr/>
         </p:nvSpPr>
         <p:spPr>
           <a:xfrm>
-            <a:off x="7891272" y="384048"/>
-            <a:ext cx="3657600" cy="274320"/>
-          </a:xfrm>
-          <a:prstGeom prst="rect">
-            <a:avLst/>
-          </a:prstGeom>
-          <a:noFill/>
-          <a:ln/>
-        </p:spPr>
-        <p:txBody>
-          <a:bodyPr wrap="square" lIns="0" tIns="0" rIns="0" bIns="0" rtlCol="0" anchor="ctr"/>
-          <a:lstStyle/>
-          <a:p>
-            <a:pPr algn="r" indent="0" marL="0">
-              <a:buNone/>
-            </a:pPr>
-            <a:r>
-              <a:rPr lang="en-US" sz="1100" i="1" dirty="0">
-                <a:solidFill>
-                  <a:srgbClr val="8A6A55"/>
-                </a:solidFill>
-                <a:latin typeface="Source Serif Pro" pitchFamily="34" charset="0"/>
-                <a:ea typeface="Source Serif Pro" pitchFamily="34" charset="-122"/>
-                <a:cs typeface="Source Serif Pro" pitchFamily="34" charset="-120"/>
-              </a:rPr>
-              <a:t>by Flor Pérsico</a:t>
-            </a:r>
-            <a:pPr algn="r" indent="0" marL="0">
-              <a:buNone/>
-            </a:pPr>
-            <a:r>
-              <a:rPr lang="en-US" sz="1100" dirty="0">
-                <a:solidFill>
-                  <a:srgbClr val="8A6A55"/>
-                </a:solidFill>
-                <a:latin typeface="Open Sans" pitchFamily="34" charset="0"/>
-                <a:ea typeface="Open Sans" pitchFamily="34" charset="-122"/>
-                <a:cs typeface="Open Sans" pitchFamily="34" charset="-120"/>
-              </a:rPr>
-              <a:t>   ·   04 / 09</a:t>
-            </a:r>
-            <a:endParaRPr lang="en-US" sz="1100" dirty="0"/>
-          </a:p>
-        </p:txBody>
-      </p:sp>
-      <p:sp>
-        <p:nvSpPr>
-          <p:cNvPr id="5" name="Text 2"/>
-          <p:cNvSpPr txBox="1"/>
-          <p:nvPr/>
-        </p:nvSpPr>
-        <p:spPr>
-          <a:xfrm>
-            <a:off x="640080" y="1097280"/>
+            <a:off x="640080" y="1280160"/>
             <a:ext cx="3429000" cy="1783080"/>
           </a:xfrm>
           <a:prstGeom prst="rect">
@@ -4159,13 +4114,13 @@
       </p:sp>
       <p:sp>
         <p:nvSpPr>
-          <p:cNvPr id="6" name="Text 3"/>
+          <p:cNvPr id="6" name="Text 2"/>
           <p:cNvSpPr txBox="1"/>
           <p:nvPr/>
         </p:nvSpPr>
         <p:spPr>
           <a:xfrm>
-            <a:off x="640080" y="2414016"/>
+            <a:off x="640080" y="2596896"/>
             <a:ext cx="3291840" cy="731520"/>
           </a:xfrm>
           <a:prstGeom prst="rect">
@@ -4198,13 +4153,13 @@
       </p:sp>
       <p:sp>
         <p:nvSpPr>
-          <p:cNvPr id="7" name="Shape 4"/>
+          <p:cNvPr id="7" name="Shape 3"/>
           <p:cNvSpPr/>
           <p:nvPr/>
         </p:nvSpPr>
         <p:spPr>
           <a:xfrm>
-            <a:off x="4389120" y="1143000"/>
+            <a:off x="4389120" y="1280160"/>
             <a:ext cx="2203704" cy="4023360"/>
           </a:xfrm>
           <a:prstGeom prst="roundRect">
@@ -4232,13 +4187,13 @@
       </p:sp>
       <p:sp>
         <p:nvSpPr>
-          <p:cNvPr id="8" name="Shape 5"/>
+          <p:cNvPr id="8" name="Shape 4"/>
           <p:cNvSpPr/>
           <p:nvPr/>
         </p:nvSpPr>
         <p:spPr>
           <a:xfrm>
-            <a:off x="4389120" y="1143000"/>
+            <a:off x="4389120" y="1280160"/>
             <a:ext cx="2203704" cy="1600200"/>
           </a:xfrm>
           <a:prstGeom prst="roundRect">
@@ -4259,13 +4214,13 @@
       </p:sp>
       <p:sp>
         <p:nvSpPr>
-          <p:cNvPr id="9" name="Shape 6"/>
+          <p:cNvPr id="9" name="Shape 5"/>
           <p:cNvSpPr/>
           <p:nvPr/>
         </p:nvSpPr>
         <p:spPr>
           <a:xfrm>
-            <a:off x="4389120" y="2468880"/>
+            <a:off x="4389120" y="2606040"/>
             <a:ext cx="2203704" cy="274320"/>
           </a:xfrm>
           <a:prstGeom prst="rect">
@@ -4284,21 +4239,21 @@
       </p:sp>
       <p:pic>
         <p:nvPicPr>
-          <p:cNvPr id="10" name="Image 0" descr="preencoded.png">    </p:cNvPr>
+          <p:cNvPr id="10" name="Image 1" descr="preencoded.png">    </p:cNvPr>
           <p:cNvPicPr>
             <a:picLocks noChangeAspect="1"/>
           </p:cNvPicPr>
           <p:nvPr/>
         </p:nvPicPr>
         <p:blipFill>
-          <a:blip r:embed="rId1"/>
+          <a:blip r:embed="rId2"/>
           <a:stretch>
             <a:fillRect/>
           </a:stretch>
         </p:blipFill>
         <p:spPr>
           <a:xfrm>
-            <a:off x="4663440" y="1399032"/>
+            <a:off x="4663440" y="1536192"/>
             <a:ext cx="365760" cy="365760"/>
           </a:xfrm>
           <a:prstGeom prst="rect">
@@ -4308,13 +4263,13 @@
       </p:pic>
       <p:sp>
         <p:nvSpPr>
-          <p:cNvPr id="11" name="Text 7"/>
+          <p:cNvPr id="11" name="Text 6"/>
           <p:cNvSpPr txBox="1"/>
           <p:nvPr/>
         </p:nvSpPr>
         <p:spPr>
           <a:xfrm>
-            <a:off x="4663440" y="1828800"/>
+            <a:off x="4663440" y="1965960"/>
             <a:ext cx="1746504" cy="548640"/>
           </a:xfrm>
           <a:prstGeom prst="rect">
@@ -4350,13 +4305,13 @@
       </p:sp>
       <p:sp>
         <p:nvSpPr>
-          <p:cNvPr id="12" name="Text 8"/>
+          <p:cNvPr id="12" name="Text 7"/>
           <p:cNvSpPr txBox="1"/>
           <p:nvPr/>
         </p:nvSpPr>
         <p:spPr>
           <a:xfrm>
-            <a:off x="4663440" y="2377440"/>
+            <a:off x="4663440" y="2514600"/>
             <a:ext cx="1746504" cy="256032"/>
           </a:xfrm>
           <a:prstGeom prst="rect">
@@ -4389,13 +4344,13 @@
       </p:sp>
       <p:sp>
         <p:nvSpPr>
-          <p:cNvPr id="13" name="Text 9"/>
+          <p:cNvPr id="13" name="Text 8"/>
           <p:cNvSpPr txBox="1"/>
           <p:nvPr/>
         </p:nvSpPr>
         <p:spPr>
           <a:xfrm>
-            <a:off x="4617720" y="2971800"/>
+            <a:off x="4617720" y="3108960"/>
             <a:ext cx="1792224" cy="2057400"/>
           </a:xfrm>
           <a:prstGeom prst="rect">
@@ -4516,13 +4471,13 @@
       </p:sp>
       <p:sp>
         <p:nvSpPr>
-          <p:cNvPr id="14" name="Shape 10"/>
+          <p:cNvPr id="14" name="Shape 9"/>
           <p:cNvSpPr/>
           <p:nvPr/>
         </p:nvSpPr>
         <p:spPr>
           <a:xfrm>
-            <a:off x="6867144" y="1143000"/>
+            <a:off x="6867144" y="1280160"/>
             <a:ext cx="2203704" cy="4023360"/>
           </a:xfrm>
           <a:prstGeom prst="roundRect">
@@ -4550,13 +4505,13 @@
       </p:sp>
       <p:sp>
         <p:nvSpPr>
-          <p:cNvPr id="15" name="Shape 11"/>
+          <p:cNvPr id="15" name="Shape 10"/>
           <p:cNvSpPr/>
           <p:nvPr/>
         </p:nvSpPr>
         <p:spPr>
           <a:xfrm>
-            <a:off x="6867144" y="1143000"/>
+            <a:off x="6867144" y="1280160"/>
             <a:ext cx="2203704" cy="1600200"/>
           </a:xfrm>
           <a:prstGeom prst="roundRect">
@@ -4577,13 +4532,13 @@
       </p:sp>
       <p:sp>
         <p:nvSpPr>
-          <p:cNvPr id="16" name="Shape 12"/>
+          <p:cNvPr id="16" name="Shape 11"/>
           <p:cNvSpPr/>
           <p:nvPr/>
         </p:nvSpPr>
         <p:spPr>
           <a:xfrm>
-            <a:off x="6867144" y="2468880"/>
+            <a:off x="6867144" y="2606040"/>
             <a:ext cx="2203704" cy="274320"/>
           </a:xfrm>
           <a:prstGeom prst="rect">
@@ -4602,21 +4557,21 @@
       </p:sp>
       <p:pic>
         <p:nvPicPr>
-          <p:cNvPr id="17" name="Image 1" descr="preencoded.png">    </p:cNvPr>
+          <p:cNvPr id="17" name="Image 2" descr="preencoded.png">    </p:cNvPr>
           <p:cNvPicPr>
             <a:picLocks noChangeAspect="1"/>
           </p:cNvPicPr>
           <p:nvPr/>
         </p:nvPicPr>
         <p:blipFill>
-          <a:blip r:embed="rId2"/>
+          <a:blip r:embed="rId3"/>
           <a:stretch>
             <a:fillRect/>
           </a:stretch>
         </p:blipFill>
         <p:spPr>
           <a:xfrm>
-            <a:off x="7141464" y="1399032"/>
+            <a:off x="7141464" y="1536192"/>
             <a:ext cx="365760" cy="365760"/>
           </a:xfrm>
           <a:prstGeom prst="rect">
@@ -4626,13 +4581,13 @@
       </p:pic>
       <p:sp>
         <p:nvSpPr>
-          <p:cNvPr id="18" name="Text 13"/>
+          <p:cNvPr id="18" name="Text 12"/>
           <p:cNvSpPr txBox="1"/>
           <p:nvPr/>
         </p:nvSpPr>
         <p:spPr>
           <a:xfrm>
-            <a:off x="7141464" y="1828800"/>
+            <a:off x="7141464" y="1965960"/>
             <a:ext cx="1746504" cy="548640"/>
           </a:xfrm>
           <a:prstGeom prst="rect">
@@ -4668,13 +4623,13 @@
       </p:sp>
       <p:sp>
         <p:nvSpPr>
-          <p:cNvPr id="19" name="Text 14"/>
+          <p:cNvPr id="19" name="Text 13"/>
           <p:cNvSpPr txBox="1"/>
           <p:nvPr/>
         </p:nvSpPr>
         <p:spPr>
           <a:xfrm>
-            <a:off x="7141464" y="2377440"/>
+            <a:off x="7141464" y="2514600"/>
             <a:ext cx="1746504" cy="256032"/>
           </a:xfrm>
           <a:prstGeom prst="rect">
@@ -4707,13 +4662,13 @@
       </p:sp>
       <p:sp>
         <p:nvSpPr>
-          <p:cNvPr id="20" name="Text 15"/>
+          <p:cNvPr id="20" name="Text 14"/>
           <p:cNvSpPr txBox="1"/>
           <p:nvPr/>
         </p:nvSpPr>
         <p:spPr>
           <a:xfrm>
-            <a:off x="7095744" y="2971800"/>
+            <a:off x="7095744" y="3108960"/>
             <a:ext cx="1792224" cy="2057400"/>
           </a:xfrm>
           <a:prstGeom prst="rect">
@@ -4771,13 +4726,13 @@
       </p:sp>
       <p:sp>
         <p:nvSpPr>
-          <p:cNvPr id="21" name="Shape 16"/>
+          <p:cNvPr id="21" name="Shape 15"/>
           <p:cNvSpPr/>
           <p:nvPr/>
         </p:nvSpPr>
         <p:spPr>
           <a:xfrm>
-            <a:off x="9345168" y="1143000"/>
+            <a:off x="9345168" y="1280160"/>
             <a:ext cx="2203704" cy="4023360"/>
           </a:xfrm>
           <a:prstGeom prst="roundRect">
@@ -4805,13 +4760,13 @@
       </p:sp>
       <p:sp>
         <p:nvSpPr>
-          <p:cNvPr id="22" name="Shape 17"/>
+          <p:cNvPr id="22" name="Shape 16"/>
           <p:cNvSpPr/>
           <p:nvPr/>
         </p:nvSpPr>
         <p:spPr>
           <a:xfrm>
-            <a:off x="9345168" y="1143000"/>
+            <a:off x="9345168" y="1280160"/>
             <a:ext cx="2203704" cy="1600200"/>
           </a:xfrm>
           <a:prstGeom prst="roundRect">
@@ -4832,13 +4787,13 @@
       </p:sp>
       <p:sp>
         <p:nvSpPr>
-          <p:cNvPr id="23" name="Shape 18"/>
+          <p:cNvPr id="23" name="Shape 17"/>
           <p:cNvSpPr/>
           <p:nvPr/>
         </p:nvSpPr>
         <p:spPr>
           <a:xfrm>
-            <a:off x="9345168" y="2468880"/>
+            <a:off x="9345168" y="2606040"/>
             <a:ext cx="2203704" cy="274320"/>
           </a:xfrm>
           <a:prstGeom prst="rect">
@@ -4857,21 +4812,21 @@
       </p:sp>
       <p:pic>
         <p:nvPicPr>
-          <p:cNvPr id="24" name="Image 2" descr="preencoded.png">    </p:cNvPr>
+          <p:cNvPr id="24" name="Image 3" descr="preencoded.png">    </p:cNvPr>
           <p:cNvPicPr>
             <a:picLocks noChangeAspect="1"/>
           </p:cNvPicPr>
           <p:nvPr/>
         </p:nvPicPr>
         <p:blipFill>
-          <a:blip r:embed="rId3"/>
+          <a:blip r:embed="rId4"/>
           <a:stretch>
             <a:fillRect/>
           </a:stretch>
         </p:blipFill>
         <p:spPr>
           <a:xfrm>
-            <a:off x="9619488" y="1399032"/>
+            <a:off x="9619488" y="1536192"/>
             <a:ext cx="365760" cy="365760"/>
           </a:xfrm>
           <a:prstGeom prst="rect">
@@ -4881,13 +4836,13 @@
       </p:pic>
       <p:sp>
         <p:nvSpPr>
-          <p:cNvPr id="25" name="Text 19"/>
+          <p:cNvPr id="25" name="Text 18"/>
           <p:cNvSpPr txBox="1"/>
           <p:nvPr/>
         </p:nvSpPr>
         <p:spPr>
           <a:xfrm>
-            <a:off x="9619488" y="1828800"/>
+            <a:off x="9619488" y="1965960"/>
             <a:ext cx="1746504" cy="548640"/>
           </a:xfrm>
           <a:prstGeom prst="rect">
@@ -4923,13 +4878,13 @@
       </p:sp>
       <p:sp>
         <p:nvSpPr>
-          <p:cNvPr id="26" name="Text 20"/>
+          <p:cNvPr id="26" name="Text 19"/>
           <p:cNvSpPr txBox="1"/>
           <p:nvPr/>
         </p:nvSpPr>
         <p:spPr>
           <a:xfrm>
-            <a:off x="9619488" y="2377440"/>
+            <a:off x="9619488" y="2514600"/>
             <a:ext cx="1746504" cy="256032"/>
           </a:xfrm>
           <a:prstGeom prst="rect">
@@ -4962,13 +4917,13 @@
       </p:sp>
       <p:sp>
         <p:nvSpPr>
-          <p:cNvPr id="27" name="Text 21"/>
+          <p:cNvPr id="27" name="Text 20"/>
           <p:cNvSpPr txBox="1"/>
           <p:nvPr/>
         </p:nvSpPr>
         <p:spPr>
           <a:xfrm>
-            <a:off x="9573768" y="2971800"/>
+            <a:off x="9573768" y="3108960"/>
             <a:ext cx="1792224" cy="2057400"/>
           </a:xfrm>
           <a:prstGeom prst="rect">
@@ -5035,16 +4990,40 @@
           <a:chExt cx="0" cy="0"/>
         </a:xfrm>
       </p:grpSpPr>
-      <p:sp>
-        <p:nvSpPr>
-          <p:cNvPr id="3" name="Text 0"/>
+      <p:pic>
+        <p:nvPicPr>
+          <p:cNvPr id="3" name="Image 0" descr="Breaking Barriers at work">    </p:cNvPr>
+          <p:cNvPicPr>
+            <a:picLocks noChangeAspect="1"/>
+          </p:cNvPicPr>
+          <p:nvPr/>
+        </p:nvPicPr>
+        <p:blipFill>
+          <a:blip r:embed="rId1"/>
+          <a:stretch>
+            <a:fillRect/>
+          </a:stretch>
+        </p:blipFill>
+        <p:spPr>
+          <a:xfrm>
+            <a:off x="640080" y="274320"/>
+            <a:ext cx="1188720" cy="542536"/>
+          </a:xfrm>
+          <a:prstGeom prst="rect">
+            <a:avLst/>
+          </a:prstGeom>
+        </p:spPr>
+      </p:pic>
+      <p:sp>
+        <p:nvSpPr>
+          <p:cNvPr id="4" name="Text 0"/>
           <p:cNvSpPr txBox="1"/>
           <p:nvPr/>
         </p:nvSpPr>
         <p:spPr>
           <a:xfrm>
-            <a:off x="640080" y="384048"/>
-            <a:ext cx="4572000" cy="274320"/>
+            <a:off x="7891272" y="384048"/>
+            <a:ext cx="3657600" cy="274320"/>
           </a:xfrm>
           <a:prstGeom prst="rect">
             <a:avLst/>
@@ -5056,86 +5035,47 @@
           <a:bodyPr wrap="square" lIns="0" tIns="0" rIns="0" bIns="0" rtlCol="0" anchor="ctr"/>
           <a:lstStyle/>
           <a:p>
-            <a:pPr indent="0" marL="0">
-              <a:buNone/>
-            </a:pPr>
-            <a:r>
-              <a:rPr lang="en-US" sz="1050" b="1" spc="300" kern="0" dirty="0">
-                <a:solidFill>
-                  <a:srgbClr val="C68C6C"/>
+            <a:pPr algn="r" indent="0" marL="0">
+              <a:buNone/>
+            </a:pPr>
+            <a:r>
+              <a:rPr lang="en-US" sz="1100" i="1" dirty="0">
+                <a:solidFill>
+                  <a:srgbClr val="8A6A55"/>
+                </a:solidFill>
+                <a:latin typeface="Source Serif Pro" pitchFamily="34" charset="0"/>
+                <a:ea typeface="Source Serif Pro" pitchFamily="34" charset="-122"/>
+                <a:cs typeface="Source Serif Pro" pitchFamily="34" charset="-120"/>
+              </a:rPr>
+              <a:t>by Flor Pérsico</a:t>
+            </a:r>
+            <a:pPr algn="r" indent="0" marL="0">
+              <a:buNone/>
+            </a:pPr>
+            <a:r>
+              <a:rPr lang="en-US" sz="1100" dirty="0">
+                <a:solidFill>
+                  <a:srgbClr val="8A6A55"/>
                 </a:solidFill>
                 <a:latin typeface="Open Sans" pitchFamily="34" charset="0"/>
                 <a:ea typeface="Open Sans" pitchFamily="34" charset="-122"/>
                 <a:cs typeface="Open Sans" pitchFamily="34" charset="-120"/>
               </a:rPr>
-              <a:t>BREAKING BARRIERS · AT WORK</a:t>
-            </a:r>
-            <a:endParaRPr lang="en-US" sz="1050" dirty="0"/>
-          </a:p>
-        </p:txBody>
-      </p:sp>
-      <p:sp>
-        <p:nvSpPr>
-          <p:cNvPr id="4" name="Text 1"/>
+              <a:t>   ·   05 / 09</a:t>
+            </a:r>
+            <a:endParaRPr lang="en-US" sz="1100" dirty="0"/>
+          </a:p>
+        </p:txBody>
+      </p:sp>
+      <p:sp>
+        <p:nvSpPr>
+          <p:cNvPr id="5" name="Text 1"/>
           <p:cNvSpPr txBox="1"/>
           <p:nvPr/>
         </p:nvSpPr>
         <p:spPr>
           <a:xfrm>
-            <a:off x="7891272" y="384048"/>
-            <a:ext cx="3657600" cy="274320"/>
-          </a:xfrm>
-          <a:prstGeom prst="rect">
-            <a:avLst/>
-          </a:prstGeom>
-          <a:noFill/>
-          <a:ln/>
-        </p:spPr>
-        <p:txBody>
-          <a:bodyPr wrap="square" lIns="0" tIns="0" rIns="0" bIns="0" rtlCol="0" anchor="ctr"/>
-          <a:lstStyle/>
-          <a:p>
-            <a:pPr algn="r" indent="0" marL="0">
-              <a:buNone/>
-            </a:pPr>
-            <a:r>
-              <a:rPr lang="en-US" sz="1100" i="1" dirty="0">
-                <a:solidFill>
-                  <a:srgbClr val="8A6A55"/>
-                </a:solidFill>
-                <a:latin typeface="Source Serif Pro" pitchFamily="34" charset="0"/>
-                <a:ea typeface="Source Serif Pro" pitchFamily="34" charset="-122"/>
-                <a:cs typeface="Source Serif Pro" pitchFamily="34" charset="-120"/>
-              </a:rPr>
-              <a:t>by Flor Pérsico</a:t>
-            </a:r>
-            <a:pPr algn="r" indent="0" marL="0">
-              <a:buNone/>
-            </a:pPr>
-            <a:r>
-              <a:rPr lang="en-US" sz="1100" dirty="0">
-                <a:solidFill>
-                  <a:srgbClr val="8A6A55"/>
-                </a:solidFill>
-                <a:latin typeface="Open Sans" pitchFamily="34" charset="0"/>
-                <a:ea typeface="Open Sans" pitchFamily="34" charset="-122"/>
-                <a:cs typeface="Open Sans" pitchFamily="34" charset="-120"/>
-              </a:rPr>
-              <a:t>   ·   05 / 09</a:t>
-            </a:r>
-            <a:endParaRPr lang="en-US" sz="1100" dirty="0"/>
-          </a:p>
-        </p:txBody>
-      </p:sp>
-      <p:sp>
-        <p:nvSpPr>
-          <p:cNvPr id="5" name="Text 2"/>
-          <p:cNvSpPr txBox="1"/>
-          <p:nvPr/>
-        </p:nvSpPr>
-        <p:spPr>
-          <a:xfrm>
-            <a:off x="640080" y="1097280"/>
+            <a:off x="640080" y="1280160"/>
             <a:ext cx="3429000" cy="1783080"/>
           </a:xfrm>
           <a:prstGeom prst="rect">
@@ -5171,13 +5111,13 @@
       </p:sp>
       <p:sp>
         <p:nvSpPr>
-          <p:cNvPr id="6" name="Text 3"/>
+          <p:cNvPr id="6" name="Text 2"/>
           <p:cNvSpPr txBox="1"/>
           <p:nvPr/>
         </p:nvSpPr>
         <p:spPr>
           <a:xfrm>
-            <a:off x="640080" y="2414016"/>
+            <a:off x="640080" y="2596896"/>
             <a:ext cx="3291840" cy="731520"/>
           </a:xfrm>
           <a:prstGeom prst="rect">
@@ -5210,13 +5150,13 @@
       </p:sp>
       <p:sp>
         <p:nvSpPr>
-          <p:cNvPr id="7" name="Shape 4"/>
+          <p:cNvPr id="7" name="Shape 3"/>
           <p:cNvSpPr/>
           <p:nvPr/>
         </p:nvSpPr>
         <p:spPr>
           <a:xfrm>
-            <a:off x="4389120" y="1143000"/>
+            <a:off x="4389120" y="1280160"/>
             <a:ext cx="7159752" cy="2651760"/>
           </a:xfrm>
           <a:prstGeom prst="roundRect">
@@ -5244,13 +5184,13 @@
       </p:sp>
       <p:sp>
         <p:nvSpPr>
-          <p:cNvPr id="8" name="Text 5"/>
+          <p:cNvPr id="8" name="Text 4"/>
           <p:cNvSpPr txBox="1"/>
           <p:nvPr/>
         </p:nvSpPr>
         <p:spPr>
           <a:xfrm>
-            <a:off x="4846320" y="1508760"/>
+            <a:off x="4846320" y="1645920"/>
             <a:ext cx="6245352" cy="320040"/>
           </a:xfrm>
           <a:prstGeom prst="rect">
@@ -5283,13 +5223,13 @@
       </p:sp>
       <p:sp>
         <p:nvSpPr>
-          <p:cNvPr id="9" name="Text 6"/>
+          <p:cNvPr id="9" name="Text 5"/>
           <p:cNvSpPr txBox="1"/>
           <p:nvPr/>
         </p:nvSpPr>
         <p:spPr>
           <a:xfrm>
-            <a:off x="4846320" y="1920240"/>
+            <a:off x="4846320" y="2057400"/>
             <a:ext cx="6245352" cy="1097280"/>
           </a:xfrm>
           <a:prstGeom prst="rect">
@@ -5336,13 +5276,13 @@
       </p:sp>
       <p:sp>
         <p:nvSpPr>
-          <p:cNvPr id="10" name="Text 7"/>
+          <p:cNvPr id="10" name="Text 6"/>
           <p:cNvSpPr txBox="1"/>
           <p:nvPr/>
         </p:nvSpPr>
         <p:spPr>
           <a:xfrm>
-            <a:off x="4846320" y="3063240"/>
+            <a:off x="4846320" y="3200400"/>
             <a:ext cx="6245352" cy="365760"/>
           </a:xfrm>
           <a:prstGeom prst="rect">
@@ -5375,13 +5315,13 @@
       </p:sp>
       <p:sp>
         <p:nvSpPr>
-          <p:cNvPr id="11" name="Shape 8"/>
+          <p:cNvPr id="11" name="Shape 7"/>
           <p:cNvSpPr/>
           <p:nvPr/>
         </p:nvSpPr>
         <p:spPr>
           <a:xfrm>
-            <a:off x="4389120" y="4069080"/>
+            <a:off x="4389120" y="4206240"/>
             <a:ext cx="7159752" cy="1417320"/>
           </a:xfrm>
           <a:prstGeom prst="roundRect">
@@ -5409,13 +5349,13 @@
       </p:sp>
       <p:sp>
         <p:nvSpPr>
-          <p:cNvPr id="12" name="Shape 9"/>
+          <p:cNvPr id="12" name="Shape 8"/>
           <p:cNvSpPr/>
           <p:nvPr/>
         </p:nvSpPr>
         <p:spPr>
           <a:xfrm>
-            <a:off x="4754880" y="4389120"/>
+            <a:off x="4754880" y="4526280"/>
             <a:ext cx="777240" cy="777240"/>
           </a:xfrm>
           <a:prstGeom prst="ellipse">
@@ -5434,21 +5374,21 @@
       </p:sp>
       <p:pic>
         <p:nvPicPr>
-          <p:cNvPr id="13" name="Image 0" descr="preencoded.png">    </p:cNvPr>
+          <p:cNvPr id="13" name="Image 1" descr="preencoded.png">    </p:cNvPr>
           <p:cNvPicPr>
             <a:picLocks noChangeAspect="1"/>
           </p:cNvPicPr>
           <p:nvPr/>
         </p:nvPicPr>
         <p:blipFill>
-          <a:blip r:embed="rId1"/>
+          <a:blip r:embed="rId2"/>
           <a:stretch>
             <a:fillRect/>
           </a:stretch>
         </p:blipFill>
         <p:spPr>
           <a:xfrm>
-            <a:off x="4964735" y="4598975"/>
+            <a:off x="4964735" y="4736135"/>
             <a:ext cx="357530" cy="357530"/>
           </a:xfrm>
           <a:prstGeom prst="rect">
@@ -5458,13 +5398,13 @@
       </p:pic>
       <p:sp>
         <p:nvSpPr>
-          <p:cNvPr id="14" name="Text 10"/>
+          <p:cNvPr id="14" name="Text 9"/>
           <p:cNvSpPr txBox="1"/>
           <p:nvPr/>
         </p:nvSpPr>
         <p:spPr>
           <a:xfrm>
-            <a:off x="5806440" y="4069080"/>
+            <a:off x="5806440" y="4206240"/>
             <a:ext cx="5422392" cy="1417320"/>
           </a:xfrm>
           <a:prstGeom prst="rect">
@@ -5520,13 +5460,13 @@
       </p:sp>
       <p:sp>
         <p:nvSpPr>
-          <p:cNvPr id="15" name="Text 11"/>
+          <p:cNvPr id="15" name="Text 10"/>
           <p:cNvSpPr txBox="1"/>
           <p:nvPr/>
         </p:nvSpPr>
         <p:spPr>
           <a:xfrm>
-            <a:off x="4389120" y="5669280"/>
+            <a:off x="4389120" y="5806440"/>
             <a:ext cx="7159752" cy="411480"/>
           </a:xfrm>
           <a:prstGeom prst="rect">
@@ -5589,16 +5529,40 @@
           <a:chExt cx="0" cy="0"/>
         </a:xfrm>
       </p:grpSpPr>
-      <p:sp>
-        <p:nvSpPr>
-          <p:cNvPr id="3" name="Text 0"/>
+      <p:pic>
+        <p:nvPicPr>
+          <p:cNvPr id="3" name="Image 0" descr="Breaking Barriers at work">    </p:cNvPr>
+          <p:cNvPicPr>
+            <a:picLocks noChangeAspect="1"/>
+          </p:cNvPicPr>
+          <p:nvPr/>
+        </p:nvPicPr>
+        <p:blipFill>
+          <a:blip r:embed="rId1"/>
+          <a:stretch>
+            <a:fillRect/>
+          </a:stretch>
+        </p:blipFill>
+        <p:spPr>
+          <a:xfrm>
+            <a:off x="640080" y="274320"/>
+            <a:ext cx="1188720" cy="542536"/>
+          </a:xfrm>
+          <a:prstGeom prst="rect">
+            <a:avLst/>
+          </a:prstGeom>
+        </p:spPr>
+      </p:pic>
+      <p:sp>
+        <p:nvSpPr>
+          <p:cNvPr id="4" name="Text 0"/>
           <p:cNvSpPr txBox="1"/>
           <p:nvPr/>
         </p:nvSpPr>
         <p:spPr>
           <a:xfrm>
-            <a:off x="640080" y="384048"/>
-            <a:ext cx="4572000" cy="274320"/>
+            <a:off x="7891272" y="384048"/>
+            <a:ext cx="3657600" cy="274320"/>
           </a:xfrm>
           <a:prstGeom prst="rect">
             <a:avLst/>
@@ -5610,86 +5574,47 @@
           <a:bodyPr wrap="square" lIns="0" tIns="0" rIns="0" bIns="0" rtlCol="0" anchor="ctr"/>
           <a:lstStyle/>
           <a:p>
-            <a:pPr indent="0" marL="0">
-              <a:buNone/>
-            </a:pPr>
-            <a:r>
-              <a:rPr lang="en-US" sz="1050" b="1" spc="300" kern="0" dirty="0">
-                <a:solidFill>
-                  <a:srgbClr val="C68C6C"/>
+            <a:pPr algn="r" indent="0" marL="0">
+              <a:buNone/>
+            </a:pPr>
+            <a:r>
+              <a:rPr lang="en-US" sz="1100" i="1" dirty="0">
+                <a:solidFill>
+                  <a:srgbClr val="8A6A55"/>
+                </a:solidFill>
+                <a:latin typeface="Source Serif Pro" pitchFamily="34" charset="0"/>
+                <a:ea typeface="Source Serif Pro" pitchFamily="34" charset="-122"/>
+                <a:cs typeface="Source Serif Pro" pitchFamily="34" charset="-120"/>
+              </a:rPr>
+              <a:t>by Flor Pérsico</a:t>
+            </a:r>
+            <a:pPr algn="r" indent="0" marL="0">
+              <a:buNone/>
+            </a:pPr>
+            <a:r>
+              <a:rPr lang="en-US" sz="1100" dirty="0">
+                <a:solidFill>
+                  <a:srgbClr val="8A6A55"/>
                 </a:solidFill>
                 <a:latin typeface="Open Sans" pitchFamily="34" charset="0"/>
                 <a:ea typeface="Open Sans" pitchFamily="34" charset="-122"/>
                 <a:cs typeface="Open Sans" pitchFamily="34" charset="-120"/>
               </a:rPr>
-              <a:t>BREAKING BARRIERS · AT WORK</a:t>
-            </a:r>
-            <a:endParaRPr lang="en-US" sz="1050" dirty="0"/>
-          </a:p>
-        </p:txBody>
-      </p:sp>
-      <p:sp>
-        <p:nvSpPr>
-          <p:cNvPr id="4" name="Text 1"/>
+              <a:t>   ·   06 / 09</a:t>
+            </a:r>
+            <a:endParaRPr lang="en-US" sz="1100" dirty="0"/>
+          </a:p>
+        </p:txBody>
+      </p:sp>
+      <p:sp>
+        <p:nvSpPr>
+          <p:cNvPr id="5" name="Text 1"/>
           <p:cNvSpPr txBox="1"/>
           <p:nvPr/>
         </p:nvSpPr>
         <p:spPr>
           <a:xfrm>
-            <a:off x="7891272" y="384048"/>
-            <a:ext cx="3657600" cy="274320"/>
-          </a:xfrm>
-          <a:prstGeom prst="rect">
-            <a:avLst/>
-          </a:prstGeom>
-          <a:noFill/>
-          <a:ln/>
-        </p:spPr>
-        <p:txBody>
-          <a:bodyPr wrap="square" lIns="0" tIns="0" rIns="0" bIns="0" rtlCol="0" anchor="ctr"/>
-          <a:lstStyle/>
-          <a:p>
-            <a:pPr algn="r" indent="0" marL="0">
-              <a:buNone/>
-            </a:pPr>
-            <a:r>
-              <a:rPr lang="en-US" sz="1100" i="1" dirty="0">
-                <a:solidFill>
-                  <a:srgbClr val="8A6A55"/>
-                </a:solidFill>
-                <a:latin typeface="Source Serif Pro" pitchFamily="34" charset="0"/>
-                <a:ea typeface="Source Serif Pro" pitchFamily="34" charset="-122"/>
-                <a:cs typeface="Source Serif Pro" pitchFamily="34" charset="-120"/>
-              </a:rPr>
-              <a:t>by Flor Pérsico</a:t>
-            </a:r>
-            <a:pPr algn="r" indent="0" marL="0">
-              <a:buNone/>
-            </a:pPr>
-            <a:r>
-              <a:rPr lang="en-US" sz="1100" dirty="0">
-                <a:solidFill>
-                  <a:srgbClr val="8A6A55"/>
-                </a:solidFill>
-                <a:latin typeface="Open Sans" pitchFamily="34" charset="0"/>
-                <a:ea typeface="Open Sans" pitchFamily="34" charset="-122"/>
-                <a:cs typeface="Open Sans" pitchFamily="34" charset="-120"/>
-              </a:rPr>
-              <a:t>   ·   06 / 09</a:t>
-            </a:r>
-            <a:endParaRPr lang="en-US" sz="1100" dirty="0"/>
-          </a:p>
-        </p:txBody>
-      </p:sp>
-      <p:sp>
-        <p:nvSpPr>
-          <p:cNvPr id="5" name="Text 2"/>
-          <p:cNvSpPr txBox="1"/>
-          <p:nvPr/>
-        </p:nvSpPr>
-        <p:spPr>
-          <a:xfrm>
-            <a:off x="640080" y="1097280"/>
+            <a:off x="640080" y="1280160"/>
             <a:ext cx="3429000" cy="1783080"/>
           </a:xfrm>
           <a:prstGeom prst="rect">
@@ -5725,13 +5650,13 @@
       </p:sp>
       <p:sp>
         <p:nvSpPr>
-          <p:cNvPr id="6" name="Text 3"/>
+          <p:cNvPr id="6" name="Text 2"/>
           <p:cNvSpPr txBox="1"/>
           <p:nvPr/>
         </p:nvSpPr>
         <p:spPr>
           <a:xfrm>
-            <a:off x="640080" y="2414016"/>
+            <a:off x="640080" y="2596896"/>
             <a:ext cx="3291840" cy="731520"/>
           </a:xfrm>
           <a:prstGeom prst="rect">
@@ -5764,13 +5689,13 @@
       </p:sp>
       <p:sp>
         <p:nvSpPr>
-          <p:cNvPr id="7" name="Shape 4"/>
+          <p:cNvPr id="7" name="Shape 3"/>
           <p:cNvSpPr/>
           <p:nvPr/>
         </p:nvSpPr>
         <p:spPr>
           <a:xfrm>
-            <a:off x="4389120" y="1143000"/>
+            <a:off x="4389120" y="1280160"/>
             <a:ext cx="1618488" cy="2606040"/>
           </a:xfrm>
           <a:prstGeom prst="roundRect">
@@ -5798,13 +5723,13 @@
       </p:sp>
       <p:sp>
         <p:nvSpPr>
-          <p:cNvPr id="8" name="Shape 5"/>
+          <p:cNvPr id="8" name="Shape 4"/>
           <p:cNvSpPr/>
           <p:nvPr/>
         </p:nvSpPr>
         <p:spPr>
           <a:xfrm>
-            <a:off x="4786884" y="1463040"/>
+            <a:off x="4786884" y="1600200"/>
             <a:ext cx="822960" cy="822960"/>
           </a:xfrm>
           <a:prstGeom prst="ellipse">
@@ -5823,21 +5748,21 @@
       </p:sp>
       <p:pic>
         <p:nvPicPr>
-          <p:cNvPr id="9" name="Image 0" descr="preencoded.png">    </p:cNvPr>
+          <p:cNvPr id="9" name="Image 1" descr="preencoded.png">    </p:cNvPr>
           <p:cNvPicPr>
             <a:picLocks noChangeAspect="1"/>
           </p:cNvPicPr>
           <p:nvPr/>
         </p:nvPicPr>
         <p:blipFill>
-          <a:blip r:embed="rId1"/>
+          <a:blip r:embed="rId2"/>
           <a:stretch>
             <a:fillRect/>
           </a:stretch>
         </p:blipFill>
         <p:spPr>
           <a:xfrm>
-            <a:off x="5009083" y="1685239"/>
+            <a:off x="5009083" y="1822399"/>
             <a:ext cx="378562" cy="378562"/>
           </a:xfrm>
           <a:prstGeom prst="rect">
@@ -5847,13 +5772,13 @@
       </p:pic>
       <p:sp>
         <p:nvSpPr>
-          <p:cNvPr id="10" name="Text 6"/>
+          <p:cNvPr id="10" name="Text 5"/>
           <p:cNvSpPr txBox="1"/>
           <p:nvPr/>
         </p:nvSpPr>
         <p:spPr>
           <a:xfrm>
-            <a:off x="4526280" y="2423160"/>
+            <a:off x="4526280" y="2560320"/>
             <a:ext cx="1344168" cy="1143000"/>
           </a:xfrm>
           <a:prstGeom prst="rect">
@@ -5886,13 +5811,13 @@
       </p:sp>
       <p:sp>
         <p:nvSpPr>
-          <p:cNvPr id="11" name="Shape 7"/>
+          <p:cNvPr id="11" name="Shape 6"/>
           <p:cNvSpPr/>
           <p:nvPr/>
         </p:nvSpPr>
         <p:spPr>
           <a:xfrm>
-            <a:off x="6236208" y="1143000"/>
+            <a:off x="6236208" y="1280160"/>
             <a:ext cx="1618488" cy="2606040"/>
           </a:xfrm>
           <a:prstGeom prst="roundRect">
@@ -5920,13 +5845,13 @@
       </p:sp>
       <p:sp>
         <p:nvSpPr>
-          <p:cNvPr id="12" name="Shape 8"/>
+          <p:cNvPr id="12" name="Shape 7"/>
           <p:cNvSpPr/>
           <p:nvPr/>
         </p:nvSpPr>
         <p:spPr>
           <a:xfrm>
-            <a:off x="6633972" y="1463040"/>
+            <a:off x="6633972" y="1600200"/>
             <a:ext cx="822960" cy="822960"/>
           </a:xfrm>
           <a:prstGeom prst="ellipse">
@@ -5945,21 +5870,21 @@
       </p:sp>
       <p:pic>
         <p:nvPicPr>
-          <p:cNvPr id="13" name="Image 1" descr="preencoded.png">    </p:cNvPr>
+          <p:cNvPr id="13" name="Image 2" descr="preencoded.png">    </p:cNvPr>
           <p:cNvPicPr>
             <a:picLocks noChangeAspect="1"/>
           </p:cNvPicPr>
           <p:nvPr/>
         </p:nvPicPr>
         <p:blipFill>
-          <a:blip r:embed="rId2"/>
+          <a:blip r:embed="rId3"/>
           <a:stretch>
             <a:fillRect/>
           </a:stretch>
         </p:blipFill>
         <p:spPr>
           <a:xfrm>
-            <a:off x="6856171" y="1685239"/>
+            <a:off x="6856171" y="1822399"/>
             <a:ext cx="378562" cy="378562"/>
           </a:xfrm>
           <a:prstGeom prst="rect">
@@ -5969,13 +5894,13 @@
       </p:pic>
       <p:sp>
         <p:nvSpPr>
-          <p:cNvPr id="14" name="Text 9"/>
+          <p:cNvPr id="14" name="Text 8"/>
           <p:cNvSpPr txBox="1"/>
           <p:nvPr/>
         </p:nvSpPr>
         <p:spPr>
           <a:xfrm>
-            <a:off x="6373368" y="2423160"/>
+            <a:off x="6373368" y="2560320"/>
             <a:ext cx="1344168" cy="1143000"/>
           </a:xfrm>
           <a:prstGeom prst="rect">
@@ -6008,13 +5933,13 @@
       </p:sp>
       <p:sp>
         <p:nvSpPr>
-          <p:cNvPr id="15" name="Shape 10"/>
+          <p:cNvPr id="15" name="Shape 9"/>
           <p:cNvSpPr/>
           <p:nvPr/>
         </p:nvSpPr>
         <p:spPr>
           <a:xfrm>
-            <a:off x="8083296" y="1143000"/>
+            <a:off x="8083296" y="1280160"/>
             <a:ext cx="1618488" cy="2606040"/>
           </a:xfrm>
           <a:prstGeom prst="roundRect">
@@ -6042,13 +5967,13 @@
       </p:sp>
       <p:sp>
         <p:nvSpPr>
-          <p:cNvPr id="16" name="Shape 11"/>
+          <p:cNvPr id="16" name="Shape 10"/>
           <p:cNvSpPr/>
           <p:nvPr/>
         </p:nvSpPr>
         <p:spPr>
           <a:xfrm>
-            <a:off x="8481060" y="1463040"/>
+            <a:off x="8481060" y="1600200"/>
             <a:ext cx="822960" cy="822960"/>
           </a:xfrm>
           <a:prstGeom prst="ellipse">
@@ -6067,21 +5992,21 @@
       </p:sp>
       <p:pic>
         <p:nvPicPr>
-          <p:cNvPr id="17" name="Image 2" descr="preencoded.png">    </p:cNvPr>
+          <p:cNvPr id="17" name="Image 3" descr="preencoded.png">    </p:cNvPr>
           <p:cNvPicPr>
             <a:picLocks noChangeAspect="1"/>
           </p:cNvPicPr>
           <p:nvPr/>
         </p:nvPicPr>
         <p:blipFill>
-          <a:blip r:embed="rId3"/>
+          <a:blip r:embed="rId4"/>
           <a:stretch>
             <a:fillRect/>
           </a:stretch>
         </p:blipFill>
         <p:spPr>
           <a:xfrm>
-            <a:off x="8703259" y="1685239"/>
+            <a:off x="8703259" y="1822399"/>
             <a:ext cx="378562" cy="378562"/>
           </a:xfrm>
           <a:prstGeom prst="rect">
@@ -6091,13 +6016,13 @@
       </p:pic>
       <p:sp>
         <p:nvSpPr>
-          <p:cNvPr id="18" name="Text 12"/>
+          <p:cNvPr id="18" name="Text 11"/>
           <p:cNvSpPr txBox="1"/>
           <p:nvPr/>
         </p:nvSpPr>
         <p:spPr>
           <a:xfrm>
-            <a:off x="8220456" y="2423160"/>
+            <a:off x="8220456" y="2560320"/>
             <a:ext cx="1344168" cy="1143000"/>
           </a:xfrm>
           <a:prstGeom prst="rect">
@@ -6130,13 +6055,13 @@
       </p:sp>
       <p:sp>
         <p:nvSpPr>
-          <p:cNvPr id="19" name="Shape 13"/>
+          <p:cNvPr id="19" name="Shape 12"/>
           <p:cNvSpPr/>
           <p:nvPr/>
         </p:nvSpPr>
         <p:spPr>
           <a:xfrm>
-            <a:off x="9930384" y="1143000"/>
+            <a:off x="9930384" y="1280160"/>
             <a:ext cx="1618488" cy="2606040"/>
           </a:xfrm>
           <a:prstGeom prst="roundRect">
@@ -6164,13 +6089,13 @@
       </p:sp>
       <p:sp>
         <p:nvSpPr>
-          <p:cNvPr id="20" name="Shape 14"/>
+          <p:cNvPr id="20" name="Shape 13"/>
           <p:cNvSpPr/>
           <p:nvPr/>
         </p:nvSpPr>
         <p:spPr>
           <a:xfrm>
-            <a:off x="10328148" y="1463040"/>
+            <a:off x="10328148" y="1600200"/>
             <a:ext cx="822960" cy="822960"/>
           </a:xfrm>
           <a:prstGeom prst="ellipse">
@@ -6189,21 +6114,21 @@
       </p:sp>
       <p:pic>
         <p:nvPicPr>
-          <p:cNvPr id="21" name="Image 3" descr="preencoded.png">    </p:cNvPr>
+          <p:cNvPr id="21" name="Image 4" descr="preencoded.png">    </p:cNvPr>
           <p:cNvPicPr>
             <a:picLocks noChangeAspect="1"/>
           </p:cNvPicPr>
           <p:nvPr/>
         </p:nvPicPr>
         <p:blipFill>
-          <a:blip r:embed="rId4"/>
+          <a:blip r:embed="rId5"/>
           <a:stretch>
             <a:fillRect/>
           </a:stretch>
         </p:blipFill>
         <p:spPr>
           <a:xfrm>
-            <a:off x="10550347" y="1685239"/>
+            <a:off x="10550347" y="1822399"/>
             <a:ext cx="378562" cy="378562"/>
           </a:xfrm>
           <a:prstGeom prst="rect">
@@ -6213,13 +6138,13 @@
       </p:pic>
       <p:sp>
         <p:nvSpPr>
-          <p:cNvPr id="22" name="Text 15"/>
+          <p:cNvPr id="22" name="Text 14"/>
           <p:cNvSpPr txBox="1"/>
           <p:nvPr/>
         </p:nvSpPr>
         <p:spPr>
           <a:xfrm>
-            <a:off x="10067544" y="2423160"/>
+            <a:off x="10067544" y="2560320"/>
             <a:ext cx="1344168" cy="1143000"/>
           </a:xfrm>
           <a:prstGeom prst="rect">
@@ -6252,13 +6177,13 @@
       </p:sp>
       <p:sp>
         <p:nvSpPr>
-          <p:cNvPr id="23" name="Shape 16"/>
+          <p:cNvPr id="23" name="Shape 15"/>
           <p:cNvSpPr/>
           <p:nvPr/>
         </p:nvSpPr>
         <p:spPr>
           <a:xfrm>
-            <a:off x="4389120" y="4069080"/>
+            <a:off x="4389120" y="4206240"/>
             <a:ext cx="7159752" cy="1965960"/>
           </a:xfrm>
           <a:prstGeom prst="roundRect">
@@ -6286,13 +6211,13 @@
       </p:sp>
       <p:sp>
         <p:nvSpPr>
-          <p:cNvPr id="24" name="Shape 17"/>
+          <p:cNvPr id="24" name="Shape 16"/>
           <p:cNvSpPr/>
           <p:nvPr/>
         </p:nvSpPr>
         <p:spPr>
           <a:xfrm>
-            <a:off x="4754880" y="4663440"/>
+            <a:off x="4754880" y="4800600"/>
             <a:ext cx="777240" cy="777240"/>
           </a:xfrm>
           <a:prstGeom prst="ellipse">
@@ -6311,21 +6236,21 @@
       </p:sp>
       <p:pic>
         <p:nvPicPr>
-          <p:cNvPr id="25" name="Image 4" descr="preencoded.png">    </p:cNvPr>
+          <p:cNvPr id="25" name="Image 5" descr="preencoded.png">    </p:cNvPr>
           <p:cNvPicPr>
             <a:picLocks noChangeAspect="1"/>
           </p:cNvPicPr>
           <p:nvPr/>
         </p:nvPicPr>
         <p:blipFill>
-          <a:blip r:embed="rId5"/>
+          <a:blip r:embed="rId6"/>
           <a:stretch>
             <a:fillRect/>
           </a:stretch>
         </p:blipFill>
         <p:spPr>
           <a:xfrm>
-            <a:off x="4964735" y="4873295"/>
+            <a:off x="4964735" y="5010455"/>
             <a:ext cx="357530" cy="357530"/>
           </a:xfrm>
           <a:prstGeom prst="rect">
@@ -6335,13 +6260,13 @@
       </p:pic>
       <p:sp>
         <p:nvSpPr>
-          <p:cNvPr id="26" name="Text 18"/>
+          <p:cNvPr id="26" name="Text 17"/>
           <p:cNvSpPr txBox="1"/>
           <p:nvPr/>
         </p:nvSpPr>
         <p:spPr>
           <a:xfrm>
-            <a:off x="5806440" y="4069080"/>
+            <a:off x="5806440" y="4206240"/>
             <a:ext cx="5422392" cy="1965960"/>
           </a:xfrm>
           <a:prstGeom prst="rect">
@@ -6427,16 +6352,40 @@
           <a:chExt cx="0" cy="0"/>
         </a:xfrm>
       </p:grpSpPr>
-      <p:sp>
-        <p:nvSpPr>
-          <p:cNvPr id="3" name="Text 0"/>
+      <p:pic>
+        <p:nvPicPr>
+          <p:cNvPr id="3" name="Image 0" descr="Breaking Barriers at work">    </p:cNvPr>
+          <p:cNvPicPr>
+            <a:picLocks noChangeAspect="1"/>
+          </p:cNvPicPr>
+          <p:nvPr/>
+        </p:nvPicPr>
+        <p:blipFill>
+          <a:blip r:embed="rId1"/>
+          <a:stretch>
+            <a:fillRect/>
+          </a:stretch>
+        </p:blipFill>
+        <p:spPr>
+          <a:xfrm>
+            <a:off x="640080" y="274320"/>
+            <a:ext cx="1188720" cy="542536"/>
+          </a:xfrm>
+          <a:prstGeom prst="rect">
+            <a:avLst/>
+          </a:prstGeom>
+        </p:spPr>
+      </p:pic>
+      <p:sp>
+        <p:nvSpPr>
+          <p:cNvPr id="4" name="Text 0"/>
           <p:cNvSpPr txBox="1"/>
           <p:nvPr/>
         </p:nvSpPr>
         <p:spPr>
           <a:xfrm>
-            <a:off x="640080" y="384048"/>
-            <a:ext cx="4572000" cy="274320"/>
+            <a:off x="7891272" y="384048"/>
+            <a:ext cx="3657600" cy="274320"/>
           </a:xfrm>
           <a:prstGeom prst="rect">
             <a:avLst/>
@@ -6448,86 +6397,47 @@
           <a:bodyPr wrap="square" lIns="0" tIns="0" rIns="0" bIns="0" rtlCol="0" anchor="ctr"/>
           <a:lstStyle/>
           <a:p>
-            <a:pPr indent="0" marL="0">
-              <a:buNone/>
-            </a:pPr>
-            <a:r>
-              <a:rPr lang="en-US" sz="1050" b="1" spc="300" kern="0" dirty="0">
-                <a:solidFill>
-                  <a:srgbClr val="C68C6C"/>
+            <a:pPr algn="r" indent="0" marL="0">
+              <a:buNone/>
+            </a:pPr>
+            <a:r>
+              <a:rPr lang="en-US" sz="1100" i="1" dirty="0">
+                <a:solidFill>
+                  <a:srgbClr val="8A6A55"/>
+                </a:solidFill>
+                <a:latin typeface="Source Serif Pro" pitchFamily="34" charset="0"/>
+                <a:ea typeface="Source Serif Pro" pitchFamily="34" charset="-122"/>
+                <a:cs typeface="Source Serif Pro" pitchFamily="34" charset="-120"/>
+              </a:rPr>
+              <a:t>by Flor Pérsico</a:t>
+            </a:r>
+            <a:pPr algn="r" indent="0" marL="0">
+              <a:buNone/>
+            </a:pPr>
+            <a:r>
+              <a:rPr lang="en-US" sz="1100" dirty="0">
+                <a:solidFill>
+                  <a:srgbClr val="8A6A55"/>
                 </a:solidFill>
                 <a:latin typeface="Open Sans" pitchFamily="34" charset="0"/>
                 <a:ea typeface="Open Sans" pitchFamily="34" charset="-122"/>
                 <a:cs typeface="Open Sans" pitchFamily="34" charset="-120"/>
               </a:rPr>
-              <a:t>BREAKING BARRIERS · AT WORK</a:t>
-            </a:r>
-            <a:endParaRPr lang="en-US" sz="1050" dirty="0"/>
-          </a:p>
-        </p:txBody>
-      </p:sp>
-      <p:sp>
-        <p:nvSpPr>
-          <p:cNvPr id="4" name="Text 1"/>
+              <a:t>   ·   07 / 09</a:t>
+            </a:r>
+            <a:endParaRPr lang="en-US" sz="1100" dirty="0"/>
+          </a:p>
+        </p:txBody>
+      </p:sp>
+      <p:sp>
+        <p:nvSpPr>
+          <p:cNvPr id="5" name="Text 1"/>
           <p:cNvSpPr txBox="1"/>
           <p:nvPr/>
         </p:nvSpPr>
         <p:spPr>
           <a:xfrm>
-            <a:off x="7891272" y="384048"/>
-            <a:ext cx="3657600" cy="274320"/>
-          </a:xfrm>
-          <a:prstGeom prst="rect">
-            <a:avLst/>
-          </a:prstGeom>
-          <a:noFill/>
-          <a:ln/>
-        </p:spPr>
-        <p:txBody>
-          <a:bodyPr wrap="square" lIns="0" tIns="0" rIns="0" bIns="0" rtlCol="0" anchor="ctr"/>
-          <a:lstStyle/>
-          <a:p>
-            <a:pPr algn="r" indent="0" marL="0">
-              <a:buNone/>
-            </a:pPr>
-            <a:r>
-              <a:rPr lang="en-US" sz="1100" i="1" dirty="0">
-                <a:solidFill>
-                  <a:srgbClr val="8A6A55"/>
-                </a:solidFill>
-                <a:latin typeface="Source Serif Pro" pitchFamily="34" charset="0"/>
-                <a:ea typeface="Source Serif Pro" pitchFamily="34" charset="-122"/>
-                <a:cs typeface="Source Serif Pro" pitchFamily="34" charset="-120"/>
-              </a:rPr>
-              <a:t>by Flor Pérsico</a:t>
-            </a:r>
-            <a:pPr algn="r" indent="0" marL="0">
-              <a:buNone/>
-            </a:pPr>
-            <a:r>
-              <a:rPr lang="en-US" sz="1100" dirty="0">
-                <a:solidFill>
-                  <a:srgbClr val="8A6A55"/>
-                </a:solidFill>
-                <a:latin typeface="Open Sans" pitchFamily="34" charset="0"/>
-                <a:ea typeface="Open Sans" pitchFamily="34" charset="-122"/>
-                <a:cs typeface="Open Sans" pitchFamily="34" charset="-120"/>
-              </a:rPr>
-              <a:t>   ·   07 / 09</a:t>
-            </a:r>
-            <a:endParaRPr lang="en-US" sz="1100" dirty="0"/>
-          </a:p>
-        </p:txBody>
-      </p:sp>
-      <p:sp>
-        <p:nvSpPr>
-          <p:cNvPr id="5" name="Text 2"/>
-          <p:cNvSpPr txBox="1"/>
-          <p:nvPr/>
-        </p:nvSpPr>
-        <p:spPr>
-          <a:xfrm>
-            <a:off x="640080" y="1097280"/>
+            <a:off x="640080" y="1280160"/>
             <a:ext cx="3429000" cy="1783080"/>
           </a:xfrm>
           <a:prstGeom prst="rect">
@@ -6563,13 +6473,13 @@
       </p:sp>
       <p:sp>
         <p:nvSpPr>
-          <p:cNvPr id="6" name="Text 3"/>
+          <p:cNvPr id="6" name="Text 2"/>
           <p:cNvSpPr txBox="1"/>
           <p:nvPr/>
         </p:nvSpPr>
         <p:spPr>
           <a:xfrm>
-            <a:off x="640080" y="2414016"/>
+            <a:off x="640080" y="2596896"/>
             <a:ext cx="3291840" cy="731520"/>
           </a:xfrm>
           <a:prstGeom prst="rect">
@@ -6602,13 +6512,13 @@
       </p:sp>
       <p:sp>
         <p:nvSpPr>
-          <p:cNvPr id="7" name="Text 4"/>
+          <p:cNvPr id="7" name="Text 3"/>
           <p:cNvSpPr txBox="1"/>
           <p:nvPr/>
         </p:nvSpPr>
         <p:spPr>
           <a:xfrm>
-            <a:off x="4389120" y="1143000"/>
+            <a:off x="4389120" y="1280160"/>
             <a:ext cx="7159752" cy="320040"/>
           </a:xfrm>
           <a:prstGeom prst="rect">
@@ -6641,13 +6551,13 @@
       </p:sp>
       <p:sp>
         <p:nvSpPr>
-          <p:cNvPr id="8" name="Shape 5"/>
+          <p:cNvPr id="8" name="Shape 4"/>
           <p:cNvSpPr/>
           <p:nvPr/>
         </p:nvSpPr>
         <p:spPr>
           <a:xfrm>
-            <a:off x="4389120" y="1600200"/>
+            <a:off x="4389120" y="1737360"/>
             <a:ext cx="3465576" cy="777240"/>
           </a:xfrm>
           <a:prstGeom prst="roundRect">
@@ -6675,13 +6585,13 @@
       </p:sp>
       <p:sp>
         <p:nvSpPr>
-          <p:cNvPr id="9" name="Shape 6"/>
+          <p:cNvPr id="9" name="Shape 5"/>
           <p:cNvSpPr/>
           <p:nvPr/>
         </p:nvSpPr>
         <p:spPr>
           <a:xfrm>
-            <a:off x="4590288" y="1723644"/>
+            <a:off x="4590288" y="1860804"/>
             <a:ext cx="530352" cy="530352"/>
           </a:xfrm>
           <a:prstGeom prst="ellipse">
@@ -6700,21 +6610,21 @@
       </p:sp>
       <p:pic>
         <p:nvPicPr>
-          <p:cNvPr id="10" name="Image 0" descr="preencoded.png">    </p:cNvPr>
+          <p:cNvPr id="10" name="Image 1" descr="preencoded.png">    </p:cNvPr>
           <p:cNvPicPr>
             <a:picLocks noChangeAspect="1"/>
           </p:cNvPicPr>
           <p:nvPr/>
         </p:nvPicPr>
         <p:blipFill>
-          <a:blip r:embed="rId1"/>
+          <a:blip r:embed="rId2"/>
           <a:stretch>
             <a:fillRect/>
           </a:stretch>
         </p:blipFill>
         <p:spPr>
           <a:xfrm>
-            <a:off x="4733483" y="1866839"/>
+            <a:off x="4733483" y="2003999"/>
             <a:ext cx="243962" cy="243962"/>
           </a:xfrm>
           <a:prstGeom prst="rect">
@@ -6724,13 +6634,13 @@
       </p:pic>
       <p:sp>
         <p:nvSpPr>
-          <p:cNvPr id="11" name="Text 7"/>
+          <p:cNvPr id="11" name="Text 6"/>
           <p:cNvSpPr txBox="1"/>
           <p:nvPr/>
         </p:nvSpPr>
         <p:spPr>
           <a:xfrm>
-            <a:off x="5285232" y="1600200"/>
+            <a:off x="5285232" y="1737360"/>
             <a:ext cx="2414016" cy="777240"/>
           </a:xfrm>
           <a:prstGeom prst="rect">
@@ -6763,13 +6673,13 @@
       </p:sp>
       <p:sp>
         <p:nvSpPr>
-          <p:cNvPr id="12" name="Shape 8"/>
+          <p:cNvPr id="12" name="Shape 7"/>
           <p:cNvSpPr/>
           <p:nvPr/>
         </p:nvSpPr>
         <p:spPr>
           <a:xfrm>
-            <a:off x="8083296" y="1600200"/>
+            <a:off x="8083296" y="1737360"/>
             <a:ext cx="3465576" cy="777240"/>
           </a:xfrm>
           <a:prstGeom prst="roundRect">
@@ -6797,13 +6707,13 @@
       </p:sp>
       <p:sp>
         <p:nvSpPr>
-          <p:cNvPr id="13" name="Shape 9"/>
+          <p:cNvPr id="13" name="Shape 8"/>
           <p:cNvSpPr/>
           <p:nvPr/>
         </p:nvSpPr>
         <p:spPr>
           <a:xfrm>
-            <a:off x="8284464" y="1723644"/>
+            <a:off x="8284464" y="1860804"/>
             <a:ext cx="530352" cy="530352"/>
           </a:xfrm>
           <a:prstGeom prst="ellipse">
@@ -6822,21 +6732,21 @@
       </p:sp>
       <p:pic>
         <p:nvPicPr>
-          <p:cNvPr id="14" name="Image 1" descr="preencoded.png">    </p:cNvPr>
+          <p:cNvPr id="14" name="Image 2" descr="preencoded.png">    </p:cNvPr>
           <p:cNvPicPr>
             <a:picLocks noChangeAspect="1"/>
           </p:cNvPicPr>
           <p:nvPr/>
         </p:nvPicPr>
         <p:blipFill>
-          <a:blip r:embed="rId2"/>
+          <a:blip r:embed="rId3"/>
           <a:stretch>
             <a:fillRect/>
           </a:stretch>
         </p:blipFill>
         <p:spPr>
           <a:xfrm>
-            <a:off x="8427659" y="1866839"/>
+            <a:off x="8427659" y="2003999"/>
             <a:ext cx="243962" cy="243962"/>
           </a:xfrm>
           <a:prstGeom prst="rect">
@@ -6846,13 +6756,13 @@
       </p:pic>
       <p:sp>
         <p:nvSpPr>
-          <p:cNvPr id="15" name="Text 10"/>
+          <p:cNvPr id="15" name="Text 9"/>
           <p:cNvSpPr txBox="1"/>
           <p:nvPr/>
         </p:nvSpPr>
         <p:spPr>
           <a:xfrm>
-            <a:off x="8979408" y="1600200"/>
+            <a:off x="8979408" y="1737360"/>
             <a:ext cx="2414016" cy="777240"/>
           </a:xfrm>
           <a:prstGeom prst="rect">
@@ -6885,13 +6795,13 @@
       </p:sp>
       <p:sp>
         <p:nvSpPr>
-          <p:cNvPr id="16" name="Shape 11"/>
+          <p:cNvPr id="16" name="Shape 10"/>
           <p:cNvSpPr/>
           <p:nvPr/>
         </p:nvSpPr>
         <p:spPr>
           <a:xfrm>
-            <a:off x="4389120" y="2560320"/>
+            <a:off x="4389120" y="2697480"/>
             <a:ext cx="3465576" cy="777240"/>
           </a:xfrm>
           <a:prstGeom prst="roundRect">
@@ -6919,13 +6829,13 @@
       </p:sp>
       <p:sp>
         <p:nvSpPr>
-          <p:cNvPr id="17" name="Shape 12"/>
+          <p:cNvPr id="17" name="Shape 11"/>
           <p:cNvSpPr/>
           <p:nvPr/>
         </p:nvSpPr>
         <p:spPr>
           <a:xfrm>
-            <a:off x="4590288" y="2683764"/>
+            <a:off x="4590288" y="2820924"/>
             <a:ext cx="530352" cy="530352"/>
           </a:xfrm>
           <a:prstGeom prst="ellipse">
@@ -6944,21 +6854,21 @@
       </p:sp>
       <p:pic>
         <p:nvPicPr>
-          <p:cNvPr id="18" name="Image 2" descr="preencoded.png">    </p:cNvPr>
+          <p:cNvPr id="18" name="Image 3" descr="preencoded.png">    </p:cNvPr>
           <p:cNvPicPr>
             <a:picLocks noChangeAspect="1"/>
           </p:cNvPicPr>
           <p:nvPr/>
         </p:nvPicPr>
         <p:blipFill>
-          <a:blip r:embed="rId3"/>
+          <a:blip r:embed="rId4"/>
           <a:stretch>
             <a:fillRect/>
           </a:stretch>
         </p:blipFill>
         <p:spPr>
           <a:xfrm>
-            <a:off x="4733483" y="2826959"/>
+            <a:off x="4733483" y="2964119"/>
             <a:ext cx="243962" cy="243962"/>
           </a:xfrm>
           <a:prstGeom prst="rect">
@@ -6968,13 +6878,13 @@
       </p:pic>
       <p:sp>
         <p:nvSpPr>
-          <p:cNvPr id="19" name="Text 13"/>
+          <p:cNvPr id="19" name="Text 12"/>
           <p:cNvSpPr txBox="1"/>
           <p:nvPr/>
         </p:nvSpPr>
         <p:spPr>
           <a:xfrm>
-            <a:off x="5285232" y="2560320"/>
+            <a:off x="5285232" y="2697480"/>
             <a:ext cx="2414016" cy="777240"/>
           </a:xfrm>
           <a:prstGeom prst="rect">
@@ -7007,13 +6917,13 @@
       </p:sp>
       <p:sp>
         <p:nvSpPr>
-          <p:cNvPr id="20" name="Shape 14"/>
+          <p:cNvPr id="20" name="Shape 13"/>
           <p:cNvSpPr/>
           <p:nvPr/>
         </p:nvSpPr>
         <p:spPr>
           <a:xfrm>
-            <a:off x="8083296" y="2560320"/>
+            <a:off x="8083296" y="2697480"/>
             <a:ext cx="3465576" cy="777240"/>
           </a:xfrm>
           <a:prstGeom prst="roundRect">
@@ -7041,13 +6951,13 @@
       </p:sp>
       <p:sp>
         <p:nvSpPr>
-          <p:cNvPr id="21" name="Shape 15"/>
+          <p:cNvPr id="21" name="Shape 14"/>
           <p:cNvSpPr/>
           <p:nvPr/>
         </p:nvSpPr>
         <p:spPr>
           <a:xfrm>
-            <a:off x="8284464" y="2683764"/>
+            <a:off x="8284464" y="2820924"/>
             <a:ext cx="530352" cy="530352"/>
           </a:xfrm>
           <a:prstGeom prst="ellipse">
@@ -7066,21 +6976,21 @@
       </p:sp>
       <p:pic>
         <p:nvPicPr>
-          <p:cNvPr id="22" name="Image 3" descr="preencoded.png">    </p:cNvPr>
+          <p:cNvPr id="22" name="Image 4" descr="preencoded.png">    </p:cNvPr>
           <p:cNvPicPr>
             <a:picLocks noChangeAspect="1"/>
           </p:cNvPicPr>
           <p:nvPr/>
         </p:nvPicPr>
         <p:blipFill>
-          <a:blip r:embed="rId4"/>
+          <a:blip r:embed="rId5"/>
           <a:stretch>
             <a:fillRect/>
           </a:stretch>
         </p:blipFill>
         <p:spPr>
           <a:xfrm>
-            <a:off x="8427659" y="2826959"/>
+            <a:off x="8427659" y="2964119"/>
             <a:ext cx="243962" cy="243962"/>
           </a:xfrm>
           <a:prstGeom prst="rect">
@@ -7090,13 +7000,13 @@
       </p:pic>
       <p:sp>
         <p:nvSpPr>
-          <p:cNvPr id="23" name="Text 16"/>
+          <p:cNvPr id="23" name="Text 15"/>
           <p:cNvSpPr txBox="1"/>
           <p:nvPr/>
         </p:nvSpPr>
         <p:spPr>
           <a:xfrm>
-            <a:off x="8979408" y="2560320"/>
+            <a:off x="8979408" y="2697480"/>
             <a:ext cx="2414016" cy="777240"/>
           </a:xfrm>
           <a:prstGeom prst="rect">
@@ -7129,13 +7039,13 @@
       </p:sp>
       <p:sp>
         <p:nvSpPr>
-          <p:cNvPr id="24" name="Shape 17"/>
+          <p:cNvPr id="24" name="Shape 16"/>
           <p:cNvSpPr/>
           <p:nvPr/>
         </p:nvSpPr>
         <p:spPr>
           <a:xfrm>
-            <a:off x="4389120" y="3520440"/>
+            <a:off x="4389120" y="3657600"/>
             <a:ext cx="3465576" cy="777240"/>
           </a:xfrm>
           <a:prstGeom prst="roundRect">
@@ -7163,13 +7073,13 @@
       </p:sp>
       <p:sp>
         <p:nvSpPr>
-          <p:cNvPr id="25" name="Shape 18"/>
+          <p:cNvPr id="25" name="Shape 17"/>
           <p:cNvSpPr/>
           <p:nvPr/>
         </p:nvSpPr>
         <p:spPr>
           <a:xfrm>
-            <a:off x="4590288" y="3643884"/>
+            <a:off x="4590288" y="3781044"/>
             <a:ext cx="530352" cy="530352"/>
           </a:xfrm>
           <a:prstGeom prst="ellipse">
@@ -7188,21 +7098,21 @@
       </p:sp>
       <p:pic>
         <p:nvPicPr>
-          <p:cNvPr id="26" name="Image 4" descr="preencoded.png">    </p:cNvPr>
+          <p:cNvPr id="26" name="Image 5" descr="preencoded.png">    </p:cNvPr>
           <p:cNvPicPr>
             <a:picLocks noChangeAspect="1"/>
           </p:cNvPicPr>
           <p:nvPr/>
         </p:nvPicPr>
         <p:blipFill>
-          <a:blip r:embed="rId5"/>
+          <a:blip r:embed="rId6"/>
           <a:stretch>
             <a:fillRect/>
           </a:stretch>
         </p:blipFill>
         <p:spPr>
           <a:xfrm>
-            <a:off x="4733483" y="3787079"/>
+            <a:off x="4733483" y="3924239"/>
             <a:ext cx="243962" cy="243962"/>
           </a:xfrm>
           <a:prstGeom prst="rect">
@@ -7212,13 +7122,13 @@
       </p:pic>
       <p:sp>
         <p:nvSpPr>
-          <p:cNvPr id="27" name="Text 19"/>
+          <p:cNvPr id="27" name="Text 18"/>
           <p:cNvSpPr txBox="1"/>
           <p:nvPr/>
         </p:nvSpPr>
         <p:spPr>
           <a:xfrm>
-            <a:off x="5285232" y="3520440"/>
+            <a:off x="5285232" y="3657600"/>
             <a:ext cx="2414016" cy="777240"/>
           </a:xfrm>
           <a:prstGeom prst="rect">
@@ -7251,13 +7161,13 @@
       </p:sp>
       <p:sp>
         <p:nvSpPr>
-          <p:cNvPr id="28" name="Shape 20"/>
+          <p:cNvPr id="28" name="Shape 19"/>
           <p:cNvSpPr/>
           <p:nvPr/>
         </p:nvSpPr>
         <p:spPr>
           <a:xfrm>
-            <a:off x="8083296" y="3520440"/>
+            <a:off x="8083296" y="3657600"/>
             <a:ext cx="3465576" cy="777240"/>
           </a:xfrm>
           <a:prstGeom prst="roundRect">
@@ -7285,13 +7195,13 @@
       </p:sp>
       <p:sp>
         <p:nvSpPr>
-          <p:cNvPr id="29" name="Shape 21"/>
+          <p:cNvPr id="29" name="Shape 20"/>
           <p:cNvSpPr/>
           <p:nvPr/>
         </p:nvSpPr>
         <p:spPr>
           <a:xfrm>
-            <a:off x="8284464" y="3643884"/>
+            <a:off x="8284464" y="3781044"/>
             <a:ext cx="530352" cy="530352"/>
           </a:xfrm>
           <a:prstGeom prst="ellipse">
@@ -7310,21 +7220,21 @@
       </p:sp>
       <p:pic>
         <p:nvPicPr>
-          <p:cNvPr id="30" name="Image 5" descr="preencoded.png">    </p:cNvPr>
+          <p:cNvPr id="30" name="Image 6" descr="preencoded.png">    </p:cNvPr>
           <p:cNvPicPr>
             <a:picLocks noChangeAspect="1"/>
           </p:cNvPicPr>
           <p:nvPr/>
         </p:nvPicPr>
         <p:blipFill>
-          <a:blip r:embed="rId6"/>
+          <a:blip r:embed="rId7"/>
           <a:stretch>
             <a:fillRect/>
           </a:stretch>
         </p:blipFill>
         <p:spPr>
           <a:xfrm>
-            <a:off x="8427659" y="3787079"/>
+            <a:off x="8427659" y="3924239"/>
             <a:ext cx="243962" cy="243962"/>
           </a:xfrm>
           <a:prstGeom prst="rect">
@@ -7334,13 +7244,13 @@
       </p:pic>
       <p:sp>
         <p:nvSpPr>
-          <p:cNvPr id="31" name="Text 22"/>
+          <p:cNvPr id="31" name="Text 21"/>
           <p:cNvSpPr txBox="1"/>
           <p:nvPr/>
         </p:nvSpPr>
         <p:spPr>
           <a:xfrm>
-            <a:off x="8979408" y="3520440"/>
+            <a:off x="8979408" y="3657600"/>
             <a:ext cx="2414016" cy="777240"/>
           </a:xfrm>
           <a:prstGeom prst="rect">
@@ -7373,13 +7283,13 @@
       </p:sp>
       <p:sp>
         <p:nvSpPr>
-          <p:cNvPr id="32" name="Shape 23"/>
+          <p:cNvPr id="32" name="Shape 22"/>
           <p:cNvSpPr/>
           <p:nvPr/>
         </p:nvSpPr>
         <p:spPr>
           <a:xfrm>
-            <a:off x="4389120" y="4526280"/>
+            <a:off x="4389120" y="4663440"/>
             <a:ext cx="7159752" cy="1600200"/>
           </a:xfrm>
           <a:prstGeom prst="roundRect">
@@ -7407,13 +7317,13 @@
       </p:sp>
       <p:sp>
         <p:nvSpPr>
-          <p:cNvPr id="33" name="Shape 24"/>
+          <p:cNvPr id="33" name="Shape 23"/>
           <p:cNvSpPr/>
           <p:nvPr/>
         </p:nvSpPr>
         <p:spPr>
           <a:xfrm>
-            <a:off x="4754880" y="4937760"/>
+            <a:off x="4754880" y="5074920"/>
             <a:ext cx="777240" cy="777240"/>
           </a:xfrm>
           <a:prstGeom prst="ellipse">
@@ -7432,21 +7342,21 @@
       </p:sp>
       <p:pic>
         <p:nvPicPr>
-          <p:cNvPr id="34" name="Image 6" descr="preencoded.png">    </p:cNvPr>
+          <p:cNvPr id="34" name="Image 7" descr="preencoded.png">    </p:cNvPr>
           <p:cNvPicPr>
             <a:picLocks noChangeAspect="1"/>
           </p:cNvPicPr>
           <p:nvPr/>
         </p:nvPicPr>
         <p:blipFill>
-          <a:blip r:embed="rId7"/>
+          <a:blip r:embed="rId8"/>
           <a:stretch>
             <a:fillRect/>
           </a:stretch>
         </p:blipFill>
         <p:spPr>
           <a:xfrm>
-            <a:off x="4964735" y="5147615"/>
+            <a:off x="4964735" y="5284775"/>
             <a:ext cx="357530" cy="357530"/>
           </a:xfrm>
           <a:prstGeom prst="rect">
@@ -7456,13 +7366,13 @@
       </p:pic>
       <p:sp>
         <p:nvSpPr>
-          <p:cNvPr id="35" name="Text 25"/>
+          <p:cNvPr id="35" name="Text 24"/>
           <p:cNvSpPr txBox="1"/>
           <p:nvPr/>
         </p:nvSpPr>
         <p:spPr>
           <a:xfrm>
-            <a:off x="5806440" y="4526280"/>
+            <a:off x="5806440" y="4663440"/>
             <a:ext cx="5422392" cy="1600200"/>
           </a:xfrm>
           <a:prstGeom prst="rect">
@@ -7548,16 +7458,40 @@
           <a:chExt cx="0" cy="0"/>
         </a:xfrm>
       </p:grpSpPr>
-      <p:sp>
-        <p:nvSpPr>
-          <p:cNvPr id="3" name="Text 0"/>
+      <p:pic>
+        <p:nvPicPr>
+          <p:cNvPr id="3" name="Image 0" descr="Breaking Barriers at work">    </p:cNvPr>
+          <p:cNvPicPr>
+            <a:picLocks noChangeAspect="1"/>
+          </p:cNvPicPr>
+          <p:nvPr/>
+        </p:nvPicPr>
+        <p:blipFill>
+          <a:blip r:embed="rId1"/>
+          <a:stretch>
+            <a:fillRect/>
+          </a:stretch>
+        </p:blipFill>
+        <p:spPr>
+          <a:xfrm>
+            <a:off x="640080" y="274320"/>
+            <a:ext cx="1188720" cy="542536"/>
+          </a:xfrm>
+          <a:prstGeom prst="rect">
+            <a:avLst/>
+          </a:prstGeom>
+        </p:spPr>
+      </p:pic>
+      <p:sp>
+        <p:nvSpPr>
+          <p:cNvPr id="4" name="Text 0"/>
           <p:cNvSpPr txBox="1"/>
           <p:nvPr/>
         </p:nvSpPr>
         <p:spPr>
           <a:xfrm>
-            <a:off x="640080" y="384048"/>
-            <a:ext cx="4572000" cy="274320"/>
+            <a:off x="7891272" y="384048"/>
+            <a:ext cx="3657600" cy="274320"/>
           </a:xfrm>
           <a:prstGeom prst="rect">
             <a:avLst/>
@@ -7569,86 +7503,47 @@
           <a:bodyPr wrap="square" lIns="0" tIns="0" rIns="0" bIns="0" rtlCol="0" anchor="ctr"/>
           <a:lstStyle/>
           <a:p>
-            <a:pPr indent="0" marL="0">
-              <a:buNone/>
-            </a:pPr>
-            <a:r>
-              <a:rPr lang="en-US" sz="1050" b="1" spc="300" kern="0" dirty="0">
-                <a:solidFill>
-                  <a:srgbClr val="C68C6C"/>
+            <a:pPr algn="r" indent="0" marL="0">
+              <a:buNone/>
+            </a:pPr>
+            <a:r>
+              <a:rPr lang="en-US" sz="1100" i="1" dirty="0">
+                <a:solidFill>
+                  <a:srgbClr val="8A6A55"/>
+                </a:solidFill>
+                <a:latin typeface="Source Serif Pro" pitchFamily="34" charset="0"/>
+                <a:ea typeface="Source Serif Pro" pitchFamily="34" charset="-122"/>
+                <a:cs typeface="Source Serif Pro" pitchFamily="34" charset="-120"/>
+              </a:rPr>
+              <a:t>by Flor Pérsico</a:t>
+            </a:r>
+            <a:pPr algn="r" indent="0" marL="0">
+              <a:buNone/>
+            </a:pPr>
+            <a:r>
+              <a:rPr lang="en-US" sz="1100" dirty="0">
+                <a:solidFill>
+                  <a:srgbClr val="8A6A55"/>
                 </a:solidFill>
                 <a:latin typeface="Open Sans" pitchFamily="34" charset="0"/>
                 <a:ea typeface="Open Sans" pitchFamily="34" charset="-122"/>
                 <a:cs typeface="Open Sans" pitchFamily="34" charset="-120"/>
               </a:rPr>
-              <a:t>BREAKING BARRIERS · AT WORK</a:t>
-            </a:r>
-            <a:endParaRPr lang="en-US" sz="1050" dirty="0"/>
-          </a:p>
-        </p:txBody>
-      </p:sp>
-      <p:sp>
-        <p:nvSpPr>
-          <p:cNvPr id="4" name="Text 1"/>
+              <a:t>   ·   08 / 09</a:t>
+            </a:r>
+            <a:endParaRPr lang="en-US" sz="1100" dirty="0"/>
+          </a:p>
+        </p:txBody>
+      </p:sp>
+      <p:sp>
+        <p:nvSpPr>
+          <p:cNvPr id="5" name="Text 1"/>
           <p:cNvSpPr txBox="1"/>
           <p:nvPr/>
         </p:nvSpPr>
         <p:spPr>
           <a:xfrm>
-            <a:off x="7891272" y="384048"/>
-            <a:ext cx="3657600" cy="274320"/>
-          </a:xfrm>
-          <a:prstGeom prst="rect">
-            <a:avLst/>
-          </a:prstGeom>
-          <a:noFill/>
-          <a:ln/>
-        </p:spPr>
-        <p:txBody>
-          <a:bodyPr wrap="square" lIns="0" tIns="0" rIns="0" bIns="0" rtlCol="0" anchor="ctr"/>
-          <a:lstStyle/>
-          <a:p>
-            <a:pPr algn="r" indent="0" marL="0">
-              <a:buNone/>
-            </a:pPr>
-            <a:r>
-              <a:rPr lang="en-US" sz="1100" i="1" dirty="0">
-                <a:solidFill>
-                  <a:srgbClr val="8A6A55"/>
-                </a:solidFill>
-                <a:latin typeface="Source Serif Pro" pitchFamily="34" charset="0"/>
-                <a:ea typeface="Source Serif Pro" pitchFamily="34" charset="-122"/>
-                <a:cs typeface="Source Serif Pro" pitchFamily="34" charset="-120"/>
-              </a:rPr>
-              <a:t>by Flor Pérsico</a:t>
-            </a:r>
-            <a:pPr algn="r" indent="0" marL="0">
-              <a:buNone/>
-            </a:pPr>
-            <a:r>
-              <a:rPr lang="en-US" sz="1100" dirty="0">
-                <a:solidFill>
-                  <a:srgbClr val="8A6A55"/>
-                </a:solidFill>
-                <a:latin typeface="Open Sans" pitchFamily="34" charset="0"/>
-                <a:ea typeface="Open Sans" pitchFamily="34" charset="-122"/>
-                <a:cs typeface="Open Sans" pitchFamily="34" charset="-120"/>
-              </a:rPr>
-              <a:t>   ·   08 / 09</a:t>
-            </a:r>
-            <a:endParaRPr lang="en-US" sz="1100" dirty="0"/>
-          </a:p>
-        </p:txBody>
-      </p:sp>
-      <p:sp>
-        <p:nvSpPr>
-          <p:cNvPr id="5" name="Text 2"/>
-          <p:cNvSpPr txBox="1"/>
-          <p:nvPr/>
-        </p:nvSpPr>
-        <p:spPr>
-          <a:xfrm>
-            <a:off x="640080" y="1097280"/>
+            <a:off x="640080" y="1280160"/>
             <a:ext cx="3429000" cy="1783080"/>
           </a:xfrm>
           <a:prstGeom prst="rect">
@@ -7684,13 +7579,13 @@
       </p:sp>
       <p:sp>
         <p:nvSpPr>
-          <p:cNvPr id="6" name="Text 3"/>
+          <p:cNvPr id="6" name="Text 2"/>
           <p:cNvSpPr txBox="1"/>
           <p:nvPr/>
         </p:nvSpPr>
         <p:spPr>
           <a:xfrm>
-            <a:off x="640080" y="1892808"/>
+            <a:off x="640080" y="2075688"/>
             <a:ext cx="3291840" cy="731520"/>
           </a:xfrm>
           <a:prstGeom prst="rect">
@@ -7723,13 +7618,13 @@
       </p:sp>
       <p:sp>
         <p:nvSpPr>
-          <p:cNvPr id="7" name="Shape 4"/>
+          <p:cNvPr id="7" name="Shape 3"/>
           <p:cNvSpPr/>
           <p:nvPr/>
         </p:nvSpPr>
         <p:spPr>
           <a:xfrm>
-            <a:off x="4389120" y="1143000"/>
+            <a:off x="4389120" y="1280160"/>
             <a:ext cx="3442716" cy="3611880"/>
           </a:xfrm>
           <a:prstGeom prst="roundRect">
@@ -7757,13 +7652,13 @@
       </p:sp>
       <p:sp>
         <p:nvSpPr>
-          <p:cNvPr id="8" name="Text 5"/>
+          <p:cNvPr id="8" name="Text 4"/>
           <p:cNvSpPr txBox="1"/>
           <p:nvPr/>
         </p:nvSpPr>
         <p:spPr>
           <a:xfrm>
-            <a:off x="4754880" y="1417320"/>
+            <a:off x="4754880" y="1554480"/>
             <a:ext cx="2711196" cy="502920"/>
           </a:xfrm>
           <a:prstGeom prst="rect">
@@ -7796,13 +7691,13 @@
       </p:sp>
       <p:sp>
         <p:nvSpPr>
-          <p:cNvPr id="9" name="Text 6"/>
+          <p:cNvPr id="9" name="Text 5"/>
           <p:cNvSpPr txBox="1"/>
           <p:nvPr/>
         </p:nvSpPr>
         <p:spPr>
           <a:xfrm>
-            <a:off x="4754880" y="2057400"/>
+            <a:off x="4754880" y="2194560"/>
             <a:ext cx="2802636" cy="2514600"/>
           </a:xfrm>
           <a:prstGeom prst="rect">
@@ -7923,13 +7818,13 @@
       </p:sp>
       <p:sp>
         <p:nvSpPr>
-          <p:cNvPr id="10" name="Shape 7"/>
+          <p:cNvPr id="10" name="Shape 6"/>
           <p:cNvSpPr/>
           <p:nvPr/>
         </p:nvSpPr>
         <p:spPr>
           <a:xfrm>
-            <a:off x="8106156" y="1143000"/>
+            <a:off x="8106156" y="1280160"/>
             <a:ext cx="3442716" cy="3611880"/>
           </a:xfrm>
           <a:prstGeom prst="roundRect">
@@ -7957,13 +7852,13 @@
       </p:sp>
       <p:sp>
         <p:nvSpPr>
-          <p:cNvPr id="11" name="Text 8"/>
+          <p:cNvPr id="11" name="Text 7"/>
           <p:cNvSpPr txBox="1"/>
           <p:nvPr/>
         </p:nvSpPr>
         <p:spPr>
           <a:xfrm>
-            <a:off x="8471916" y="1417320"/>
+            <a:off x="8471916" y="1554480"/>
             <a:ext cx="2711196" cy="502920"/>
           </a:xfrm>
           <a:prstGeom prst="rect">
@@ -7996,13 +7891,13 @@
       </p:sp>
       <p:sp>
         <p:nvSpPr>
-          <p:cNvPr id="12" name="Text 9"/>
+          <p:cNvPr id="12" name="Text 8"/>
           <p:cNvSpPr txBox="1"/>
           <p:nvPr/>
         </p:nvSpPr>
         <p:spPr>
           <a:xfrm>
-            <a:off x="8471916" y="2057400"/>
+            <a:off x="8471916" y="2194560"/>
             <a:ext cx="2802636" cy="2514600"/>
           </a:xfrm>
           <a:prstGeom prst="rect">
@@ -8081,13 +7976,13 @@
       </p:sp>
       <p:sp>
         <p:nvSpPr>
-          <p:cNvPr id="13" name="Shape 10"/>
+          <p:cNvPr id="13" name="Shape 9"/>
           <p:cNvSpPr/>
           <p:nvPr/>
         </p:nvSpPr>
         <p:spPr>
           <a:xfrm>
-            <a:off x="4389120" y="5029200"/>
+            <a:off x="4389120" y="5166360"/>
             <a:ext cx="7159752" cy="1051560"/>
           </a:xfrm>
           <a:prstGeom prst="roundRect">
@@ -8115,13 +8010,13 @@
       </p:sp>
       <p:sp>
         <p:nvSpPr>
-          <p:cNvPr id="14" name="Shape 11"/>
+          <p:cNvPr id="14" name="Shape 10"/>
           <p:cNvSpPr/>
           <p:nvPr/>
         </p:nvSpPr>
         <p:spPr>
           <a:xfrm>
-            <a:off x="4754880" y="5230368"/>
+            <a:off x="4754880" y="5367528"/>
             <a:ext cx="640080" cy="640080"/>
           </a:xfrm>
           <a:prstGeom prst="ellipse">
@@ -8140,21 +8035,21 @@
       </p:sp>
       <p:pic>
         <p:nvPicPr>
-          <p:cNvPr id="15" name="Image 0" descr="preencoded.png">    </p:cNvPr>
+          <p:cNvPr id="15" name="Image 1" descr="preencoded.png">    </p:cNvPr>
           <p:cNvPicPr>
             <a:picLocks noChangeAspect="1"/>
           </p:cNvPicPr>
           <p:nvPr/>
         </p:nvPicPr>
         <p:blipFill>
-          <a:blip r:embed="rId1"/>
+          <a:blip r:embed="rId2"/>
           <a:stretch>
             <a:fillRect/>
           </a:stretch>
         </p:blipFill>
         <p:spPr>
           <a:xfrm>
-            <a:off x="4927702" y="5403190"/>
+            <a:off x="4927702" y="5540350"/>
             <a:ext cx="294437" cy="294437"/>
           </a:xfrm>
           <a:prstGeom prst="rect">
@@ -8164,13 +8059,13 @@
       </p:pic>
       <p:sp>
         <p:nvSpPr>
-          <p:cNvPr id="16" name="Text 12"/>
+          <p:cNvPr id="16" name="Text 11"/>
           <p:cNvSpPr txBox="1"/>
           <p:nvPr/>
         </p:nvSpPr>
         <p:spPr>
           <a:xfrm>
-            <a:off x="5623560" y="5029200"/>
+            <a:off x="5623560" y="5166360"/>
             <a:ext cx="5605272" cy="1051560"/>
           </a:xfrm>
           <a:prstGeom prst="rect">
@@ -8247,16 +8142,40 @@
           <a:chExt cx="0" cy="0"/>
         </a:xfrm>
       </p:grpSpPr>
-      <p:sp>
-        <p:nvSpPr>
-          <p:cNvPr id="3" name="Text 0"/>
+      <p:pic>
+        <p:nvPicPr>
+          <p:cNvPr id="3" name="Image 0" descr="Breaking Barriers at work">    </p:cNvPr>
+          <p:cNvPicPr>
+            <a:picLocks noChangeAspect="1"/>
+          </p:cNvPicPr>
+          <p:nvPr/>
+        </p:nvPicPr>
+        <p:blipFill>
+          <a:blip r:embed="rId1"/>
+          <a:stretch>
+            <a:fillRect/>
+          </a:stretch>
+        </p:blipFill>
+        <p:spPr>
+          <a:xfrm>
+            <a:off x="640080" y="274320"/>
+            <a:ext cx="1188720" cy="542536"/>
+          </a:xfrm>
+          <a:prstGeom prst="rect">
+            <a:avLst/>
+          </a:prstGeom>
+        </p:spPr>
+      </p:pic>
+      <p:sp>
+        <p:nvSpPr>
+          <p:cNvPr id="4" name="Text 0"/>
           <p:cNvSpPr txBox="1"/>
           <p:nvPr/>
         </p:nvSpPr>
         <p:spPr>
           <a:xfrm>
-            <a:off x="640080" y="384048"/>
-            <a:ext cx="4572000" cy="274320"/>
+            <a:off x="7891272" y="384048"/>
+            <a:ext cx="3657600" cy="274320"/>
           </a:xfrm>
           <a:prstGeom prst="rect">
             <a:avLst/>
@@ -8268,11 +8187,25 @@
           <a:bodyPr wrap="square" lIns="0" tIns="0" rIns="0" bIns="0" rtlCol="0" anchor="ctr"/>
           <a:lstStyle/>
           <a:p>
-            <a:pPr indent="0" marL="0">
-              <a:buNone/>
-            </a:pPr>
-            <a:r>
-              <a:rPr lang="en-US" sz="1050" b="1" spc="300" kern="0" dirty="0">
+            <a:pPr algn="r" indent="0" marL="0">
+              <a:buNone/>
+            </a:pPr>
+            <a:r>
+              <a:rPr lang="en-US" sz="1100" i="1" dirty="0">
+                <a:solidFill>
+                  <a:srgbClr val="3F1E0D"/>
+                </a:solidFill>
+                <a:latin typeface="Source Serif Pro" pitchFamily="34" charset="0"/>
+                <a:ea typeface="Source Serif Pro" pitchFamily="34" charset="-122"/>
+                <a:cs typeface="Source Serif Pro" pitchFamily="34" charset="-120"/>
+              </a:rPr>
+              <a:t>by Flor Pérsico</a:t>
+            </a:r>
+            <a:pPr algn="r" indent="0" marL="0">
+              <a:buNone/>
+            </a:pPr>
+            <a:r>
+              <a:rPr lang="en-US" sz="1100" dirty="0">
                 <a:solidFill>
                   <a:srgbClr val="3F1E0D"/>
                 </a:solidFill>
@@ -8280,74 +8213,21 @@
                 <a:ea typeface="Open Sans" pitchFamily="34" charset="-122"/>
                 <a:cs typeface="Open Sans" pitchFamily="34" charset="-120"/>
               </a:rPr>
-              <a:t>BREAKING BARRIERS · AT WORK</a:t>
-            </a:r>
-            <a:endParaRPr lang="en-US" sz="1050" dirty="0"/>
-          </a:p>
-        </p:txBody>
-      </p:sp>
-      <p:sp>
-        <p:nvSpPr>
-          <p:cNvPr id="4" name="Text 1"/>
+              <a:t>   ·   09 / 09</a:t>
+            </a:r>
+            <a:endParaRPr lang="en-US" sz="1100" dirty="0"/>
+          </a:p>
+        </p:txBody>
+      </p:sp>
+      <p:sp>
+        <p:nvSpPr>
+          <p:cNvPr id="5" name="Text 1"/>
           <p:cNvSpPr txBox="1"/>
           <p:nvPr/>
         </p:nvSpPr>
         <p:spPr>
           <a:xfrm>
-            <a:off x="7891272" y="384048"/>
-            <a:ext cx="3657600" cy="274320"/>
-          </a:xfrm>
-          <a:prstGeom prst="rect">
-            <a:avLst/>
-          </a:prstGeom>
-          <a:noFill/>
-          <a:ln/>
-        </p:spPr>
-        <p:txBody>
-          <a:bodyPr wrap="square" lIns="0" tIns="0" rIns="0" bIns="0" rtlCol="0" anchor="ctr"/>
-          <a:lstStyle/>
-          <a:p>
-            <a:pPr algn="r" indent="0" marL="0">
-              <a:buNone/>
-            </a:pPr>
-            <a:r>
-              <a:rPr lang="en-US" sz="1100" i="1" dirty="0">
-                <a:solidFill>
-                  <a:srgbClr val="3F1E0D"/>
-                </a:solidFill>
-                <a:latin typeface="Source Serif Pro" pitchFamily="34" charset="0"/>
-                <a:ea typeface="Source Serif Pro" pitchFamily="34" charset="-122"/>
-                <a:cs typeface="Source Serif Pro" pitchFamily="34" charset="-120"/>
-              </a:rPr>
-              <a:t>by Flor Pérsico</a:t>
-            </a:r>
-            <a:pPr algn="r" indent="0" marL="0">
-              <a:buNone/>
-            </a:pPr>
-            <a:r>
-              <a:rPr lang="en-US" sz="1100" dirty="0">
-                <a:solidFill>
-                  <a:srgbClr val="3F1E0D"/>
-                </a:solidFill>
-                <a:latin typeface="Open Sans" pitchFamily="34" charset="0"/>
-                <a:ea typeface="Open Sans" pitchFamily="34" charset="-122"/>
-                <a:cs typeface="Open Sans" pitchFamily="34" charset="-120"/>
-              </a:rPr>
-              <a:t>   ·   09 / 09</a:t>
-            </a:r>
-            <a:endParaRPr lang="en-US" sz="1100" dirty="0"/>
-          </a:p>
-        </p:txBody>
-      </p:sp>
-      <p:sp>
-        <p:nvSpPr>
-          <p:cNvPr id="5" name="Text 2"/>
-          <p:cNvSpPr txBox="1"/>
-          <p:nvPr/>
-        </p:nvSpPr>
-        <p:spPr>
-          <a:xfrm>
-            <a:off x="640080" y="1097280"/>
+            <a:off x="640080" y="1280160"/>
             <a:ext cx="3429000" cy="1783080"/>
           </a:xfrm>
           <a:prstGeom prst="rect">
@@ -8383,13 +8263,13 @@
       </p:sp>
       <p:sp>
         <p:nvSpPr>
-          <p:cNvPr id="6" name="Text 3"/>
+          <p:cNvPr id="6" name="Text 2"/>
           <p:cNvSpPr txBox="1"/>
           <p:nvPr/>
         </p:nvSpPr>
         <p:spPr>
           <a:xfrm>
-            <a:off x="640080" y="2414016"/>
+            <a:off x="640080" y="2596896"/>
             <a:ext cx="3291840" cy="731520"/>
           </a:xfrm>
           <a:prstGeom prst="rect">
@@ -8422,13 +8302,13 @@
       </p:sp>
       <p:sp>
         <p:nvSpPr>
-          <p:cNvPr id="7" name="Shape 4"/>
+          <p:cNvPr id="7" name="Shape 3"/>
           <p:cNvSpPr/>
           <p:nvPr/>
         </p:nvSpPr>
         <p:spPr>
           <a:xfrm>
-            <a:off x="4389120" y="1143000"/>
+            <a:off x="4389120" y="1280160"/>
             <a:ext cx="7159752" cy="1051560"/>
           </a:xfrm>
           <a:prstGeom prst="roundRect">
@@ -8456,13 +8336,13 @@
       </p:sp>
       <p:sp>
         <p:nvSpPr>
-          <p:cNvPr id="8" name="Shape 5"/>
+          <p:cNvPr id="8" name="Shape 4"/>
           <p:cNvSpPr/>
           <p:nvPr/>
         </p:nvSpPr>
         <p:spPr>
           <a:xfrm>
-            <a:off x="4709160" y="1348740"/>
+            <a:off x="4709160" y="1485900"/>
             <a:ext cx="640080" cy="640080"/>
           </a:xfrm>
           <a:prstGeom prst="ellipse">
@@ -8481,21 +8361,21 @@
       </p:sp>
       <p:pic>
         <p:nvPicPr>
-          <p:cNvPr id="9" name="Image 0" descr="preencoded.png">    </p:cNvPr>
+          <p:cNvPr id="9" name="Image 1" descr="preencoded.png">    </p:cNvPr>
           <p:cNvPicPr>
             <a:picLocks noChangeAspect="1"/>
           </p:cNvPicPr>
           <p:nvPr/>
         </p:nvPicPr>
         <p:blipFill>
-          <a:blip r:embed="rId1"/>
+          <a:blip r:embed="rId2"/>
           <a:stretch>
             <a:fillRect/>
           </a:stretch>
         </p:blipFill>
         <p:spPr>
           <a:xfrm>
-            <a:off x="4881982" y="1521562"/>
+            <a:off x="4881982" y="1658722"/>
             <a:ext cx="294437" cy="294437"/>
           </a:xfrm>
           <a:prstGeom prst="rect">
@@ -8505,13 +8385,13 @@
       </p:pic>
       <p:sp>
         <p:nvSpPr>
-          <p:cNvPr id="10" name="Text 6"/>
+          <p:cNvPr id="10" name="Text 5"/>
           <p:cNvSpPr txBox="1"/>
           <p:nvPr/>
         </p:nvSpPr>
         <p:spPr>
           <a:xfrm>
-            <a:off x="5623560" y="1143000"/>
+            <a:off x="5623560" y="1280160"/>
             <a:ext cx="5605272" cy="1051560"/>
           </a:xfrm>
           <a:prstGeom prst="rect">
@@ -8572,13 +8452,13 @@
       </p:sp>
       <p:sp>
         <p:nvSpPr>
-          <p:cNvPr id="11" name="Shape 7"/>
+          <p:cNvPr id="11" name="Shape 6"/>
           <p:cNvSpPr/>
           <p:nvPr/>
         </p:nvSpPr>
         <p:spPr>
           <a:xfrm>
-            <a:off x="4389120" y="2395728"/>
+            <a:off x="4389120" y="2532888"/>
             <a:ext cx="7159752" cy="1051560"/>
           </a:xfrm>
           <a:prstGeom prst="roundRect">
@@ -8606,13 +8486,13 @@
       </p:sp>
       <p:sp>
         <p:nvSpPr>
-          <p:cNvPr id="12" name="Shape 8"/>
+          <p:cNvPr id="12" name="Shape 7"/>
           <p:cNvSpPr/>
           <p:nvPr/>
         </p:nvSpPr>
         <p:spPr>
           <a:xfrm>
-            <a:off x="4709160" y="2601468"/>
+            <a:off x="4709160" y="2738628"/>
             <a:ext cx="640080" cy="640080"/>
           </a:xfrm>
           <a:prstGeom prst="ellipse">
@@ -8631,21 +8511,21 @@
       </p:sp>
       <p:pic>
         <p:nvPicPr>
-          <p:cNvPr id="13" name="Image 1" descr="preencoded.png">    </p:cNvPr>
+          <p:cNvPr id="13" name="Image 2" descr="preencoded.png">    </p:cNvPr>
           <p:cNvPicPr>
             <a:picLocks noChangeAspect="1"/>
           </p:cNvPicPr>
           <p:nvPr/>
         </p:nvPicPr>
         <p:blipFill>
-          <a:blip r:embed="rId2"/>
+          <a:blip r:embed="rId3"/>
           <a:stretch>
             <a:fillRect/>
           </a:stretch>
         </p:blipFill>
         <p:spPr>
           <a:xfrm>
-            <a:off x="4881982" y="2774290"/>
+            <a:off x="4881982" y="2911450"/>
             <a:ext cx="294437" cy="294437"/>
           </a:xfrm>
           <a:prstGeom prst="rect">
@@ -8655,13 +8535,13 @@
       </p:pic>
       <p:sp>
         <p:nvSpPr>
-          <p:cNvPr id="14" name="Text 9"/>
+          <p:cNvPr id="14" name="Text 8"/>
           <p:cNvSpPr txBox="1"/>
           <p:nvPr/>
         </p:nvSpPr>
         <p:spPr>
           <a:xfrm>
-            <a:off x="5623560" y="2395728"/>
+            <a:off x="5623560" y="2532888"/>
             <a:ext cx="5605272" cy="1051560"/>
           </a:xfrm>
           <a:prstGeom prst="rect">
@@ -8694,13 +8574,13 @@
       </p:sp>
       <p:sp>
         <p:nvSpPr>
-          <p:cNvPr id="15" name="Shape 10"/>
+          <p:cNvPr id="15" name="Shape 9"/>
           <p:cNvSpPr/>
           <p:nvPr/>
         </p:nvSpPr>
         <p:spPr>
           <a:xfrm>
-            <a:off x="4389120" y="3648456"/>
+            <a:off x="4389120" y="3785616"/>
             <a:ext cx="7159752" cy="1051560"/>
           </a:xfrm>
           <a:prstGeom prst="roundRect">
@@ -8728,13 +8608,13 @@
       </p:sp>
       <p:sp>
         <p:nvSpPr>
-          <p:cNvPr id="16" name="Shape 11"/>
+          <p:cNvPr id="16" name="Shape 10"/>
           <p:cNvSpPr/>
           <p:nvPr/>
         </p:nvSpPr>
         <p:spPr>
           <a:xfrm>
-            <a:off x="4709160" y="3854196"/>
+            <a:off x="4709160" y="3991356"/>
             <a:ext cx="640080" cy="640080"/>
           </a:xfrm>
           <a:prstGeom prst="ellipse">
@@ -8753,21 +8633,21 @@
       </p:sp>
       <p:pic>
         <p:nvPicPr>
-          <p:cNvPr id="17" name="Image 2" descr="preencoded.png">    </p:cNvPr>
+          <p:cNvPr id="17" name="Image 3" descr="preencoded.png">    </p:cNvPr>
           <p:cNvPicPr>
             <a:picLocks noChangeAspect="1"/>
           </p:cNvPicPr>
           <p:nvPr/>
         </p:nvPicPr>
         <p:blipFill>
-          <a:blip r:embed="rId3"/>
+          <a:blip r:embed="rId4"/>
           <a:stretch>
             <a:fillRect/>
           </a:stretch>
         </p:blipFill>
         <p:spPr>
           <a:xfrm>
-            <a:off x="4881982" y="4027018"/>
+            <a:off x="4881982" y="4164178"/>
             <a:ext cx="294437" cy="294437"/>
           </a:xfrm>
           <a:prstGeom prst="rect">
@@ -8777,13 +8657,13 @@
       </p:pic>
       <p:sp>
         <p:nvSpPr>
-          <p:cNvPr id="18" name="Text 12"/>
+          <p:cNvPr id="18" name="Text 11"/>
           <p:cNvSpPr txBox="1"/>
           <p:nvPr/>
         </p:nvSpPr>
         <p:spPr>
           <a:xfrm>
-            <a:off x="5623560" y="3648456"/>
+            <a:off x="5623560" y="3785616"/>
             <a:ext cx="5605272" cy="1051560"/>
           </a:xfrm>
           <a:prstGeom prst="rect">
@@ -8830,13 +8710,13 @@
       </p:sp>
       <p:sp>
         <p:nvSpPr>
-          <p:cNvPr id="19" name="Shape 13"/>
+          <p:cNvPr id="19" name="Shape 12"/>
           <p:cNvSpPr/>
           <p:nvPr/>
         </p:nvSpPr>
         <p:spPr>
           <a:xfrm>
-            <a:off x="4389120" y="4901184"/>
+            <a:off x="4389120" y="5038344"/>
             <a:ext cx="7159752" cy="1051560"/>
           </a:xfrm>
           <a:prstGeom prst="roundRect">
@@ -8864,13 +8744,13 @@
       </p:sp>
       <p:sp>
         <p:nvSpPr>
-          <p:cNvPr id="20" name="Shape 14"/>
+          <p:cNvPr id="20" name="Shape 13"/>
           <p:cNvSpPr/>
           <p:nvPr/>
         </p:nvSpPr>
         <p:spPr>
           <a:xfrm>
-            <a:off x="4709160" y="5106924"/>
+            <a:off x="4709160" y="5244084"/>
             <a:ext cx="640080" cy="640080"/>
           </a:xfrm>
           <a:prstGeom prst="ellipse">
@@ -8889,21 +8769,21 @@
       </p:sp>
       <p:pic>
         <p:nvPicPr>
-          <p:cNvPr id="21" name="Image 3" descr="preencoded.png">    </p:cNvPr>
+          <p:cNvPr id="21" name="Image 4" descr="preencoded.png">    </p:cNvPr>
           <p:cNvPicPr>
             <a:picLocks noChangeAspect="1"/>
           </p:cNvPicPr>
           <p:nvPr/>
         </p:nvPicPr>
         <p:blipFill>
-          <a:blip r:embed="rId4"/>
+          <a:blip r:embed="rId5"/>
           <a:stretch>
             <a:fillRect/>
           </a:stretch>
         </p:blipFill>
         <p:spPr>
           <a:xfrm>
-            <a:off x="4881982" y="5279746"/>
+            <a:off x="4881982" y="5416906"/>
             <a:ext cx="294437" cy="294437"/>
           </a:xfrm>
           <a:prstGeom prst="rect">
@@ -8913,13 +8793,13 @@
       </p:pic>
       <p:sp>
         <p:nvSpPr>
-          <p:cNvPr id="22" name="Text 15"/>
+          <p:cNvPr id="22" name="Text 14"/>
           <p:cNvSpPr txBox="1"/>
           <p:nvPr/>
         </p:nvSpPr>
         <p:spPr>
           <a:xfrm>
-            <a:off x="5623560" y="4901184"/>
+            <a:off x="5623560" y="5038344"/>
             <a:ext cx="5605272" cy="1051560"/>
           </a:xfrm>
           <a:prstGeom prst="rect">

--- a/onboarding/ONB02_Como_vamos_a_trabajar_juntas.pptx
+++ b/onboarding/ONB02_Como_vamos_a_trabajar_juntas.pptx
@@ -783,7 +783,7 @@
             <a:r>
               <a:rPr lang="en-US" dirty="0"/>
               <a:t>También quiero que sepas que durante AT WORK no estás sola entre una sesión y la siguiente.
-Si te surge una duda, quieres compartir algo, necesitas feedback o simplemente quieres contarme una situación que pasó en tu trabajo, puedes hacerlo dentro de la comunidad de WhatsApp.
+Si te surge una duda, quieres compartir algo, necesitas feedback o simplemente quieres contarme una situación que pasó en tu trabajo, puedes hacerlo dentro de AT WORK Community, nuestra comunidad de WhatsApp.
 La comunidad va a ser nuestro espacio principal de comunicación durante el programa. Ahí puedes compartir prácticas, hacer preguntas, pedirme feedback, contar un avance o algo que aprendiste durante la semana.
 Si se trata de un tema administrativo o de algo que prefieres mantener en privado, ahí sí puedes escribirme directamente.
 Y cuando una situación necesita más contexto, análisis o trabajo en profundidad, la llevamos a nuestra sesión 1:1 para poder trabajarla bien.
@@ -4297,7 +4297,7 @@
                 <a:ea typeface="Source Serif Pro" pitchFamily="34" charset="-122"/>
                 <a:cs typeface="Source Serif Pro" pitchFamily="34" charset="-120"/>
               </a:rPr>
-              <a:t>Comunidad de WhatsApp</a:t>
+              <a:t>AT WORK Community</a:t>
             </a:r>
             <a:endParaRPr lang="en-US" sz="1700" dirty="0"/>
           </a:p>
@@ -4336,7 +4336,7 @@
                 <a:ea typeface="Open Sans" pitchFamily="34" charset="-122"/>
                 <a:cs typeface="Open Sans" pitchFamily="34" charset="-120"/>
               </a:rPr>
-              <a:t>nuestro espacio principal</a:t>
+              <a:t>en WhatsApp · nuestro espacio principal</a:t>
             </a:r>
             <a:endParaRPr lang="en-US" sz="1050" dirty="0"/>
           </a:p>
